--- a/Capstone.pptx
+++ b/Capstone.pptx
@@ -12,6 +12,7 @@
     <p:sldId id="256" r:id="rId7"/>
     <p:sldId id="257" r:id="rId8"/>
     <p:sldId id="258" r:id="rId9"/>
+    <p:sldId id="283" r:id="rId34"/>
     <p:sldId id="259" r:id="rId10"/>
     <p:sldId id="260" r:id="rId11"/>
     <p:sldId id="261" r:id="rId12"/>
@@ -3722,6 +3723,88 @@
               <a:t/>
             </a:r>
             <a:endParaRPr/>
+          </a:p>
+        </p:txBody>
+      </p:sp>
+    </p:spTree>
+  </p:cSld>
+  <p:clrMapOvr>
+    <a:masterClrMapping/>
+  </p:clrMapOvr>
+</p:notes>
+</file>
+
+<file path=ppt/notesSlides/notesSlide28.xml><?xml version="1.0" encoding="utf-8"?>
+<p:notes xmlns:a="http://schemas.openxmlformats.org/drawingml/2006/main" xmlns:p="http://schemas.openxmlformats.org/presentationml/2006/main" xmlns:r="http://schemas.openxmlformats.org/officeDocument/2006/relationships">
+  <p:cSld>
+    <p:spTree>
+      <p:nvGrpSpPr>
+        <p:cNvPr id="1" name=""/>
+        <p:cNvGrpSpPr/>
+        <p:nvPr/>
+      </p:nvGrpSpPr>
+      <p:grpSpPr>
+        <a:xfrm>
+          <a:off x="0" y="0"/>
+          <a:ext cx="0" cy="0"/>
+          <a:chOff x="0" y="0"/>
+          <a:chExt cx="0" cy="0"/>
+        </a:xfrm>
+      </p:grpSpPr>
+      <p:sp>
+        <p:nvSpPr>
+          <p:cNvPr id="2" name="Slide Image Placeholder 1"/>
+          <p:cNvSpPr>
+            <a:spLocks noGrp="1"/>
+          </p:cNvSpPr>
+          <p:nvPr>
+            <p:ph type="sldImg" idx="2"/>
+          </p:nvPr>
+        </p:nvSpPr>
+        <p:spPr/>
+      </p:sp>
+      <p:sp>
+        <p:nvSpPr>
+          <p:cNvPr id="3" name="Notes Placeholder 2"/>
+          <p:cNvSpPr>
+            <a:spLocks noGrp="1"/>
+          </p:cNvSpPr>
+          <p:nvPr>
+            <p:ph type="body" idx="1"/>
+          </p:nvPr>
+        </p:nvSpPr>
+        <p:spPr/>
+        <p:txBody>
+          <a:bodyPr/>
+          <a:lstStyle/>
+          <a:p>
+            <a:r>
+              <a:t>This single slide is the whole project in one picture — worth pausing on, because everything that follows is a detail of one of these boxes.</a:t>
+            </a:r>
+          </a:p>
+          <a:p/>
+          <a:p>
+            <a:r>
+              <a:t>Read it left to right. We start with the raw e-commerce dataset, 541,909 rows. Preprocessing is two decisions: drop rows with no customer ID, because a guest checkout cannot be attributed to a person, and filter out returns where quantity is not positive. That leaves roughly 398,000 clean transaction rows.</a:t>
+            </a:r>
+          </a:p>
+          <a:p/>
+          <a:p>
+            <a:r>
+              <a:t>Feature engineering collapses those transactions into one row per customer with three numbers — Recency, Frequency, Monetary. Because monetary value is severely skewed we apply log1p and then StandardScaler before any modelling.</a:t>
+            </a:r>
+          </a:p>
+          <a:p/>
+          <a:p>
+            <a:r>
+              <a:t>That feeds two branches. Downward, clustering: we use the elbow method and silhouette analysis to settle on K equals four, giving Champions, At-Risk Mid-Value, New or Occasional, and Hibernating. Rightward, churn prediction: we label a customer churned if recency exceeds ninety days and fit a logistic regression that outputs a churn probability between zero and one.</a:t>
+            </a:r>
+          </a:p>
+          <a:p/>
+          <a:p>
+            <a:r>
+              <a:t>Both outputs land in the delivery layer at the bottom — the FastAPI backend, which serves the results as JSON, and the React dashboard that consumes them. Keep the spoken summary to those two; there is no need to walk through the mobile client unless someone asks about it directly.</a:t>
+            </a:r>
           </a:p>
         </p:txBody>
       </p:sp>
@@ -20499,6 +20582,768 @@
   <p:cSld>
     <p:spTree>
       <p:nvGrpSpPr>
+        <p:cNvPr id="363" name="Shape 363"/>
+        <p:cNvGrpSpPr/>
+        <p:nvPr/>
+      </p:nvGrpSpPr>
+      <p:grpSpPr>
+        <a:xfrm>
+          <a:off x="0" y="0"/>
+          <a:ext cx="0" cy="0"/>
+          <a:chOff x="0" y="0"/>
+          <a:chExt cx="0" cy="0"/>
+        </a:xfrm>
+      </p:grpSpPr>
+      <p:sp>
+        <p:nvSpPr>
+          <p:cNvPr id="364" name="Google Shape;364;p33"/>
+          <p:cNvSpPr/>
+          <p:nvPr/>
+        </p:nvSpPr>
+        <p:spPr>
+          <a:xfrm>
+            <a:off x="0" y="0"/>
+            <a:ext cx="9144015" cy="5143500"/>
+          </a:xfrm>
+          <a:prstGeom prst="rect">
+            <a:avLst/>
+          </a:prstGeom>
+          <a:solidFill>
+            <a:srgbClr val="FAF8F4"/>
+          </a:solidFill>
+          <a:ln>
+            <a:noFill/>
+          </a:ln>
+        </p:spPr>
+        <p:txBody>
+          <a:bodyPr anchorCtr="0" anchor="ctr" bIns="34275" lIns="68575" spcFirstLastPara="1" rIns="68575" wrap="square" tIns="34275">
+            <a:noAutofit/>
+          </a:bodyPr>
+          <a:lstStyle/>
+          <a:p>
+            <a:pPr indent="0" lvl="0" marL="0" marR="0" rtl="0" algn="ctr">
+              <a:spcBef>
+                <a:spcPts val="0"/>
+              </a:spcBef>
+              <a:spcAft>
+                <a:spcPts val="0"/>
+              </a:spcAft>
+              <a:buNone/>
+            </a:pPr>
+            <a:r>
+              <a:t/>
+            </a:r>
+            <a:endParaRPr sz="1400">
+              <a:solidFill>
+                <a:schemeClr val="dk1"/>
+              </a:solidFill>
+              <a:latin typeface="Calibri"/>
+              <a:ea typeface="Calibri"/>
+              <a:cs typeface="Calibri"/>
+              <a:sym typeface="Calibri"/>
+            </a:endParaRPr>
+          </a:p>
+        </p:txBody>
+      </p:sp>
+      <p:sp>
+        <p:nvSpPr>
+          <p:cNvPr id="365" name="Google Shape;365;p33"/>
+          <p:cNvSpPr txBox="1"/>
+          <p:nvPr/>
+        </p:nvSpPr>
+        <p:spPr>
+          <a:xfrm>
+            <a:off x="582946" y="425196"/>
+            <a:ext cx="7978124" cy="205740"/>
+          </a:xfrm>
+          <a:prstGeom prst="rect">
+            <a:avLst/>
+          </a:prstGeom>
+          <a:noFill/>
+          <a:ln>
+            <a:noFill/>
+          </a:ln>
+        </p:spPr>
+        <p:txBody>
+          <a:bodyPr anchorCtr="0" anchor="t" bIns="0" lIns="0" spcFirstLastPara="1" rIns="0" wrap="square" tIns="0">
+            <a:spAutoFit/>
+          </a:bodyPr>
+          <a:lstStyle/>
+          <a:p>
+            <a:pPr indent="0" lvl="0" marL="0" marR="0" rtl="0" algn="l">
+              <a:spcBef>
+                <a:spcPts val="0"/>
+              </a:spcBef>
+              <a:spcAft>
+                <a:spcPts val="0"/>
+              </a:spcAft>
+              <a:buNone/>
+            </a:pPr>
+            <a:r>
+              <a:rPr b="1" lang="en" sz="800">
+                <a:solidFill>
+                  <a:srgbClr val="B45309"/>
+                </a:solidFill>
+                <a:latin typeface="Consolas"/>
+                <a:ea typeface="Consolas"/>
+                <a:cs typeface="Consolas"/>
+                <a:sym typeface="Consolas"/>
+              </a:rPr>
+              <a:t>02  </a:t>
+            </a:r>
+            <a:r>
+              <a:rPr lang="en" sz="800">
+                <a:solidFill>
+                  <a:srgbClr val="6B6B6B"/>
+                </a:solidFill>
+                <a:latin typeface="Consolas"/>
+                <a:ea typeface="Consolas"/>
+                <a:cs typeface="Consolas"/>
+                <a:sym typeface="Consolas"/>
+              </a:rPr>
+              <a:t>MODEL SELECTION   ·   ELBOW, SILHOUETTE, AND A JUDGEMENT CALL</a:t>
+            </a:r>
+            <a:endParaRPr sz="1100"/>
+          </a:p>
+        </p:txBody>
+      </p:sp>
+      <p:sp>
+        <p:nvSpPr>
+          <p:cNvPr id="366" name="Google Shape;366;p33"/>
+          <p:cNvSpPr txBox="1"/>
+          <p:nvPr/>
+        </p:nvSpPr>
+        <p:spPr>
+          <a:xfrm>
+            <a:off x="582946" y="699516"/>
+            <a:ext cx="7978124" cy="514350"/>
+          </a:xfrm>
+          <a:prstGeom prst="rect">
+            <a:avLst/>
+          </a:prstGeom>
+          <a:noFill/>
+          <a:ln>
+            <a:noFill/>
+          </a:ln>
+        </p:spPr>
+        <p:txBody>
+          <a:bodyPr anchorCtr="0" anchor="t" bIns="0" lIns="0" spcFirstLastPara="1" rIns="0" wrap="square" tIns="0">
+            <a:spAutoFit/>
+          </a:bodyPr>
+          <a:lstStyle/>
+          <a:p>
+            <a:pPr indent="0" lvl="0" marL="0" marR="0" rtl="0" algn="l">
+              <a:lnSpc>
+                <a:spcPct val="100000"/>
+              </a:lnSpc>
+              <a:spcBef>
+                <a:spcPts val="0"/>
+              </a:spcBef>
+              <a:spcAft>
+                <a:spcPts val="0"/>
+              </a:spcAft>
+              <a:buNone/>
+            </a:pPr>
+            <a:r>
+              <a:rPr b="0" i="0" lang="en" sz="2400">
+                <a:solidFill>
+                  <a:srgbClr val="1A1A1A"/>
+                </a:solidFill>
+                <a:latin typeface="Georgia"/>
+                <a:ea typeface="Georgia"/>
+                <a:cs typeface="Georgia"/>
+                <a:sym typeface="Georgia"/>
+              </a:rPr>
+              <a:t>Why K = 4</a:t>
+            </a:r>
+            <a:endParaRPr sz="1100"/>
+          </a:p>
+        </p:txBody>
+      </p:sp>
+      <p:cxnSp>
+        <p:nvCxnSpPr>
+          <p:cNvPr id="367" name="Google Shape;367;p33"/>
+          <p:cNvCxnSpPr/>
+          <p:nvPr/>
+        </p:nvCxnSpPr>
+        <p:spPr>
+          <a:xfrm>
+            <a:off x="582946" y="1248156"/>
+            <a:ext cx="7978124" cy="0"/>
+          </a:xfrm>
+          <a:prstGeom prst="straightConnector1">
+            <a:avLst/>
+          </a:prstGeom>
+          <a:noFill/>
+          <a:ln cap="flat" cmpd="sng" w="9525">
+            <a:solidFill>
+              <a:srgbClr val="D8D4CC"/>
+            </a:solidFill>
+            <a:prstDash val="solid"/>
+            <a:round/>
+            <a:headEnd len="sm" w="sm" type="none"/>
+            <a:tailEnd len="sm" w="sm" type="none"/>
+          </a:ln>
+          <a:effectLst>
+            <a:outerShdw blurRad="40000" rotWithShape="0" dir="5400000" dist="20000">
+              <a:srgbClr val="000000">
+                <a:alpha val="38039"/>
+              </a:srgbClr>
+            </a:outerShdw>
+          </a:effectLst>
+        </p:spPr>
+      </p:cxnSp>
+      <p:pic>
+        <p:nvPicPr>
+          <p:cNvPr descr="elbow.png" id="368" name="Google Shape;368;p33"/>
+          <p:cNvPicPr preferRelativeResize="0"/>
+          <p:nvPr/>
+        </p:nvPicPr>
+        <p:blipFill rotWithShape="1">
+          <a:blip r:embed="rId3">
+            <a:alphaModFix/>
+          </a:blip>
+          <a:srcRect b="0" l="0" r="0" t="0"/>
+          <a:stretch/>
+        </p:blipFill>
+        <p:spPr>
+          <a:xfrm>
+            <a:off x="582946" y="1385316"/>
+            <a:ext cx="3703320" cy="1706999"/>
+          </a:xfrm>
+          <a:prstGeom prst="rect">
+            <a:avLst/>
+          </a:prstGeom>
+          <a:noFill/>
+          <a:ln>
+            <a:noFill/>
+          </a:ln>
+        </p:spPr>
+      </p:pic>
+      <p:pic>
+        <p:nvPicPr>
+          <p:cNvPr descr="silhouette.png" id="369" name="Google Shape;369;p33"/>
+          <p:cNvPicPr preferRelativeResize="0"/>
+          <p:nvPr/>
+        </p:nvPicPr>
+        <p:blipFill rotWithShape="1">
+          <a:blip r:embed="rId4">
+            <a:alphaModFix/>
+          </a:blip>
+          <a:srcRect b="0" l="0" r="0" t="0"/>
+          <a:stretch/>
+        </p:blipFill>
+        <p:spPr>
+          <a:xfrm>
+            <a:off x="4526401" y="1385316"/>
+            <a:ext cx="3703320" cy="1706999"/>
+          </a:xfrm>
+          <a:prstGeom prst="rect">
+            <a:avLst/>
+          </a:prstGeom>
+          <a:noFill/>
+          <a:ln>
+            <a:noFill/>
+          </a:ln>
+        </p:spPr>
+      </p:pic>
+      <p:sp>
+        <p:nvSpPr>
+          <p:cNvPr id="370" name="Google Shape;370;p33"/>
+          <p:cNvSpPr/>
+          <p:nvPr/>
+        </p:nvSpPr>
+        <p:spPr>
+          <a:xfrm>
+            <a:off x="582946" y="3195828"/>
+            <a:ext cx="7978124" cy="1440180"/>
+          </a:xfrm>
+          <a:prstGeom prst="rect">
+            <a:avLst/>
+          </a:prstGeom>
+          <a:solidFill>
+            <a:srgbClr val="F0ECE4"/>
+          </a:solidFill>
+          <a:ln>
+            <a:noFill/>
+          </a:ln>
+        </p:spPr>
+        <p:txBody>
+          <a:bodyPr anchorCtr="0" anchor="ctr" bIns="34275" lIns="68575" spcFirstLastPara="1" rIns="68575" wrap="square" tIns="34275">
+            <a:noAutofit/>
+          </a:bodyPr>
+          <a:lstStyle/>
+          <a:p>
+            <a:pPr indent="0" lvl="0" marL="0" marR="0" rtl="0" algn="ctr">
+              <a:spcBef>
+                <a:spcPts val="0"/>
+              </a:spcBef>
+              <a:spcAft>
+                <a:spcPts val="0"/>
+              </a:spcAft>
+              <a:buNone/>
+            </a:pPr>
+            <a:r>
+              <a:t/>
+            </a:r>
+            <a:endParaRPr sz="1400">
+              <a:solidFill>
+                <a:schemeClr val="dk1"/>
+              </a:solidFill>
+              <a:latin typeface="Calibri"/>
+              <a:ea typeface="Calibri"/>
+              <a:cs typeface="Calibri"/>
+              <a:sym typeface="Calibri"/>
+            </a:endParaRPr>
+          </a:p>
+        </p:txBody>
+      </p:sp>
+      <p:cxnSp>
+        <p:nvCxnSpPr>
+          <p:cNvPr id="371" name="Google Shape;371;p33"/>
+          <p:cNvCxnSpPr/>
+          <p:nvPr/>
+        </p:nvCxnSpPr>
+        <p:spPr>
+          <a:xfrm>
+            <a:off x="582946" y="3195828"/>
+            <a:ext cx="7978124" cy="0"/>
+          </a:xfrm>
+          <a:prstGeom prst="straightConnector1">
+            <a:avLst/>
+          </a:prstGeom>
+          <a:noFill/>
+          <a:ln cap="flat" cmpd="sng" w="28575">
+            <a:solidFill>
+              <a:srgbClr val="B45309"/>
+            </a:solidFill>
+            <a:prstDash val="solid"/>
+            <a:round/>
+            <a:headEnd len="sm" w="sm" type="none"/>
+            <a:tailEnd len="sm" w="sm" type="none"/>
+          </a:ln>
+          <a:effectLst>
+            <a:outerShdw blurRad="40000" rotWithShape="0" dir="5400000" dist="20000">
+              <a:srgbClr val="000000">
+                <a:alpha val="38039"/>
+              </a:srgbClr>
+            </a:outerShdw>
+          </a:effectLst>
+        </p:spPr>
+      </p:cxnSp>
+      <p:sp>
+        <p:nvSpPr>
+          <p:cNvPr id="372" name="Google Shape;372;p33"/>
+          <p:cNvSpPr txBox="1"/>
+          <p:nvPr/>
+        </p:nvSpPr>
+        <p:spPr>
+          <a:xfrm>
+            <a:off x="788691" y="3346704"/>
+            <a:ext cx="2057455" cy="205740"/>
+          </a:xfrm>
+          <a:prstGeom prst="rect">
+            <a:avLst/>
+          </a:prstGeom>
+          <a:noFill/>
+          <a:ln>
+            <a:noFill/>
+          </a:ln>
+        </p:spPr>
+        <p:txBody>
+          <a:bodyPr anchorCtr="0" anchor="t" bIns="0" lIns="0" spcFirstLastPara="1" rIns="0" wrap="square" tIns="0">
+            <a:spAutoFit/>
+          </a:bodyPr>
+          <a:lstStyle/>
+          <a:p>
+            <a:pPr indent="0" lvl="0" marL="0" marR="0" rtl="0" algn="l">
+              <a:lnSpc>
+                <a:spcPct val="125000"/>
+              </a:lnSpc>
+              <a:spcBef>
+                <a:spcPts val="0"/>
+              </a:spcBef>
+              <a:spcAft>
+                <a:spcPts val="0"/>
+              </a:spcAft>
+              <a:buNone/>
+            </a:pPr>
+            <a:r>
+              <a:rPr b="0" i="0" lang="en" sz="700">
+                <a:solidFill>
+                  <a:srgbClr val="B45309"/>
+                </a:solidFill>
+                <a:latin typeface="Consolas"/>
+                <a:ea typeface="Consolas"/>
+                <a:cs typeface="Consolas"/>
+                <a:sym typeface="Consolas"/>
+              </a:rPr>
+              <a:t>THE HONEST ANSWER</a:t>
+            </a:r>
+            <a:endParaRPr sz="1100"/>
+          </a:p>
+        </p:txBody>
+      </p:sp>
+      <p:sp>
+        <p:nvSpPr>
+          <p:cNvPr id="373" name="Google Shape;373;p33"/>
+          <p:cNvSpPr txBox="1"/>
+          <p:nvPr/>
+        </p:nvSpPr>
+        <p:spPr>
+          <a:xfrm>
+            <a:off x="788691" y="3593592"/>
+            <a:ext cx="3600546" cy="274320"/>
+          </a:xfrm>
+          <a:prstGeom prst="rect">
+            <a:avLst/>
+          </a:prstGeom>
+          <a:noFill/>
+          <a:ln>
+            <a:noFill/>
+          </a:ln>
+        </p:spPr>
+        <p:txBody>
+          <a:bodyPr anchorCtr="0" anchor="t" bIns="0" lIns="0" spcFirstLastPara="1" rIns="0" wrap="square" tIns="0">
+            <a:spAutoFit/>
+          </a:bodyPr>
+          <a:lstStyle/>
+          <a:p>
+            <a:pPr indent="0" lvl="0" marL="0" marR="0" rtl="0" algn="l">
+              <a:lnSpc>
+                <a:spcPct val="124000"/>
+              </a:lnSpc>
+              <a:spcBef>
+                <a:spcPts val="0"/>
+              </a:spcBef>
+              <a:spcAft>
+                <a:spcPts val="0"/>
+              </a:spcAft>
+              <a:buNone/>
+            </a:pPr>
+            <a:r>
+              <a:rPr b="1" lang="en" sz="900">
+                <a:solidFill>
+                  <a:srgbClr val="B45309"/>
+                </a:solidFill>
+                <a:latin typeface="Calibri"/>
+                <a:ea typeface="Calibri"/>
+                <a:cs typeface="Calibri"/>
+                <a:sym typeface="Calibri"/>
+              </a:rPr>
+              <a:t>— </a:t>
+            </a:r>
+            <a:r>
+              <a:rPr lang="en" sz="900">
+                <a:solidFill>
+                  <a:srgbClr val="1A1A1A"/>
+                </a:solidFill>
+                <a:latin typeface="Calibri"/>
+                <a:ea typeface="Calibri"/>
+                <a:cs typeface="Calibri"/>
+                <a:sym typeface="Calibri"/>
+              </a:rPr>
+              <a:t>Silhouette actually peaks at K = 2 (0.432), not at K = 4 (0.337).</a:t>
+            </a:r>
+            <a:endParaRPr sz="1100"/>
+          </a:p>
+          <a:p>
+            <a:pPr indent="0" lvl="0" marL="0" marR="0" rtl="0" algn="l">
+              <a:lnSpc>
+                <a:spcPct val="124000"/>
+              </a:lnSpc>
+              <a:spcBef>
+                <a:spcPts val="400"/>
+              </a:spcBef>
+              <a:spcAft>
+                <a:spcPts val="0"/>
+              </a:spcAft>
+              <a:buNone/>
+            </a:pPr>
+            <a:r>
+              <a:rPr b="1" lang="en" sz="900">
+                <a:solidFill>
+                  <a:srgbClr val="B45309"/>
+                </a:solidFill>
+                <a:latin typeface="Calibri"/>
+                <a:ea typeface="Calibri"/>
+                <a:cs typeface="Calibri"/>
+                <a:sym typeface="Calibri"/>
+              </a:rPr>
+              <a:t>— </a:t>
+            </a:r>
+            <a:r>
+              <a:rPr lang="en" sz="900">
+                <a:solidFill>
+                  <a:srgbClr val="1A1A1A"/>
+                </a:solidFill>
+                <a:latin typeface="Calibri"/>
+                <a:ea typeface="Calibri"/>
+                <a:cs typeface="Calibri"/>
+                <a:sym typeface="Calibri"/>
+              </a:rPr>
+              <a:t>It rewards few, well-separated blobs — but RFM behaviour is a continuum, so it will nearly always favour the smallest K.</a:t>
+            </a:r>
+            <a:endParaRPr sz="1100"/>
+          </a:p>
+        </p:txBody>
+      </p:sp>
+      <p:sp>
+        <p:nvSpPr>
+          <p:cNvPr id="374" name="Google Shape;374;p33"/>
+          <p:cNvSpPr txBox="1"/>
+          <p:nvPr/>
+        </p:nvSpPr>
+        <p:spPr>
+          <a:xfrm>
+            <a:off x="4766437" y="3593592"/>
+            <a:ext cx="3600546" cy="274320"/>
+          </a:xfrm>
+          <a:prstGeom prst="rect">
+            <a:avLst/>
+          </a:prstGeom>
+          <a:noFill/>
+          <a:ln>
+            <a:noFill/>
+          </a:ln>
+        </p:spPr>
+        <p:txBody>
+          <a:bodyPr anchorCtr="0" anchor="t" bIns="0" lIns="0" spcFirstLastPara="1" rIns="0" wrap="square" tIns="0">
+            <a:spAutoFit/>
+          </a:bodyPr>
+          <a:lstStyle/>
+          <a:p>
+            <a:pPr indent="0" lvl="0" marL="0" marR="0" rtl="0" algn="l">
+              <a:lnSpc>
+                <a:spcPct val="124000"/>
+              </a:lnSpc>
+              <a:spcBef>
+                <a:spcPts val="0"/>
+              </a:spcBef>
+              <a:spcAft>
+                <a:spcPts val="0"/>
+              </a:spcAft>
+              <a:buNone/>
+            </a:pPr>
+            <a:r>
+              <a:rPr b="1" lang="en" sz="900">
+                <a:solidFill>
+                  <a:srgbClr val="B45309"/>
+                </a:solidFill>
+                <a:latin typeface="Calibri"/>
+                <a:ea typeface="Calibri"/>
+                <a:cs typeface="Calibri"/>
+                <a:sym typeface="Calibri"/>
+              </a:rPr>
+              <a:t>— </a:t>
+            </a:r>
+            <a:r>
+              <a:rPr lang="en" sz="900">
+                <a:solidFill>
+                  <a:srgbClr val="1A1A1A"/>
+                </a:solidFill>
+                <a:latin typeface="Calibri"/>
+                <a:ea typeface="Calibri"/>
+                <a:cs typeface="Calibri"/>
+                <a:sym typeface="Calibri"/>
+              </a:rPr>
+              <a:t>K = 2 only separates 'active' from 'inactive' — not something marketing can act on differently.</a:t>
+            </a:r>
+            <a:endParaRPr sz="1100"/>
+          </a:p>
+          <a:p>
+            <a:pPr indent="0" lvl="0" marL="0" marR="0" rtl="0" algn="l">
+              <a:lnSpc>
+                <a:spcPct val="124000"/>
+              </a:lnSpc>
+              <a:spcBef>
+                <a:spcPts val="400"/>
+              </a:spcBef>
+              <a:spcAft>
+                <a:spcPts val="0"/>
+              </a:spcAft>
+              <a:buNone/>
+            </a:pPr>
+            <a:r>
+              <a:rPr b="1" lang="en" sz="900">
+                <a:solidFill>
+                  <a:srgbClr val="B45309"/>
+                </a:solidFill>
+                <a:latin typeface="Calibri"/>
+                <a:ea typeface="Calibri"/>
+                <a:cs typeface="Calibri"/>
+                <a:sym typeface="Calibri"/>
+              </a:rPr>
+              <a:t>— </a:t>
+            </a:r>
+            <a:r>
+              <a:rPr lang="en" sz="900">
+                <a:solidFill>
+                  <a:srgbClr val="1A1A1A"/>
+                </a:solidFill>
+                <a:latin typeface="Calibri"/>
+                <a:ea typeface="Calibri"/>
+                <a:cs typeface="Calibri"/>
+                <a:sym typeface="Calibri"/>
+              </a:rPr>
+              <a:t>K = 4 keeps a reasonable score and recovers the four standard RFM segments. Chosen for actionability, sanity-checked statistically.</a:t>
+            </a:r>
+            <a:endParaRPr sz="1100"/>
+          </a:p>
+        </p:txBody>
+      </p:sp>
+      <p:cxnSp>
+        <p:nvCxnSpPr>
+          <p:cNvPr id="375" name="Google Shape;375;p33"/>
+          <p:cNvCxnSpPr/>
+          <p:nvPr/>
+        </p:nvCxnSpPr>
+        <p:spPr>
+          <a:xfrm>
+            <a:off x="582946" y="4718304"/>
+            <a:ext cx="7978124" cy="0"/>
+          </a:xfrm>
+          <a:prstGeom prst="straightConnector1">
+            <a:avLst/>
+          </a:prstGeom>
+          <a:noFill/>
+          <a:ln cap="flat" cmpd="sng" w="9525">
+            <a:solidFill>
+              <a:srgbClr val="D8D4CC"/>
+            </a:solidFill>
+            <a:prstDash val="solid"/>
+            <a:round/>
+            <a:headEnd len="sm" w="sm" type="none"/>
+            <a:tailEnd len="sm" w="sm" type="none"/>
+          </a:ln>
+          <a:effectLst>
+            <a:outerShdw blurRad="40000" rotWithShape="0" dir="5400000" dist="20000">
+              <a:srgbClr val="000000">
+                <a:alpha val="38039"/>
+              </a:srgbClr>
+            </a:outerShdw>
+          </a:effectLst>
+        </p:spPr>
+      </p:cxnSp>
+      <p:sp>
+        <p:nvSpPr>
+          <p:cNvPr id="376" name="Google Shape;376;p33"/>
+          <p:cNvSpPr txBox="1"/>
+          <p:nvPr/>
+        </p:nvSpPr>
+        <p:spPr>
+          <a:xfrm>
+            <a:off x="582946" y="4800600"/>
+            <a:ext cx="4800728" cy="171450"/>
+          </a:xfrm>
+          <a:prstGeom prst="rect">
+            <a:avLst/>
+          </a:prstGeom>
+          <a:noFill/>
+          <a:ln>
+            <a:noFill/>
+          </a:ln>
+        </p:spPr>
+        <p:txBody>
+          <a:bodyPr anchorCtr="0" anchor="t" bIns="0" lIns="0" spcFirstLastPara="1" rIns="0" wrap="square" tIns="0">
+            <a:spAutoFit/>
+          </a:bodyPr>
+          <a:lstStyle/>
+          <a:p>
+            <a:pPr indent="0" lvl="0" marL="0" marR="0" rtl="0" algn="l">
+              <a:lnSpc>
+                <a:spcPct val="125000"/>
+              </a:lnSpc>
+              <a:spcBef>
+                <a:spcPts val="0"/>
+              </a:spcBef>
+              <a:spcAft>
+                <a:spcPts val="0"/>
+              </a:spcAft>
+              <a:buNone/>
+            </a:pPr>
+            <a:r>
+              <a:rPr b="0" i="0" lang="en" sz="600">
+                <a:solidFill>
+                  <a:srgbClr val="6B6B6B"/>
+                </a:solidFill>
+                <a:latin typeface="Consolas"/>
+                <a:ea typeface="Consolas"/>
+                <a:cs typeface="Consolas"/>
+                <a:sym typeface="Consolas"/>
+              </a:rPr>
+              <a:t>CUSTOMER SEGMENTATION FOR TARGETED E-COMMERCE MARKETING</a:t>
+            </a:r>
+            <a:endParaRPr sz="1100"/>
+          </a:p>
+        </p:txBody>
+      </p:sp>
+      <p:sp>
+        <p:nvSpPr>
+          <p:cNvPr id="377" name="Google Shape;377;p33"/>
+          <p:cNvSpPr txBox="1"/>
+          <p:nvPr/>
+        </p:nvSpPr>
+        <p:spPr>
+          <a:xfrm>
+            <a:off x="7189433" y="4800600"/>
+            <a:ext cx="1371637" cy="171450"/>
+          </a:xfrm>
+          <a:prstGeom prst="rect">
+            <a:avLst/>
+          </a:prstGeom>
+          <a:noFill/>
+          <a:ln>
+            <a:noFill/>
+          </a:ln>
+        </p:spPr>
+        <p:txBody>
+          <a:bodyPr anchorCtr="0" anchor="t" bIns="0" lIns="0" spcFirstLastPara="1" rIns="0" wrap="square" tIns="0">
+            <a:spAutoFit/>
+          </a:bodyPr>
+          <a:lstStyle/>
+          <a:p>
+            <a:pPr indent="0" lvl="0" marL="0" marR="0" rtl="0" algn="r">
+              <a:lnSpc>
+                <a:spcPct val="125000"/>
+              </a:lnSpc>
+              <a:spcBef>
+                <a:spcPts val="0"/>
+              </a:spcBef>
+              <a:spcAft>
+                <a:spcPts val="0"/>
+              </a:spcAft>
+              <a:buNone/>
+            </a:pPr>
+            <a:r>
+              <a:rPr b="0" i="0" lang="en" sz="600">
+                <a:solidFill>
+                  <a:srgbClr val="6B6B6B"/>
+                </a:solidFill>
+                <a:latin typeface="Consolas"/>
+                <a:ea typeface="Consolas"/>
+                <a:cs typeface="Consolas"/>
+                <a:sym typeface="Consolas"/>
+              </a:rPr>
+              <a:t>10 / 28</a:t>
+            </a:r>
+            <a:endParaRPr sz="1100"/>
+          </a:p>
+        </p:txBody>
+      </p:sp>
+    </p:spTree>
+  </p:cSld>
+  <p:clrMapOvr>
+    <a:masterClrMapping/>
+  </p:clrMapOvr>
+</p:sld>
+</file>
+
+<file path=ppt/slides/slide11.xml><?xml version="1.0" encoding="utf-8"?>
+<p:sld xmlns:a="http://schemas.openxmlformats.org/drawingml/2006/main" xmlns:r="http://schemas.openxmlformats.org/officeDocument/2006/relationships" xmlns:mc="http://schemas.openxmlformats.org/markup-compatibility/2006" xmlns:mv="urn:schemas-microsoft-com:mac:vml" xmlns:p="http://schemas.openxmlformats.org/presentationml/2006/main" xmlns:c="http://schemas.openxmlformats.org/drawingml/2006/chart" xmlns:dgm="http://schemas.openxmlformats.org/drawingml/2006/diagram" xmlns:o="urn:schemas-microsoft-com:office:office" xmlns:v="urn:schemas-microsoft-com:vml" xmlns:pvml="urn:schemas-microsoft-com:office:powerpoint" xmlns:com="http://schemas.openxmlformats.org/drawingml/2006/compatibility" xmlns:p14="http://schemas.microsoft.com/office/powerpoint/2010/main" xmlns:p15="http://schemas.microsoft.com/office/powerpoint/2012/main" xmlns:ahyp="http://schemas.microsoft.com/office/drawing/2018/hyperlinkcolor">
+  <p:cSld>
+    <p:spTree>
+      <p:nvGrpSpPr>
         <p:cNvPr id="382" name="Shape 382"/>
         <p:cNvGrpSpPr/>
         <p:nvPr/>
@@ -20938,7 +21783,7 @@
                 <a:cs typeface="Consolas"/>
                 <a:sym typeface="Consolas"/>
               </a:rPr>
-              <a:t>10 / 27</a:t>
+              <a:t>11 / 28</a:t>
             </a:r>
             <a:endParaRPr sz="1100"/>
           </a:p>
@@ -20952,7 +21797,7 @@
 </p:sld>
 </file>
 
-<file path=ppt/slides/slide11.xml><?xml version="1.0" encoding="utf-8"?>
+<file path=ppt/slides/slide12.xml><?xml version="1.0" encoding="utf-8"?>
 <p:sld xmlns:a="http://schemas.openxmlformats.org/drawingml/2006/main" xmlns:r="http://schemas.openxmlformats.org/officeDocument/2006/relationships" xmlns:mc="http://schemas.openxmlformats.org/markup-compatibility/2006" xmlns:mv="urn:schemas-microsoft-com:mac:vml" xmlns:p="http://schemas.openxmlformats.org/presentationml/2006/main" xmlns:c="http://schemas.openxmlformats.org/drawingml/2006/chart" xmlns:dgm="http://schemas.openxmlformats.org/drawingml/2006/diagram" xmlns:o="urn:schemas-microsoft-com:office:office" xmlns:v="urn:schemas-microsoft-com:vml" xmlns:pvml="urn:schemas-microsoft-com:office:powerpoint" xmlns:com="http://schemas.openxmlformats.org/drawingml/2006/compatibility" xmlns:p14="http://schemas.microsoft.com/office/powerpoint/2010/main" xmlns:p15="http://schemas.microsoft.com/office/powerpoint/2012/main" xmlns:ahyp="http://schemas.microsoft.com/office/drawing/2018/hyperlinkcolor">
   <p:cSld>
     <p:spTree>
@@ -23936,7 +24781,7 @@
                 <a:cs typeface="Consolas"/>
                 <a:sym typeface="Consolas"/>
               </a:rPr>
-              <a:t>11 / 27</a:t>
+              <a:t>12 / 28</a:t>
             </a:r>
             <a:endParaRPr sz="1100"/>
           </a:p>
@@ -23950,7 +24795,7 @@
 </p:sld>
 </file>
 
-<file path=ppt/slides/slide12.xml><?xml version="1.0" encoding="utf-8"?>
+<file path=ppt/slides/slide13.xml><?xml version="1.0" encoding="utf-8"?>
 <p:sld xmlns:a="http://schemas.openxmlformats.org/drawingml/2006/main" xmlns:r="http://schemas.openxmlformats.org/officeDocument/2006/relationships" xmlns:mc="http://schemas.openxmlformats.org/markup-compatibility/2006" xmlns:mv="urn:schemas-microsoft-com:mac:vml" xmlns:p="http://schemas.openxmlformats.org/presentationml/2006/main" xmlns:c="http://schemas.openxmlformats.org/drawingml/2006/chart" xmlns:dgm="http://schemas.openxmlformats.org/drawingml/2006/diagram" xmlns:o="urn:schemas-microsoft-com:office:office" xmlns:v="urn:schemas-microsoft-com:vml" xmlns:pvml="urn:schemas-microsoft-com:office:powerpoint" xmlns:com="http://schemas.openxmlformats.org/drawingml/2006/compatibility" xmlns:p14="http://schemas.microsoft.com/office/powerpoint/2010/main" xmlns:p15="http://schemas.microsoft.com/office/powerpoint/2012/main" xmlns:ahyp="http://schemas.microsoft.com/office/drawing/2018/hyperlinkcolor">
   <p:cSld>
     <p:spTree>
@@ -24556,7 +25401,7 @@
                 <a:cs typeface="Consolas"/>
                 <a:sym typeface="Consolas"/>
               </a:rPr>
-              <a:t>12 / 27</a:t>
+              <a:t>13 / 28</a:t>
             </a:r>
             <a:endParaRPr sz="1100"/>
           </a:p>
@@ -24570,7 +25415,7 @@
 </p:sld>
 </file>
 
-<file path=ppt/slides/slide13.xml><?xml version="1.0" encoding="utf-8"?>
+<file path=ppt/slides/slide14.xml><?xml version="1.0" encoding="utf-8"?>
 <p:sld xmlns:a="http://schemas.openxmlformats.org/drawingml/2006/main" xmlns:r="http://schemas.openxmlformats.org/officeDocument/2006/relationships" xmlns:mc="http://schemas.openxmlformats.org/markup-compatibility/2006" xmlns:mv="urn:schemas-microsoft-com:mac:vml" xmlns:p="http://schemas.openxmlformats.org/presentationml/2006/main" xmlns:c="http://schemas.openxmlformats.org/drawingml/2006/chart" xmlns:dgm="http://schemas.openxmlformats.org/drawingml/2006/diagram" xmlns:o="urn:schemas-microsoft-com:office:office" xmlns:v="urn:schemas-microsoft-com:vml" xmlns:pvml="urn:schemas-microsoft-com:office:powerpoint" xmlns:com="http://schemas.openxmlformats.org/drawingml/2006/compatibility" xmlns:p14="http://schemas.microsoft.com/office/powerpoint/2010/main" xmlns:p15="http://schemas.microsoft.com/office/powerpoint/2012/main" xmlns:ahyp="http://schemas.microsoft.com/office/drawing/2018/hyperlinkcolor">
   <p:cSld>
     <p:spTree>
@@ -25625,7 +26470,7 @@
                 <a:cs typeface="Consolas"/>
                 <a:sym typeface="Consolas"/>
               </a:rPr>
-              <a:t>13 / 27</a:t>
+              <a:t>14 / 28</a:t>
             </a:r>
             <a:endParaRPr sz="1100"/>
           </a:p>
@@ -25639,7 +26484,7 @@
 </p:sld>
 </file>
 
-<file path=ppt/slides/slide14.xml><?xml version="1.0" encoding="utf-8"?>
+<file path=ppt/slides/slide15.xml><?xml version="1.0" encoding="utf-8"?>
 <p:sld xmlns:a="http://schemas.openxmlformats.org/drawingml/2006/main" xmlns:r="http://schemas.openxmlformats.org/officeDocument/2006/relationships" xmlns:mc="http://schemas.openxmlformats.org/markup-compatibility/2006" xmlns:mv="urn:schemas-microsoft-com:mac:vml" xmlns:p="http://schemas.openxmlformats.org/presentationml/2006/main" xmlns:c="http://schemas.openxmlformats.org/drawingml/2006/chart" xmlns:dgm="http://schemas.openxmlformats.org/drawingml/2006/diagram" xmlns:o="urn:schemas-microsoft-com:office:office" xmlns:v="urn:schemas-microsoft-com:vml" xmlns:pvml="urn:schemas-microsoft-com:office:powerpoint" xmlns:com="http://schemas.openxmlformats.org/drawingml/2006/compatibility" xmlns:p14="http://schemas.microsoft.com/office/powerpoint/2010/main" xmlns:p15="http://schemas.microsoft.com/office/powerpoint/2012/main" xmlns:ahyp="http://schemas.microsoft.com/office/drawing/2018/hyperlinkcolor">
   <p:cSld>
     <p:spTree>
@@ -27376,7 +28221,7 @@
                 <a:cs typeface="Consolas"/>
                 <a:sym typeface="Consolas"/>
               </a:rPr>
-              <a:t>14 / 27</a:t>
+              <a:t>15 / 28</a:t>
             </a:r>
             <a:endParaRPr sz="1100"/>
           </a:p>
@@ -27390,7 +28235,7 @@
 </p:sld>
 </file>
 
-<file path=ppt/slides/slide15.xml><?xml version="1.0" encoding="utf-8"?>
+<file path=ppt/slides/slide16.xml><?xml version="1.0" encoding="utf-8"?>
 <p:sld xmlns:a="http://schemas.openxmlformats.org/drawingml/2006/main" xmlns:r="http://schemas.openxmlformats.org/officeDocument/2006/relationships" xmlns:mc="http://schemas.openxmlformats.org/markup-compatibility/2006" xmlns:mv="urn:schemas-microsoft-com:mac:vml" xmlns:p="http://schemas.openxmlformats.org/presentationml/2006/main" xmlns:c="http://schemas.openxmlformats.org/drawingml/2006/chart" xmlns:dgm="http://schemas.openxmlformats.org/drawingml/2006/diagram" xmlns:o="urn:schemas-microsoft-com:office:office" xmlns:v="urn:schemas-microsoft-com:vml" xmlns:pvml="urn:schemas-microsoft-com:office:powerpoint" xmlns:com="http://schemas.openxmlformats.org/drawingml/2006/compatibility" xmlns:p14="http://schemas.microsoft.com/office/powerpoint/2010/main" xmlns:p15="http://schemas.microsoft.com/office/powerpoint/2012/main" xmlns:ahyp="http://schemas.microsoft.com/office/drawing/2018/hyperlinkcolor">
   <p:cSld>
     <p:spTree>
@@ -28921,7 +29766,7 @@
                 <a:cs typeface="Consolas"/>
                 <a:sym typeface="Consolas"/>
               </a:rPr>
-              <a:t>15 / 27</a:t>
+              <a:t>16 / 28</a:t>
             </a:r>
             <a:endParaRPr sz="1100"/>
           </a:p>
@@ -28935,7 +29780,7 @@
 </p:sld>
 </file>
 
-<file path=ppt/slides/slide16.xml><?xml version="1.0" encoding="utf-8"?>
+<file path=ppt/slides/slide17.xml><?xml version="1.0" encoding="utf-8"?>
 <p:sld xmlns:a="http://schemas.openxmlformats.org/drawingml/2006/main" xmlns:r="http://schemas.openxmlformats.org/officeDocument/2006/relationships" xmlns:mc="http://schemas.openxmlformats.org/markup-compatibility/2006" xmlns:mv="urn:schemas-microsoft-com:mac:vml" xmlns:p="http://schemas.openxmlformats.org/presentationml/2006/main" xmlns:c="http://schemas.openxmlformats.org/drawingml/2006/chart" xmlns:dgm="http://schemas.openxmlformats.org/drawingml/2006/diagram" xmlns:o="urn:schemas-microsoft-com:office:office" xmlns:v="urn:schemas-microsoft-com:vml" xmlns:pvml="urn:schemas-microsoft-com:office:powerpoint" xmlns:com="http://schemas.openxmlformats.org/drawingml/2006/compatibility" xmlns:p14="http://schemas.microsoft.com/office/powerpoint/2010/main" xmlns:p15="http://schemas.microsoft.com/office/powerpoint/2012/main" xmlns:ahyp="http://schemas.microsoft.com/office/drawing/2018/hyperlinkcolor">
   <p:cSld>
     <p:spTree>
@@ -30401,7 +31246,7 @@
                 <a:cs typeface="Consolas"/>
                 <a:sym typeface="Consolas"/>
               </a:rPr>
-              <a:t>16 / 27</a:t>
+              <a:t>17 / 28</a:t>
             </a:r>
             <a:endParaRPr sz="1100"/>
           </a:p>
@@ -30415,7 +31260,7 @@
 </p:sld>
 </file>
 
-<file path=ppt/slides/slide17.xml><?xml version="1.0" encoding="utf-8"?>
+<file path=ppt/slides/slide18.xml><?xml version="1.0" encoding="utf-8"?>
 <p:sld xmlns:a="http://schemas.openxmlformats.org/drawingml/2006/main" xmlns:r="http://schemas.openxmlformats.org/officeDocument/2006/relationships" xmlns:mc="http://schemas.openxmlformats.org/markup-compatibility/2006" xmlns:mv="urn:schemas-microsoft-com:mac:vml" xmlns:p="http://schemas.openxmlformats.org/presentationml/2006/main" xmlns:c="http://schemas.openxmlformats.org/drawingml/2006/chart" xmlns:dgm="http://schemas.openxmlformats.org/drawingml/2006/diagram" xmlns:o="urn:schemas-microsoft-com:office:office" xmlns:v="urn:schemas-microsoft-com:vml" xmlns:pvml="urn:schemas-microsoft-com:office:powerpoint" xmlns:com="http://schemas.openxmlformats.org/drawingml/2006/compatibility" xmlns:p14="http://schemas.microsoft.com/office/powerpoint/2010/main" xmlns:p15="http://schemas.microsoft.com/office/powerpoint/2012/main" xmlns:ahyp="http://schemas.microsoft.com/office/drawing/2018/hyperlinkcolor">
   <p:cSld>
     <p:spTree>
@@ -31971,7 +32816,7 @@
                 <a:cs typeface="Consolas"/>
                 <a:sym typeface="Consolas"/>
               </a:rPr>
-              <a:t>17 / 27</a:t>
+              <a:t>18 / 28</a:t>
             </a:r>
             <a:endParaRPr sz="1100"/>
           </a:p>
@@ -31985,7 +32830,7 @@
 </p:sld>
 </file>
 
-<file path=ppt/slides/slide18.xml><?xml version="1.0" encoding="utf-8"?>
+<file path=ppt/slides/slide19.xml><?xml version="1.0" encoding="utf-8"?>
 <p:sld xmlns:a="http://schemas.openxmlformats.org/drawingml/2006/main" xmlns:r="http://schemas.openxmlformats.org/officeDocument/2006/relationships" xmlns:mc="http://schemas.openxmlformats.org/markup-compatibility/2006" xmlns:mv="urn:schemas-microsoft-com:mac:vml" xmlns:p="http://schemas.openxmlformats.org/presentationml/2006/main" xmlns:c="http://schemas.openxmlformats.org/drawingml/2006/chart" xmlns:dgm="http://schemas.openxmlformats.org/drawingml/2006/diagram" xmlns:o="urn:schemas-microsoft-com:office:office" xmlns:v="urn:schemas-microsoft-com:vml" xmlns:pvml="urn:schemas-microsoft-com:office:powerpoint" xmlns:com="http://schemas.openxmlformats.org/drawingml/2006/compatibility" xmlns:p14="http://schemas.microsoft.com/office/powerpoint/2010/main" xmlns:p15="http://schemas.microsoft.com/office/powerpoint/2012/main" xmlns:ahyp="http://schemas.microsoft.com/office/drawing/2018/hyperlinkcolor">
   <p:cSld>
     <p:spTree>
@@ -32429,2620 +33274,7 @@
                 <a:cs typeface="Consolas"/>
                 <a:sym typeface="Consolas"/>
               </a:rPr>
-              <a:t>18 / 27</a:t>
-            </a:r>
-            <a:endParaRPr sz="1100"/>
-          </a:p>
-        </p:txBody>
-      </p:sp>
-    </p:spTree>
-  </p:cSld>
-  <p:clrMapOvr>
-    <a:masterClrMapping/>
-  </p:clrMapOvr>
-</p:sld>
-</file>
-
-<file path=ppt/slides/slide19.xml><?xml version="1.0" encoding="utf-8"?>
-<p:sld xmlns:a="http://schemas.openxmlformats.org/drawingml/2006/main" xmlns:r="http://schemas.openxmlformats.org/officeDocument/2006/relationships" xmlns:mc="http://schemas.openxmlformats.org/markup-compatibility/2006" xmlns:mv="urn:schemas-microsoft-com:mac:vml" xmlns:p="http://schemas.openxmlformats.org/presentationml/2006/main" xmlns:c="http://schemas.openxmlformats.org/drawingml/2006/chart" xmlns:dgm="http://schemas.openxmlformats.org/drawingml/2006/diagram" xmlns:o="urn:schemas-microsoft-com:office:office" xmlns:v="urn:schemas-microsoft-com:vml" xmlns:pvml="urn:schemas-microsoft-com:office:powerpoint" xmlns:com="http://schemas.openxmlformats.org/drawingml/2006/compatibility" xmlns:p14="http://schemas.microsoft.com/office/powerpoint/2010/main" xmlns:p15="http://schemas.microsoft.com/office/powerpoint/2012/main" xmlns:ahyp="http://schemas.microsoft.com/office/drawing/2018/hyperlinkcolor">
-  <p:cSld>
-    <p:spTree>
-      <p:nvGrpSpPr>
-        <p:cNvPr id="649" name="Shape 649"/>
-        <p:cNvGrpSpPr/>
-        <p:nvPr/>
-      </p:nvGrpSpPr>
-      <p:grpSpPr>
-        <a:xfrm>
-          <a:off x="0" y="0"/>
-          <a:ext cx="0" cy="0"/>
-          <a:chOff x="0" y="0"/>
-          <a:chExt cx="0" cy="0"/>
-        </a:xfrm>
-      </p:grpSpPr>
-      <p:sp>
-        <p:nvSpPr>
-          <p:cNvPr id="650" name="Google Shape;650;p43"/>
-          <p:cNvSpPr/>
-          <p:nvPr/>
-        </p:nvSpPr>
-        <p:spPr>
-          <a:xfrm>
-            <a:off x="0" y="0"/>
-            <a:ext cx="9144015" cy="5143500"/>
-          </a:xfrm>
-          <a:prstGeom prst="rect">
-            <a:avLst/>
-          </a:prstGeom>
-          <a:solidFill>
-            <a:srgbClr val="FAF8F4"/>
-          </a:solidFill>
-          <a:ln>
-            <a:noFill/>
-          </a:ln>
-        </p:spPr>
-        <p:txBody>
-          <a:bodyPr anchorCtr="0" anchor="ctr" bIns="34275" lIns="68575" spcFirstLastPara="1" rIns="68575" wrap="square" tIns="34275">
-            <a:noAutofit/>
-          </a:bodyPr>
-          <a:lstStyle/>
-          <a:p>
-            <a:pPr indent="0" lvl="0" marL="0" marR="0" rtl="0" algn="ctr">
-              <a:spcBef>
-                <a:spcPts val="0"/>
-              </a:spcBef>
-              <a:spcAft>
-                <a:spcPts val="0"/>
-              </a:spcAft>
-              <a:buNone/>
-            </a:pPr>
-            <a:r>
-              <a:t/>
-            </a:r>
-            <a:endParaRPr sz="1400">
-              <a:solidFill>
-                <a:schemeClr val="dk1"/>
-              </a:solidFill>
-              <a:latin typeface="Calibri"/>
-              <a:ea typeface="Calibri"/>
-              <a:cs typeface="Calibri"/>
-              <a:sym typeface="Calibri"/>
-            </a:endParaRPr>
-          </a:p>
-        </p:txBody>
-      </p:sp>
-      <p:sp>
-        <p:nvSpPr>
-          <p:cNvPr id="651" name="Google Shape;651;p43"/>
-          <p:cNvSpPr txBox="1"/>
-          <p:nvPr/>
-        </p:nvSpPr>
-        <p:spPr>
-          <a:xfrm>
-            <a:off x="582946" y="425196"/>
-            <a:ext cx="7978124" cy="205740"/>
-          </a:xfrm>
-          <a:prstGeom prst="rect">
-            <a:avLst/>
-          </a:prstGeom>
-          <a:noFill/>
-          <a:ln>
-            <a:noFill/>
-          </a:ln>
-        </p:spPr>
-        <p:txBody>
-          <a:bodyPr anchorCtr="0" anchor="t" bIns="0" lIns="0" spcFirstLastPara="1" rIns="0" wrap="square" tIns="0">
-            <a:spAutoFit/>
-          </a:bodyPr>
-          <a:lstStyle/>
-          <a:p>
-            <a:pPr indent="0" lvl="0" marL="0" marR="0" rtl="0" algn="l">
-              <a:spcBef>
-                <a:spcPts val="0"/>
-              </a:spcBef>
-              <a:spcAft>
-                <a:spcPts val="0"/>
-              </a:spcAft>
-              <a:buNone/>
-            </a:pPr>
-            <a:r>
-              <a:rPr b="1" lang="en" sz="800">
-                <a:solidFill>
-                  <a:srgbClr val="B45309"/>
-                </a:solidFill>
-                <a:latin typeface="Consolas"/>
-                <a:ea typeface="Consolas"/>
-                <a:cs typeface="Consolas"/>
-                <a:sym typeface="Consolas"/>
-              </a:rPr>
-              <a:t>05  </a:t>
-            </a:r>
-            <a:r>
-              <a:rPr lang="en" sz="800">
-                <a:solidFill>
-                  <a:srgbClr val="6B6B6B"/>
-                </a:solidFill>
-                <a:latin typeface="Consolas"/>
-                <a:ea typeface="Consolas"/>
-                <a:cs typeface="Consolas"/>
-                <a:sym typeface="Consolas"/>
-              </a:rPr>
-              <a:t>SYSTEM ARCHITECTURE   ·   SAME PIPELINE, THREE SURFACES</a:t>
-            </a:r>
-            <a:endParaRPr sz="1100"/>
-          </a:p>
-        </p:txBody>
-      </p:sp>
-      <p:sp>
-        <p:nvSpPr>
-          <p:cNvPr id="652" name="Google Shape;652;p43"/>
-          <p:cNvSpPr txBox="1"/>
-          <p:nvPr/>
-        </p:nvSpPr>
-        <p:spPr>
-          <a:xfrm>
-            <a:off x="582946" y="699516"/>
-            <a:ext cx="7978124" cy="514350"/>
-          </a:xfrm>
-          <a:prstGeom prst="rect">
-            <a:avLst/>
-          </a:prstGeom>
-          <a:noFill/>
-          <a:ln>
-            <a:noFill/>
-          </a:ln>
-        </p:spPr>
-        <p:txBody>
-          <a:bodyPr anchorCtr="0" anchor="t" bIns="0" lIns="0" spcFirstLastPara="1" rIns="0" wrap="square" tIns="0">
-            <a:spAutoFit/>
-          </a:bodyPr>
-          <a:lstStyle/>
-          <a:p>
-            <a:pPr indent="0" lvl="0" marL="0" marR="0" rtl="0" algn="l">
-              <a:lnSpc>
-                <a:spcPct val="100000"/>
-              </a:lnSpc>
-              <a:spcBef>
-                <a:spcPts val="0"/>
-              </a:spcBef>
-              <a:spcAft>
-                <a:spcPts val="0"/>
-              </a:spcAft>
-              <a:buNone/>
-            </a:pPr>
-            <a:r>
-              <a:rPr b="0" i="0" lang="en" sz="2400">
-                <a:solidFill>
-                  <a:srgbClr val="1A1A1A"/>
-                </a:solidFill>
-                <a:latin typeface="Georgia"/>
-                <a:ea typeface="Georgia"/>
-                <a:cs typeface="Georgia"/>
-                <a:sym typeface="Georgia"/>
-              </a:rPr>
-              <a:t>How the three layers fit</a:t>
-            </a:r>
-            <a:endParaRPr sz="1100"/>
-          </a:p>
-        </p:txBody>
-      </p:sp>
-      <p:cxnSp>
-        <p:nvCxnSpPr>
-          <p:cNvPr id="653" name="Google Shape;653;p43"/>
-          <p:cNvCxnSpPr/>
-          <p:nvPr/>
-        </p:nvCxnSpPr>
-        <p:spPr>
-          <a:xfrm>
-            <a:off x="582946" y="1248156"/>
-            <a:ext cx="7978124" cy="0"/>
-          </a:xfrm>
-          <a:prstGeom prst="straightConnector1">
-            <a:avLst/>
-          </a:prstGeom>
-          <a:noFill/>
-          <a:ln cap="flat" cmpd="sng" w="9525">
-            <a:solidFill>
-              <a:srgbClr val="D8D4CC"/>
-            </a:solidFill>
-            <a:prstDash val="solid"/>
-            <a:round/>
-            <a:headEnd len="sm" w="sm" type="none"/>
-            <a:tailEnd len="sm" w="sm" type="none"/>
-          </a:ln>
-          <a:effectLst>
-            <a:outerShdw blurRad="40000" rotWithShape="0" dir="5400000" dist="20000">
-              <a:srgbClr val="000000">
-                <a:alpha val="38039"/>
-              </a:srgbClr>
-            </a:outerShdw>
-          </a:effectLst>
-        </p:spPr>
-      </p:cxnSp>
-      <p:sp>
-        <p:nvSpPr>
-          <p:cNvPr id="654" name="Google Shape;654;p43"/>
-          <p:cNvSpPr/>
-          <p:nvPr/>
-        </p:nvSpPr>
-        <p:spPr>
-          <a:xfrm>
-            <a:off x="582946" y="1440180"/>
-            <a:ext cx="7978124" cy="822960"/>
-          </a:xfrm>
-          <a:prstGeom prst="rect">
-            <a:avLst/>
-          </a:prstGeom>
-          <a:solidFill>
-            <a:srgbClr val="F0ECE4"/>
-          </a:solidFill>
-          <a:ln>
-            <a:noFill/>
-          </a:ln>
-        </p:spPr>
-        <p:txBody>
-          <a:bodyPr anchorCtr="0" anchor="ctr" bIns="34275" lIns="68575" spcFirstLastPara="1" rIns="68575" wrap="square" tIns="34275">
-            <a:noAutofit/>
-          </a:bodyPr>
-          <a:lstStyle/>
-          <a:p>
-            <a:pPr indent="0" lvl="0" marL="0" marR="0" rtl="0" algn="ctr">
-              <a:spcBef>
-                <a:spcPts val="0"/>
-              </a:spcBef>
-              <a:spcAft>
-                <a:spcPts val="0"/>
-              </a:spcAft>
-              <a:buNone/>
-            </a:pPr>
-            <a:r>
-              <a:t/>
-            </a:r>
-            <a:endParaRPr sz="1400">
-              <a:solidFill>
-                <a:schemeClr val="dk1"/>
-              </a:solidFill>
-              <a:latin typeface="Calibri"/>
-              <a:ea typeface="Calibri"/>
-              <a:cs typeface="Calibri"/>
-              <a:sym typeface="Calibri"/>
-            </a:endParaRPr>
-          </a:p>
-        </p:txBody>
-      </p:sp>
-      <p:sp>
-        <p:nvSpPr>
-          <p:cNvPr id="655" name="Google Shape;655;p43"/>
-          <p:cNvSpPr/>
-          <p:nvPr/>
-        </p:nvSpPr>
-        <p:spPr>
-          <a:xfrm>
-            <a:off x="582946" y="1440180"/>
-            <a:ext cx="37720" cy="822960"/>
-          </a:xfrm>
-          <a:prstGeom prst="rect">
-            <a:avLst/>
-          </a:prstGeom>
-          <a:solidFill>
-            <a:srgbClr val="7C3AED"/>
-          </a:solidFill>
-          <a:ln>
-            <a:noFill/>
-          </a:ln>
-        </p:spPr>
-        <p:txBody>
-          <a:bodyPr anchorCtr="0" anchor="ctr" bIns="34275" lIns="68575" spcFirstLastPara="1" rIns="68575" wrap="square" tIns="34275">
-            <a:noAutofit/>
-          </a:bodyPr>
-          <a:lstStyle/>
-          <a:p>
-            <a:pPr indent="0" lvl="0" marL="0" marR="0" rtl="0" algn="ctr">
-              <a:spcBef>
-                <a:spcPts val="0"/>
-              </a:spcBef>
-              <a:spcAft>
-                <a:spcPts val="0"/>
-              </a:spcAft>
-              <a:buNone/>
-            </a:pPr>
-            <a:r>
-              <a:t/>
-            </a:r>
-            <a:endParaRPr sz="1400">
-              <a:solidFill>
-                <a:schemeClr val="dk1"/>
-              </a:solidFill>
-              <a:latin typeface="Calibri"/>
-              <a:ea typeface="Calibri"/>
-              <a:cs typeface="Calibri"/>
-              <a:sym typeface="Calibri"/>
-            </a:endParaRPr>
-          </a:p>
-        </p:txBody>
-      </p:sp>
-      <p:sp>
-        <p:nvSpPr>
-          <p:cNvPr id="656" name="Google Shape;656;p43"/>
-          <p:cNvSpPr txBox="1"/>
-          <p:nvPr/>
-        </p:nvSpPr>
-        <p:spPr>
-          <a:xfrm>
-            <a:off x="788691" y="1556766"/>
-            <a:ext cx="1783128" cy="171450"/>
-          </a:xfrm>
-          <a:prstGeom prst="rect">
-            <a:avLst/>
-          </a:prstGeom>
-          <a:noFill/>
-          <a:ln>
-            <a:noFill/>
-          </a:ln>
-        </p:spPr>
-        <p:txBody>
-          <a:bodyPr anchorCtr="0" anchor="t" bIns="0" lIns="0" spcFirstLastPara="1" rIns="0" wrap="square" tIns="0">
-            <a:spAutoFit/>
-          </a:bodyPr>
-          <a:lstStyle/>
-          <a:p>
-            <a:pPr indent="0" lvl="0" marL="0" marR="0" rtl="0" algn="l">
-              <a:lnSpc>
-                <a:spcPct val="125000"/>
-              </a:lnSpc>
-              <a:spcBef>
-                <a:spcPts val="0"/>
-              </a:spcBef>
-              <a:spcAft>
-                <a:spcPts val="0"/>
-              </a:spcAft>
-              <a:buNone/>
-            </a:pPr>
-            <a:r>
-              <a:rPr b="0" i="0" lang="en" sz="700">
-                <a:solidFill>
-                  <a:srgbClr val="7C3AED"/>
-                </a:solidFill>
-                <a:latin typeface="Consolas"/>
-                <a:ea typeface="Consolas"/>
-                <a:cs typeface="Consolas"/>
-                <a:sym typeface="Consolas"/>
-              </a:rPr>
-              <a:t>PRESENTATION LAYER</a:t>
-            </a:r>
-            <a:endParaRPr sz="1100"/>
-          </a:p>
-        </p:txBody>
-      </p:sp>
-      <p:sp>
-        <p:nvSpPr>
-          <p:cNvPr id="657" name="Google Shape;657;p43"/>
-          <p:cNvSpPr txBox="1"/>
-          <p:nvPr/>
-        </p:nvSpPr>
-        <p:spPr>
-          <a:xfrm>
-            <a:off x="788691" y="1762506"/>
-            <a:ext cx="1851709" cy="274320"/>
-          </a:xfrm>
-          <a:prstGeom prst="rect">
-            <a:avLst/>
-          </a:prstGeom>
-          <a:noFill/>
-          <a:ln>
-            <a:noFill/>
-          </a:ln>
-        </p:spPr>
-        <p:txBody>
-          <a:bodyPr anchorCtr="0" anchor="t" bIns="0" lIns="0" spcFirstLastPara="1" rIns="0" wrap="square" tIns="0">
-            <a:spAutoFit/>
-          </a:bodyPr>
-          <a:lstStyle/>
-          <a:p>
-            <a:pPr indent="0" lvl="0" marL="0" marR="0" rtl="0" algn="l">
-              <a:lnSpc>
-                <a:spcPct val="125000"/>
-              </a:lnSpc>
-              <a:spcBef>
-                <a:spcPts val="0"/>
-              </a:spcBef>
-              <a:spcAft>
-                <a:spcPts val="0"/>
-              </a:spcAft>
-              <a:buNone/>
-            </a:pPr>
-            <a:r>
-              <a:rPr b="0" i="0" lang="en" sz="1300">
-                <a:solidFill>
-                  <a:srgbClr val="1A1A1A"/>
-                </a:solidFill>
-                <a:latin typeface="Georgia"/>
-                <a:ea typeface="Georgia"/>
-                <a:cs typeface="Georgia"/>
-                <a:sym typeface="Georgia"/>
-              </a:rPr>
-              <a:t>Frontend</a:t>
-            </a:r>
-            <a:endParaRPr sz="1100"/>
-          </a:p>
-        </p:txBody>
-      </p:sp>
-      <p:sp>
-        <p:nvSpPr>
-          <p:cNvPr id="658" name="Google Shape;658;p43"/>
-          <p:cNvSpPr/>
-          <p:nvPr/>
-        </p:nvSpPr>
-        <p:spPr>
-          <a:xfrm>
-            <a:off x="2914728" y="1543050"/>
-            <a:ext cx="1715231" cy="617220"/>
-          </a:xfrm>
-          <a:prstGeom prst="rect">
-            <a:avLst/>
-          </a:prstGeom>
-          <a:solidFill>
-            <a:srgbClr val="FAF8F4"/>
-          </a:solidFill>
-          <a:ln cap="flat" cmpd="sng" w="9525">
-            <a:solidFill>
-              <a:srgbClr val="D8D4CC"/>
-            </a:solidFill>
-            <a:prstDash val="solid"/>
-            <a:round/>
-            <a:headEnd len="sm" w="sm" type="none"/>
-            <a:tailEnd len="sm" w="sm" type="none"/>
-          </a:ln>
-        </p:spPr>
-        <p:txBody>
-          <a:bodyPr anchorCtr="0" anchor="ctr" bIns="34275" lIns="68575" spcFirstLastPara="1" rIns="68575" wrap="square" tIns="34275">
-            <a:noAutofit/>
-          </a:bodyPr>
-          <a:lstStyle/>
-          <a:p>
-            <a:pPr indent="0" lvl="0" marL="0" marR="0" rtl="0" algn="ctr">
-              <a:spcBef>
-                <a:spcPts val="0"/>
-              </a:spcBef>
-              <a:spcAft>
-                <a:spcPts val="0"/>
-              </a:spcAft>
-              <a:buNone/>
-            </a:pPr>
-            <a:r>
-              <a:t/>
-            </a:r>
-            <a:endParaRPr sz="1400">
-              <a:solidFill>
-                <a:schemeClr val="dk1"/>
-              </a:solidFill>
-              <a:latin typeface="Calibri"/>
-              <a:ea typeface="Calibri"/>
-              <a:cs typeface="Calibri"/>
-              <a:sym typeface="Calibri"/>
-            </a:endParaRPr>
-          </a:p>
-        </p:txBody>
-      </p:sp>
-      <p:sp>
-        <p:nvSpPr>
-          <p:cNvPr id="659" name="Google Shape;659;p43"/>
-          <p:cNvSpPr txBox="1"/>
-          <p:nvPr/>
-        </p:nvSpPr>
-        <p:spPr>
-          <a:xfrm>
-            <a:off x="3038175" y="1639062"/>
-            <a:ext cx="1468337" cy="171450"/>
-          </a:xfrm>
-          <a:prstGeom prst="rect">
-            <a:avLst/>
-          </a:prstGeom>
-          <a:noFill/>
-          <a:ln>
-            <a:noFill/>
-          </a:ln>
-        </p:spPr>
-        <p:txBody>
-          <a:bodyPr anchorCtr="0" anchor="t" bIns="0" lIns="0" spcFirstLastPara="1" rIns="0" wrap="square" tIns="0">
-            <a:spAutoFit/>
-          </a:bodyPr>
-          <a:lstStyle/>
-          <a:p>
-            <a:pPr indent="0" lvl="0" marL="0" marR="0" rtl="0" algn="l">
-              <a:lnSpc>
-                <a:spcPct val="125000"/>
-              </a:lnSpc>
-              <a:spcBef>
-                <a:spcPts val="0"/>
-              </a:spcBef>
-              <a:spcAft>
-                <a:spcPts val="0"/>
-              </a:spcAft>
-              <a:buNone/>
-            </a:pPr>
-            <a:r>
-              <a:rPr b="1" i="0" lang="en" sz="900">
-                <a:solidFill>
-                  <a:srgbClr val="1A1A1A"/>
-                </a:solidFill>
-                <a:latin typeface="Calibri"/>
-                <a:ea typeface="Calibri"/>
-                <a:cs typeface="Calibri"/>
-                <a:sym typeface="Calibri"/>
-              </a:rPr>
-              <a:t>React 19 + TypeScript</a:t>
-            </a:r>
-            <a:endParaRPr sz="1100"/>
-          </a:p>
-        </p:txBody>
-      </p:sp>
-      <p:sp>
-        <p:nvSpPr>
-          <p:cNvPr id="660" name="Google Shape;660;p43"/>
-          <p:cNvSpPr txBox="1"/>
-          <p:nvPr/>
-        </p:nvSpPr>
-        <p:spPr>
-          <a:xfrm>
-            <a:off x="3038175" y="1824228"/>
-            <a:ext cx="1468337" cy="308610"/>
-          </a:xfrm>
-          <a:prstGeom prst="rect">
-            <a:avLst/>
-          </a:prstGeom>
-          <a:noFill/>
-          <a:ln>
-            <a:noFill/>
-          </a:ln>
-        </p:spPr>
-        <p:txBody>
-          <a:bodyPr anchorCtr="0" anchor="t" bIns="0" lIns="0" spcFirstLastPara="1" rIns="0" wrap="square" tIns="0">
-            <a:spAutoFit/>
-          </a:bodyPr>
-          <a:lstStyle/>
-          <a:p>
-            <a:pPr indent="0" lvl="0" marL="0" marR="0" rtl="0" algn="l">
-              <a:lnSpc>
-                <a:spcPct val="120000"/>
-              </a:lnSpc>
-              <a:spcBef>
-                <a:spcPts val="0"/>
-              </a:spcBef>
-              <a:spcAft>
-                <a:spcPts val="0"/>
-              </a:spcAft>
-              <a:buNone/>
-            </a:pPr>
-            <a:r>
-              <a:rPr b="0" i="0" lang="en" sz="800">
-                <a:solidFill>
-                  <a:srgbClr val="6B6B6B"/>
-                </a:solidFill>
-                <a:latin typeface="Calibri"/>
-                <a:ea typeface="Calibri"/>
-                <a:cs typeface="Calibri"/>
-                <a:sym typeface="Calibri"/>
-              </a:rPr>
-              <a:t>Vite build, shadcn/ui components</a:t>
-            </a:r>
-            <a:endParaRPr sz="1100"/>
-          </a:p>
-        </p:txBody>
-      </p:sp>
-      <p:sp>
-        <p:nvSpPr>
-          <p:cNvPr id="661" name="Google Shape;661;p43"/>
-          <p:cNvSpPr/>
-          <p:nvPr/>
-        </p:nvSpPr>
-        <p:spPr>
-          <a:xfrm>
-            <a:off x="4739690" y="1543050"/>
-            <a:ext cx="1715231" cy="617220"/>
-          </a:xfrm>
-          <a:prstGeom prst="rect">
-            <a:avLst/>
-          </a:prstGeom>
-          <a:solidFill>
-            <a:srgbClr val="FAF8F4"/>
-          </a:solidFill>
-          <a:ln cap="flat" cmpd="sng" w="9525">
-            <a:solidFill>
-              <a:srgbClr val="D8D4CC"/>
-            </a:solidFill>
-            <a:prstDash val="solid"/>
-            <a:round/>
-            <a:headEnd len="sm" w="sm" type="none"/>
-            <a:tailEnd len="sm" w="sm" type="none"/>
-          </a:ln>
-        </p:spPr>
-        <p:txBody>
-          <a:bodyPr anchorCtr="0" anchor="ctr" bIns="34275" lIns="68575" spcFirstLastPara="1" rIns="68575" wrap="square" tIns="34275">
-            <a:noAutofit/>
-          </a:bodyPr>
-          <a:lstStyle/>
-          <a:p>
-            <a:pPr indent="0" lvl="0" marL="0" marR="0" rtl="0" algn="ctr">
-              <a:spcBef>
-                <a:spcPts val="0"/>
-              </a:spcBef>
-              <a:spcAft>
-                <a:spcPts val="0"/>
-              </a:spcAft>
-              <a:buNone/>
-            </a:pPr>
-            <a:r>
-              <a:t/>
-            </a:r>
-            <a:endParaRPr sz="1400">
-              <a:solidFill>
-                <a:schemeClr val="dk1"/>
-              </a:solidFill>
-              <a:latin typeface="Calibri"/>
-              <a:ea typeface="Calibri"/>
-              <a:cs typeface="Calibri"/>
-              <a:sym typeface="Calibri"/>
-            </a:endParaRPr>
-          </a:p>
-        </p:txBody>
-      </p:sp>
-      <p:sp>
-        <p:nvSpPr>
-          <p:cNvPr id="662" name="Google Shape;662;p43"/>
-          <p:cNvSpPr txBox="1"/>
-          <p:nvPr/>
-        </p:nvSpPr>
-        <p:spPr>
-          <a:xfrm>
-            <a:off x="4863137" y="1639062"/>
-            <a:ext cx="1468337" cy="171450"/>
-          </a:xfrm>
-          <a:prstGeom prst="rect">
-            <a:avLst/>
-          </a:prstGeom>
-          <a:noFill/>
-          <a:ln>
-            <a:noFill/>
-          </a:ln>
-        </p:spPr>
-        <p:txBody>
-          <a:bodyPr anchorCtr="0" anchor="t" bIns="0" lIns="0" spcFirstLastPara="1" rIns="0" wrap="square" tIns="0">
-            <a:spAutoFit/>
-          </a:bodyPr>
-          <a:lstStyle/>
-          <a:p>
-            <a:pPr indent="0" lvl="0" marL="0" marR="0" rtl="0" algn="l">
-              <a:lnSpc>
-                <a:spcPct val="125000"/>
-              </a:lnSpc>
-              <a:spcBef>
-                <a:spcPts val="0"/>
-              </a:spcBef>
-              <a:spcAft>
-                <a:spcPts val="0"/>
-              </a:spcAft>
-              <a:buNone/>
-            </a:pPr>
-            <a:r>
-              <a:rPr b="1" i="0" lang="en" sz="900">
-                <a:solidFill>
-                  <a:srgbClr val="1A1A1A"/>
-                </a:solidFill>
-                <a:latin typeface="Calibri"/>
-                <a:ea typeface="Calibri"/>
-                <a:cs typeface="Calibri"/>
-                <a:sym typeface="Calibri"/>
-              </a:rPr>
-              <a:t>Recharts</a:t>
-            </a:r>
-            <a:endParaRPr sz="1100"/>
-          </a:p>
-        </p:txBody>
-      </p:sp>
-      <p:sp>
-        <p:nvSpPr>
-          <p:cNvPr id="663" name="Google Shape;663;p43"/>
-          <p:cNvSpPr txBox="1"/>
-          <p:nvPr/>
-        </p:nvSpPr>
-        <p:spPr>
-          <a:xfrm>
-            <a:off x="4863137" y="1824228"/>
-            <a:ext cx="1468337" cy="308610"/>
-          </a:xfrm>
-          <a:prstGeom prst="rect">
-            <a:avLst/>
-          </a:prstGeom>
-          <a:noFill/>
-          <a:ln>
-            <a:noFill/>
-          </a:ln>
-        </p:spPr>
-        <p:txBody>
-          <a:bodyPr anchorCtr="0" anchor="t" bIns="0" lIns="0" spcFirstLastPara="1" rIns="0" wrap="square" tIns="0">
-            <a:spAutoFit/>
-          </a:bodyPr>
-          <a:lstStyle/>
-          <a:p>
-            <a:pPr indent="0" lvl="0" marL="0" marR="0" rtl="0" algn="l">
-              <a:lnSpc>
-                <a:spcPct val="120000"/>
-              </a:lnSpc>
-              <a:spcBef>
-                <a:spcPts val="0"/>
-              </a:spcBef>
-              <a:spcAft>
-                <a:spcPts val="0"/>
-              </a:spcAft>
-              <a:buNone/>
-            </a:pPr>
-            <a:r>
-              <a:rPr b="0" i="0" lang="en" sz="800">
-                <a:solidFill>
-                  <a:srgbClr val="6B6B6B"/>
-                </a:solidFill>
-                <a:latin typeface="Calibri"/>
-                <a:ea typeface="Calibri"/>
-                <a:cs typeface="Calibri"/>
-                <a:sym typeface="Calibri"/>
-              </a:rPr>
-              <a:t>PCA scatter, elbow, histograms</a:t>
-            </a:r>
-            <a:endParaRPr sz="1100"/>
-          </a:p>
-        </p:txBody>
-      </p:sp>
-      <p:sp>
-        <p:nvSpPr>
-          <p:cNvPr id="664" name="Google Shape;664;p43"/>
-          <p:cNvSpPr/>
-          <p:nvPr/>
-        </p:nvSpPr>
-        <p:spPr>
-          <a:xfrm>
-            <a:off x="6564652" y="1543050"/>
-            <a:ext cx="1715231" cy="617220"/>
-          </a:xfrm>
-          <a:prstGeom prst="rect">
-            <a:avLst/>
-          </a:prstGeom>
-          <a:solidFill>
-            <a:srgbClr val="FAF8F4"/>
-          </a:solidFill>
-          <a:ln cap="flat" cmpd="sng" w="9525">
-            <a:solidFill>
-              <a:srgbClr val="D8D4CC"/>
-            </a:solidFill>
-            <a:prstDash val="solid"/>
-            <a:round/>
-            <a:headEnd len="sm" w="sm" type="none"/>
-            <a:tailEnd len="sm" w="sm" type="none"/>
-          </a:ln>
-        </p:spPr>
-        <p:txBody>
-          <a:bodyPr anchorCtr="0" anchor="ctr" bIns="34275" lIns="68575" spcFirstLastPara="1" rIns="68575" wrap="square" tIns="34275">
-            <a:noAutofit/>
-          </a:bodyPr>
-          <a:lstStyle/>
-          <a:p>
-            <a:pPr indent="0" lvl="0" marL="0" marR="0" rtl="0" algn="ctr">
-              <a:spcBef>
-                <a:spcPts val="0"/>
-              </a:spcBef>
-              <a:spcAft>
-                <a:spcPts val="0"/>
-              </a:spcAft>
-              <a:buNone/>
-            </a:pPr>
-            <a:r>
-              <a:t/>
-            </a:r>
-            <a:endParaRPr sz="1400">
-              <a:solidFill>
-                <a:schemeClr val="dk1"/>
-              </a:solidFill>
-              <a:latin typeface="Calibri"/>
-              <a:ea typeface="Calibri"/>
-              <a:cs typeface="Calibri"/>
-              <a:sym typeface="Calibri"/>
-            </a:endParaRPr>
-          </a:p>
-        </p:txBody>
-      </p:sp>
-      <p:sp>
-        <p:nvSpPr>
-          <p:cNvPr id="665" name="Google Shape;665;p43"/>
-          <p:cNvSpPr txBox="1"/>
-          <p:nvPr/>
-        </p:nvSpPr>
-        <p:spPr>
-          <a:xfrm>
-            <a:off x="6688099" y="1639062"/>
-            <a:ext cx="1468337" cy="171450"/>
-          </a:xfrm>
-          <a:prstGeom prst="rect">
-            <a:avLst/>
-          </a:prstGeom>
-          <a:noFill/>
-          <a:ln>
-            <a:noFill/>
-          </a:ln>
-        </p:spPr>
-        <p:txBody>
-          <a:bodyPr anchorCtr="0" anchor="t" bIns="0" lIns="0" spcFirstLastPara="1" rIns="0" wrap="square" tIns="0">
-            <a:spAutoFit/>
-          </a:bodyPr>
-          <a:lstStyle/>
-          <a:p>
-            <a:pPr indent="0" lvl="0" marL="0" marR="0" rtl="0" algn="l">
-              <a:lnSpc>
-                <a:spcPct val="125000"/>
-              </a:lnSpc>
-              <a:spcBef>
-                <a:spcPts val="0"/>
-              </a:spcBef>
-              <a:spcAft>
-                <a:spcPts val="0"/>
-              </a:spcAft>
-              <a:buNone/>
-            </a:pPr>
-            <a:r>
-              <a:rPr b="1" i="0" lang="en" sz="900">
-                <a:solidFill>
-                  <a:srgbClr val="1A1A1A"/>
-                </a:solidFill>
-                <a:latin typeface="Calibri"/>
-                <a:ea typeface="Calibri"/>
-                <a:cs typeface="Calibri"/>
-                <a:sym typeface="Calibri"/>
-              </a:rPr>
-              <a:t>TanStack Query</a:t>
-            </a:r>
-            <a:endParaRPr sz="1100"/>
-          </a:p>
-        </p:txBody>
-      </p:sp>
-      <p:sp>
-        <p:nvSpPr>
-          <p:cNvPr id="666" name="Google Shape;666;p43"/>
-          <p:cNvSpPr txBox="1"/>
-          <p:nvPr/>
-        </p:nvSpPr>
-        <p:spPr>
-          <a:xfrm>
-            <a:off x="6688099" y="1824228"/>
-            <a:ext cx="1468337" cy="308610"/>
-          </a:xfrm>
-          <a:prstGeom prst="rect">
-            <a:avLst/>
-          </a:prstGeom>
-          <a:noFill/>
-          <a:ln>
-            <a:noFill/>
-          </a:ln>
-        </p:spPr>
-        <p:txBody>
-          <a:bodyPr anchorCtr="0" anchor="t" bIns="0" lIns="0" spcFirstLastPara="1" rIns="0" wrap="square" tIns="0">
-            <a:spAutoFit/>
-          </a:bodyPr>
-          <a:lstStyle/>
-          <a:p>
-            <a:pPr indent="0" lvl="0" marL="0" marR="0" rtl="0" algn="l">
-              <a:lnSpc>
-                <a:spcPct val="120000"/>
-              </a:lnSpc>
-              <a:spcBef>
-                <a:spcPts val="0"/>
-              </a:spcBef>
-              <a:spcAft>
-                <a:spcPts val="0"/>
-              </a:spcAft>
-              <a:buNone/>
-            </a:pPr>
-            <a:r>
-              <a:rPr b="0" i="0" lang="en" sz="800">
-                <a:solidFill>
-                  <a:srgbClr val="6B6B6B"/>
-                </a:solidFill>
-                <a:latin typeface="Calibri"/>
-                <a:ea typeface="Calibri"/>
-                <a:cs typeface="Calibri"/>
-                <a:sym typeface="Calibri"/>
-              </a:rPr>
-              <a:t>Data fetching and caching</a:t>
-            </a:r>
-            <a:endParaRPr sz="1100"/>
-          </a:p>
-        </p:txBody>
-      </p:sp>
-      <p:sp>
-        <p:nvSpPr>
-          <p:cNvPr id="667" name="Google Shape;667;p43"/>
-          <p:cNvSpPr/>
-          <p:nvPr/>
-        </p:nvSpPr>
-        <p:spPr>
-          <a:xfrm>
-            <a:off x="582946" y="2468880"/>
-            <a:ext cx="7978124" cy="822960"/>
-          </a:xfrm>
-          <a:prstGeom prst="rect">
-            <a:avLst/>
-          </a:prstGeom>
-          <a:solidFill>
-            <a:srgbClr val="F0ECE4"/>
-          </a:solidFill>
-          <a:ln>
-            <a:noFill/>
-          </a:ln>
-        </p:spPr>
-        <p:txBody>
-          <a:bodyPr anchorCtr="0" anchor="ctr" bIns="34275" lIns="68575" spcFirstLastPara="1" rIns="68575" wrap="square" tIns="34275">
-            <a:noAutofit/>
-          </a:bodyPr>
-          <a:lstStyle/>
-          <a:p>
-            <a:pPr indent="0" lvl="0" marL="0" marR="0" rtl="0" algn="ctr">
-              <a:spcBef>
-                <a:spcPts val="0"/>
-              </a:spcBef>
-              <a:spcAft>
-                <a:spcPts val="0"/>
-              </a:spcAft>
-              <a:buNone/>
-            </a:pPr>
-            <a:r>
-              <a:t/>
-            </a:r>
-            <a:endParaRPr sz="1400">
-              <a:solidFill>
-                <a:schemeClr val="dk1"/>
-              </a:solidFill>
-              <a:latin typeface="Calibri"/>
-              <a:ea typeface="Calibri"/>
-              <a:cs typeface="Calibri"/>
-              <a:sym typeface="Calibri"/>
-            </a:endParaRPr>
-          </a:p>
-        </p:txBody>
-      </p:sp>
-      <p:sp>
-        <p:nvSpPr>
-          <p:cNvPr id="668" name="Google Shape;668;p43"/>
-          <p:cNvSpPr/>
-          <p:nvPr/>
-        </p:nvSpPr>
-        <p:spPr>
-          <a:xfrm>
-            <a:off x="582946" y="2468880"/>
-            <a:ext cx="37720" cy="822960"/>
-          </a:xfrm>
-          <a:prstGeom prst="rect">
-            <a:avLst/>
-          </a:prstGeom>
-          <a:solidFill>
-            <a:srgbClr val="0F766E"/>
-          </a:solidFill>
-          <a:ln>
-            <a:noFill/>
-          </a:ln>
-        </p:spPr>
-        <p:txBody>
-          <a:bodyPr anchorCtr="0" anchor="ctr" bIns="34275" lIns="68575" spcFirstLastPara="1" rIns="68575" wrap="square" tIns="34275">
-            <a:noAutofit/>
-          </a:bodyPr>
-          <a:lstStyle/>
-          <a:p>
-            <a:pPr indent="0" lvl="0" marL="0" marR="0" rtl="0" algn="ctr">
-              <a:spcBef>
-                <a:spcPts val="0"/>
-              </a:spcBef>
-              <a:spcAft>
-                <a:spcPts val="0"/>
-              </a:spcAft>
-              <a:buNone/>
-            </a:pPr>
-            <a:r>
-              <a:t/>
-            </a:r>
-            <a:endParaRPr sz="1400">
-              <a:solidFill>
-                <a:schemeClr val="dk1"/>
-              </a:solidFill>
-              <a:latin typeface="Calibri"/>
-              <a:ea typeface="Calibri"/>
-              <a:cs typeface="Calibri"/>
-              <a:sym typeface="Calibri"/>
-            </a:endParaRPr>
-          </a:p>
-        </p:txBody>
-      </p:sp>
-      <p:sp>
-        <p:nvSpPr>
-          <p:cNvPr id="669" name="Google Shape;669;p43"/>
-          <p:cNvSpPr txBox="1"/>
-          <p:nvPr/>
-        </p:nvSpPr>
-        <p:spPr>
-          <a:xfrm>
-            <a:off x="788691" y="2585466"/>
-            <a:ext cx="1783128" cy="171450"/>
-          </a:xfrm>
-          <a:prstGeom prst="rect">
-            <a:avLst/>
-          </a:prstGeom>
-          <a:noFill/>
-          <a:ln>
-            <a:noFill/>
-          </a:ln>
-        </p:spPr>
-        <p:txBody>
-          <a:bodyPr anchorCtr="0" anchor="t" bIns="0" lIns="0" spcFirstLastPara="1" rIns="0" wrap="square" tIns="0">
-            <a:spAutoFit/>
-          </a:bodyPr>
-          <a:lstStyle/>
-          <a:p>
-            <a:pPr indent="0" lvl="0" marL="0" marR="0" rtl="0" algn="l">
-              <a:lnSpc>
-                <a:spcPct val="125000"/>
-              </a:lnSpc>
-              <a:spcBef>
-                <a:spcPts val="0"/>
-              </a:spcBef>
-              <a:spcAft>
-                <a:spcPts val="0"/>
-              </a:spcAft>
-              <a:buNone/>
-            </a:pPr>
-            <a:r>
-              <a:rPr b="0" i="0" lang="en" sz="700">
-                <a:solidFill>
-                  <a:srgbClr val="0F766E"/>
-                </a:solidFill>
-                <a:latin typeface="Consolas"/>
-                <a:ea typeface="Consolas"/>
-                <a:cs typeface="Consolas"/>
-                <a:sym typeface="Consolas"/>
-              </a:rPr>
-              <a:t>APPLICATION LAYER</a:t>
-            </a:r>
-            <a:endParaRPr sz="1100"/>
-          </a:p>
-        </p:txBody>
-      </p:sp>
-      <p:sp>
-        <p:nvSpPr>
-          <p:cNvPr id="670" name="Google Shape;670;p43"/>
-          <p:cNvSpPr txBox="1"/>
-          <p:nvPr/>
-        </p:nvSpPr>
-        <p:spPr>
-          <a:xfrm>
-            <a:off x="788691" y="2791206"/>
-            <a:ext cx="1851709" cy="274320"/>
-          </a:xfrm>
-          <a:prstGeom prst="rect">
-            <a:avLst/>
-          </a:prstGeom>
-          <a:noFill/>
-          <a:ln>
-            <a:noFill/>
-          </a:ln>
-        </p:spPr>
-        <p:txBody>
-          <a:bodyPr anchorCtr="0" anchor="t" bIns="0" lIns="0" spcFirstLastPara="1" rIns="0" wrap="square" tIns="0">
-            <a:spAutoFit/>
-          </a:bodyPr>
-          <a:lstStyle/>
-          <a:p>
-            <a:pPr indent="0" lvl="0" marL="0" marR="0" rtl="0" algn="l">
-              <a:lnSpc>
-                <a:spcPct val="125000"/>
-              </a:lnSpc>
-              <a:spcBef>
-                <a:spcPts val="0"/>
-              </a:spcBef>
-              <a:spcAft>
-                <a:spcPts val="0"/>
-              </a:spcAft>
-              <a:buNone/>
-            </a:pPr>
-            <a:r>
-              <a:rPr b="0" i="0" lang="en" sz="1300">
-                <a:solidFill>
-                  <a:srgbClr val="1A1A1A"/>
-                </a:solidFill>
-                <a:latin typeface="Georgia"/>
-                <a:ea typeface="Georgia"/>
-                <a:cs typeface="Georgia"/>
-                <a:sym typeface="Georgia"/>
-              </a:rPr>
-              <a:t>Backend API</a:t>
-            </a:r>
-            <a:endParaRPr sz="1100"/>
-          </a:p>
-        </p:txBody>
-      </p:sp>
-      <p:sp>
-        <p:nvSpPr>
-          <p:cNvPr id="671" name="Google Shape;671;p43"/>
-          <p:cNvSpPr/>
-          <p:nvPr/>
-        </p:nvSpPr>
-        <p:spPr>
-          <a:xfrm>
-            <a:off x="2914728" y="2571750"/>
-            <a:ext cx="1715231" cy="617220"/>
-          </a:xfrm>
-          <a:prstGeom prst="rect">
-            <a:avLst/>
-          </a:prstGeom>
-          <a:solidFill>
-            <a:srgbClr val="FAF8F4"/>
-          </a:solidFill>
-          <a:ln cap="flat" cmpd="sng" w="9525">
-            <a:solidFill>
-              <a:srgbClr val="D8D4CC"/>
-            </a:solidFill>
-            <a:prstDash val="solid"/>
-            <a:round/>
-            <a:headEnd len="sm" w="sm" type="none"/>
-            <a:tailEnd len="sm" w="sm" type="none"/>
-          </a:ln>
-        </p:spPr>
-        <p:txBody>
-          <a:bodyPr anchorCtr="0" anchor="ctr" bIns="34275" lIns="68575" spcFirstLastPara="1" rIns="68575" wrap="square" tIns="34275">
-            <a:noAutofit/>
-          </a:bodyPr>
-          <a:lstStyle/>
-          <a:p>
-            <a:pPr indent="0" lvl="0" marL="0" marR="0" rtl="0" algn="ctr">
-              <a:spcBef>
-                <a:spcPts val="0"/>
-              </a:spcBef>
-              <a:spcAft>
-                <a:spcPts val="0"/>
-              </a:spcAft>
-              <a:buNone/>
-            </a:pPr>
-            <a:r>
-              <a:t/>
-            </a:r>
-            <a:endParaRPr sz="1400">
-              <a:solidFill>
-                <a:schemeClr val="dk1"/>
-              </a:solidFill>
-              <a:latin typeface="Calibri"/>
-              <a:ea typeface="Calibri"/>
-              <a:cs typeface="Calibri"/>
-              <a:sym typeface="Calibri"/>
-            </a:endParaRPr>
-          </a:p>
-        </p:txBody>
-      </p:sp>
-      <p:sp>
-        <p:nvSpPr>
-          <p:cNvPr id="672" name="Google Shape;672;p43"/>
-          <p:cNvSpPr txBox="1"/>
-          <p:nvPr/>
-        </p:nvSpPr>
-        <p:spPr>
-          <a:xfrm>
-            <a:off x="3038175" y="2667762"/>
-            <a:ext cx="1468337" cy="171450"/>
-          </a:xfrm>
-          <a:prstGeom prst="rect">
-            <a:avLst/>
-          </a:prstGeom>
-          <a:noFill/>
-          <a:ln>
-            <a:noFill/>
-          </a:ln>
-        </p:spPr>
-        <p:txBody>
-          <a:bodyPr anchorCtr="0" anchor="t" bIns="0" lIns="0" spcFirstLastPara="1" rIns="0" wrap="square" tIns="0">
-            <a:spAutoFit/>
-          </a:bodyPr>
-          <a:lstStyle/>
-          <a:p>
-            <a:pPr indent="0" lvl="0" marL="0" marR="0" rtl="0" algn="l">
-              <a:lnSpc>
-                <a:spcPct val="125000"/>
-              </a:lnSpc>
-              <a:spcBef>
-                <a:spcPts val="0"/>
-              </a:spcBef>
-              <a:spcAft>
-                <a:spcPts val="0"/>
-              </a:spcAft>
-              <a:buNone/>
-            </a:pPr>
-            <a:r>
-              <a:rPr b="1" i="0" lang="en" sz="900">
-                <a:solidFill>
-                  <a:srgbClr val="1A1A1A"/>
-                </a:solidFill>
-                <a:latin typeface="Calibri"/>
-                <a:ea typeface="Calibri"/>
-                <a:cs typeface="Calibri"/>
-                <a:sym typeface="Calibri"/>
-              </a:rPr>
-              <a:t>FastAPI + Uvicorn</a:t>
-            </a:r>
-            <a:endParaRPr sz="1100"/>
-          </a:p>
-        </p:txBody>
-      </p:sp>
-      <p:sp>
-        <p:nvSpPr>
-          <p:cNvPr id="673" name="Google Shape;673;p43"/>
-          <p:cNvSpPr txBox="1"/>
-          <p:nvPr/>
-        </p:nvSpPr>
-        <p:spPr>
-          <a:xfrm>
-            <a:off x="3038175" y="2852928"/>
-            <a:ext cx="1468337" cy="308610"/>
-          </a:xfrm>
-          <a:prstGeom prst="rect">
-            <a:avLst/>
-          </a:prstGeom>
-          <a:noFill/>
-          <a:ln>
-            <a:noFill/>
-          </a:ln>
-        </p:spPr>
-        <p:txBody>
-          <a:bodyPr anchorCtr="0" anchor="t" bIns="0" lIns="0" spcFirstLastPara="1" rIns="0" wrap="square" tIns="0">
-            <a:spAutoFit/>
-          </a:bodyPr>
-          <a:lstStyle/>
-          <a:p>
-            <a:pPr indent="0" lvl="0" marL="0" marR="0" rtl="0" algn="l">
-              <a:lnSpc>
-                <a:spcPct val="120000"/>
-              </a:lnSpc>
-              <a:spcBef>
-                <a:spcPts val="0"/>
-              </a:spcBef>
-              <a:spcAft>
-                <a:spcPts val="0"/>
-              </a:spcAft>
-              <a:buNone/>
-            </a:pPr>
-            <a:r>
-              <a:rPr b="0" i="0" lang="en" sz="800">
-                <a:solidFill>
-                  <a:srgbClr val="6B6B6B"/>
-                </a:solidFill>
-                <a:latin typeface="Calibri"/>
-                <a:ea typeface="Calibri"/>
-                <a:cs typeface="Calibri"/>
-                <a:sym typeface="Calibri"/>
-              </a:rPr>
-              <a:t>Typed Pydantic response models</a:t>
-            </a:r>
-            <a:endParaRPr sz="1100"/>
-          </a:p>
-        </p:txBody>
-      </p:sp>
-      <p:sp>
-        <p:nvSpPr>
-          <p:cNvPr id="674" name="Google Shape;674;p43"/>
-          <p:cNvSpPr/>
-          <p:nvPr/>
-        </p:nvSpPr>
-        <p:spPr>
-          <a:xfrm>
-            <a:off x="4739690" y="2571750"/>
-            <a:ext cx="1715231" cy="617220"/>
-          </a:xfrm>
-          <a:prstGeom prst="rect">
-            <a:avLst/>
-          </a:prstGeom>
-          <a:solidFill>
-            <a:srgbClr val="FAF8F4"/>
-          </a:solidFill>
-          <a:ln cap="flat" cmpd="sng" w="9525">
-            <a:solidFill>
-              <a:srgbClr val="D8D4CC"/>
-            </a:solidFill>
-            <a:prstDash val="solid"/>
-            <a:round/>
-            <a:headEnd len="sm" w="sm" type="none"/>
-            <a:tailEnd len="sm" w="sm" type="none"/>
-          </a:ln>
-        </p:spPr>
-        <p:txBody>
-          <a:bodyPr anchorCtr="0" anchor="ctr" bIns="34275" lIns="68575" spcFirstLastPara="1" rIns="68575" wrap="square" tIns="34275">
-            <a:noAutofit/>
-          </a:bodyPr>
-          <a:lstStyle/>
-          <a:p>
-            <a:pPr indent="0" lvl="0" marL="0" marR="0" rtl="0" algn="ctr">
-              <a:spcBef>
-                <a:spcPts val="0"/>
-              </a:spcBef>
-              <a:spcAft>
-                <a:spcPts val="0"/>
-              </a:spcAft>
-              <a:buNone/>
-            </a:pPr>
-            <a:r>
-              <a:t/>
-            </a:r>
-            <a:endParaRPr sz="1400">
-              <a:solidFill>
-                <a:schemeClr val="dk1"/>
-              </a:solidFill>
-              <a:latin typeface="Calibri"/>
-              <a:ea typeface="Calibri"/>
-              <a:cs typeface="Calibri"/>
-              <a:sym typeface="Calibri"/>
-            </a:endParaRPr>
-          </a:p>
-        </p:txBody>
-      </p:sp>
-      <p:sp>
-        <p:nvSpPr>
-          <p:cNvPr id="675" name="Google Shape;675;p43"/>
-          <p:cNvSpPr txBox="1"/>
-          <p:nvPr/>
-        </p:nvSpPr>
-        <p:spPr>
-          <a:xfrm>
-            <a:off x="4863137" y="2667762"/>
-            <a:ext cx="1468337" cy="171450"/>
-          </a:xfrm>
-          <a:prstGeom prst="rect">
-            <a:avLst/>
-          </a:prstGeom>
-          <a:noFill/>
-          <a:ln>
-            <a:noFill/>
-          </a:ln>
-        </p:spPr>
-        <p:txBody>
-          <a:bodyPr anchorCtr="0" anchor="t" bIns="0" lIns="0" spcFirstLastPara="1" rIns="0" wrap="square" tIns="0">
-            <a:spAutoFit/>
-          </a:bodyPr>
-          <a:lstStyle/>
-          <a:p>
-            <a:pPr indent="0" lvl="0" marL="0" marR="0" rtl="0" algn="l">
-              <a:lnSpc>
-                <a:spcPct val="125000"/>
-              </a:lnSpc>
-              <a:spcBef>
-                <a:spcPts val="0"/>
-              </a:spcBef>
-              <a:spcAft>
-                <a:spcPts val="0"/>
-              </a:spcAft>
-              <a:buNone/>
-            </a:pPr>
-            <a:r>
-              <a:rPr b="1" i="0" lang="en" sz="900">
-                <a:solidFill>
-                  <a:srgbClr val="1A1A1A"/>
-                </a:solidFill>
-                <a:latin typeface="Calibri"/>
-                <a:ea typeface="Calibri"/>
-                <a:cs typeface="Calibri"/>
-                <a:sym typeface="Calibri"/>
-              </a:rPr>
-              <a:t>pipeline.py</a:t>
-            </a:r>
-            <a:endParaRPr sz="1100"/>
-          </a:p>
-        </p:txBody>
-      </p:sp>
-      <p:sp>
-        <p:nvSpPr>
-          <p:cNvPr id="676" name="Google Shape;676;p43"/>
-          <p:cNvSpPr txBox="1"/>
-          <p:nvPr/>
-        </p:nvSpPr>
-        <p:spPr>
-          <a:xfrm>
-            <a:off x="4863137" y="2852928"/>
-            <a:ext cx="1468337" cy="308610"/>
-          </a:xfrm>
-          <a:prstGeom prst="rect">
-            <a:avLst/>
-          </a:prstGeom>
-          <a:noFill/>
-          <a:ln>
-            <a:noFill/>
-          </a:ln>
-        </p:spPr>
-        <p:txBody>
-          <a:bodyPr anchorCtr="0" anchor="t" bIns="0" lIns="0" spcFirstLastPara="1" rIns="0" wrap="square" tIns="0">
-            <a:spAutoFit/>
-          </a:bodyPr>
-          <a:lstStyle/>
-          <a:p>
-            <a:pPr indent="0" lvl="0" marL="0" marR="0" rtl="0" algn="l">
-              <a:lnSpc>
-                <a:spcPct val="120000"/>
-              </a:lnSpc>
-              <a:spcBef>
-                <a:spcPts val="0"/>
-              </a:spcBef>
-              <a:spcAft>
-                <a:spcPts val="0"/>
-              </a:spcAft>
-              <a:buNone/>
-            </a:pPr>
-            <a:r>
-              <a:rPr b="0" i="0" lang="en" sz="800">
-                <a:solidFill>
-                  <a:srgbClr val="6B6B6B"/>
-                </a:solidFill>
-                <a:latin typeface="Calibri"/>
-                <a:ea typeface="Calibri"/>
-                <a:cs typeface="Calibri"/>
-                <a:sym typeface="Calibri"/>
-              </a:rPr>
-              <a:t>The same code the notebook runs</a:t>
-            </a:r>
-            <a:endParaRPr sz="1100"/>
-          </a:p>
-        </p:txBody>
-      </p:sp>
-      <p:sp>
-        <p:nvSpPr>
-          <p:cNvPr id="677" name="Google Shape;677;p43"/>
-          <p:cNvSpPr/>
-          <p:nvPr/>
-        </p:nvSpPr>
-        <p:spPr>
-          <a:xfrm>
-            <a:off x="6564652" y="2571750"/>
-            <a:ext cx="1715231" cy="617220"/>
-          </a:xfrm>
-          <a:prstGeom prst="rect">
-            <a:avLst/>
-          </a:prstGeom>
-          <a:solidFill>
-            <a:srgbClr val="FAF8F4"/>
-          </a:solidFill>
-          <a:ln cap="flat" cmpd="sng" w="9525">
-            <a:solidFill>
-              <a:srgbClr val="D8D4CC"/>
-            </a:solidFill>
-            <a:prstDash val="solid"/>
-            <a:round/>
-            <a:headEnd len="sm" w="sm" type="none"/>
-            <a:tailEnd len="sm" w="sm" type="none"/>
-          </a:ln>
-        </p:spPr>
-        <p:txBody>
-          <a:bodyPr anchorCtr="0" anchor="ctr" bIns="34275" lIns="68575" spcFirstLastPara="1" rIns="68575" wrap="square" tIns="34275">
-            <a:noAutofit/>
-          </a:bodyPr>
-          <a:lstStyle/>
-          <a:p>
-            <a:pPr indent="0" lvl="0" marL="0" marR="0" rtl="0" algn="ctr">
-              <a:spcBef>
-                <a:spcPts val="0"/>
-              </a:spcBef>
-              <a:spcAft>
-                <a:spcPts val="0"/>
-              </a:spcAft>
-              <a:buNone/>
-            </a:pPr>
-            <a:r>
-              <a:t/>
-            </a:r>
-            <a:endParaRPr sz="1400">
-              <a:solidFill>
-                <a:schemeClr val="dk1"/>
-              </a:solidFill>
-              <a:latin typeface="Calibri"/>
-              <a:ea typeface="Calibri"/>
-              <a:cs typeface="Calibri"/>
-              <a:sym typeface="Calibri"/>
-            </a:endParaRPr>
-          </a:p>
-        </p:txBody>
-      </p:sp>
-      <p:sp>
-        <p:nvSpPr>
-          <p:cNvPr id="678" name="Google Shape;678;p43"/>
-          <p:cNvSpPr txBox="1"/>
-          <p:nvPr/>
-        </p:nvSpPr>
-        <p:spPr>
-          <a:xfrm>
-            <a:off x="6688099" y="2667762"/>
-            <a:ext cx="1468337" cy="171450"/>
-          </a:xfrm>
-          <a:prstGeom prst="rect">
-            <a:avLst/>
-          </a:prstGeom>
-          <a:noFill/>
-          <a:ln>
-            <a:noFill/>
-          </a:ln>
-        </p:spPr>
-        <p:txBody>
-          <a:bodyPr anchorCtr="0" anchor="t" bIns="0" lIns="0" spcFirstLastPara="1" rIns="0" wrap="square" tIns="0">
-            <a:spAutoFit/>
-          </a:bodyPr>
-          <a:lstStyle/>
-          <a:p>
-            <a:pPr indent="0" lvl="0" marL="0" marR="0" rtl="0" algn="l">
-              <a:lnSpc>
-                <a:spcPct val="125000"/>
-              </a:lnSpc>
-              <a:spcBef>
-                <a:spcPts val="0"/>
-              </a:spcBef>
-              <a:spcAft>
-                <a:spcPts val="0"/>
-              </a:spcAft>
-              <a:buNone/>
-            </a:pPr>
-            <a:r>
-              <a:rPr b="1" i="0" lang="en" sz="900">
-                <a:solidFill>
-                  <a:srgbClr val="1A1A1A"/>
-                </a:solidFill>
-                <a:latin typeface="Calibri"/>
-                <a:ea typeface="Calibri"/>
-                <a:cs typeface="Calibri"/>
-                <a:sym typeface="Calibri"/>
-              </a:rPr>
-              <a:t>In-memory cache</a:t>
-            </a:r>
-            <a:endParaRPr sz="1100"/>
-          </a:p>
-        </p:txBody>
-      </p:sp>
-      <p:sp>
-        <p:nvSpPr>
-          <p:cNvPr id="679" name="Google Shape;679;p43"/>
-          <p:cNvSpPr txBox="1"/>
-          <p:nvPr/>
-        </p:nvSpPr>
-        <p:spPr>
-          <a:xfrm>
-            <a:off x="6688099" y="2852928"/>
-            <a:ext cx="1468337" cy="308610"/>
-          </a:xfrm>
-          <a:prstGeom prst="rect">
-            <a:avLst/>
-          </a:prstGeom>
-          <a:noFill/>
-          <a:ln>
-            <a:noFill/>
-          </a:ln>
-        </p:spPr>
-        <p:txBody>
-          <a:bodyPr anchorCtr="0" anchor="t" bIns="0" lIns="0" spcFirstLastPara="1" rIns="0" wrap="square" tIns="0">
-            <a:spAutoFit/>
-          </a:bodyPr>
-          <a:lstStyle/>
-          <a:p>
-            <a:pPr indent="0" lvl="0" marL="0" marR="0" rtl="0" algn="l">
-              <a:lnSpc>
-                <a:spcPct val="120000"/>
-              </a:lnSpc>
-              <a:spcBef>
-                <a:spcPts val="0"/>
-              </a:spcBef>
-              <a:spcAft>
-                <a:spcPts val="0"/>
-              </a:spcAft>
-              <a:buNone/>
-            </a:pPr>
-            <a:r>
-              <a:rPr b="0" i="0" lang="en" sz="800">
-                <a:solidFill>
-                  <a:srgbClr val="6B6B6B"/>
-                </a:solidFill>
-                <a:latin typeface="Calibri"/>
-                <a:ea typeface="Calibri"/>
-                <a:cs typeface="Calibri"/>
-                <a:sym typeface="Calibri"/>
-              </a:rPr>
-              <a:t>Pipeline runs once at startup</a:t>
-            </a:r>
-            <a:endParaRPr sz="1100"/>
-          </a:p>
-        </p:txBody>
-      </p:sp>
-      <p:sp>
-        <p:nvSpPr>
-          <p:cNvPr id="680" name="Google Shape;680;p43"/>
-          <p:cNvSpPr/>
-          <p:nvPr/>
-        </p:nvSpPr>
-        <p:spPr>
-          <a:xfrm>
-            <a:off x="582946" y="3497580"/>
-            <a:ext cx="7978124" cy="822960"/>
-          </a:xfrm>
-          <a:prstGeom prst="rect">
-            <a:avLst/>
-          </a:prstGeom>
-          <a:solidFill>
-            <a:srgbClr val="F0ECE4"/>
-          </a:solidFill>
-          <a:ln>
-            <a:noFill/>
-          </a:ln>
-        </p:spPr>
-        <p:txBody>
-          <a:bodyPr anchorCtr="0" anchor="ctr" bIns="34275" lIns="68575" spcFirstLastPara="1" rIns="68575" wrap="square" tIns="34275">
-            <a:noAutofit/>
-          </a:bodyPr>
-          <a:lstStyle/>
-          <a:p>
-            <a:pPr indent="0" lvl="0" marL="0" marR="0" rtl="0" algn="ctr">
-              <a:spcBef>
-                <a:spcPts val="0"/>
-              </a:spcBef>
-              <a:spcAft>
-                <a:spcPts val="0"/>
-              </a:spcAft>
-              <a:buNone/>
-            </a:pPr>
-            <a:r>
-              <a:t/>
-            </a:r>
-            <a:endParaRPr sz="1400">
-              <a:solidFill>
-                <a:schemeClr val="dk1"/>
-              </a:solidFill>
-              <a:latin typeface="Calibri"/>
-              <a:ea typeface="Calibri"/>
-              <a:cs typeface="Calibri"/>
-              <a:sym typeface="Calibri"/>
-            </a:endParaRPr>
-          </a:p>
-        </p:txBody>
-      </p:sp>
-      <p:sp>
-        <p:nvSpPr>
-          <p:cNvPr id="681" name="Google Shape;681;p43"/>
-          <p:cNvSpPr/>
-          <p:nvPr/>
-        </p:nvSpPr>
-        <p:spPr>
-          <a:xfrm>
-            <a:off x="582946" y="3497580"/>
-            <a:ext cx="37720" cy="822960"/>
-          </a:xfrm>
-          <a:prstGeom prst="rect">
-            <a:avLst/>
-          </a:prstGeom>
-          <a:solidFill>
-            <a:srgbClr val="B45309"/>
-          </a:solidFill>
-          <a:ln>
-            <a:noFill/>
-          </a:ln>
-        </p:spPr>
-        <p:txBody>
-          <a:bodyPr anchorCtr="0" anchor="ctr" bIns="34275" lIns="68575" spcFirstLastPara="1" rIns="68575" wrap="square" tIns="34275">
-            <a:noAutofit/>
-          </a:bodyPr>
-          <a:lstStyle/>
-          <a:p>
-            <a:pPr indent="0" lvl="0" marL="0" marR="0" rtl="0" algn="ctr">
-              <a:spcBef>
-                <a:spcPts val="0"/>
-              </a:spcBef>
-              <a:spcAft>
-                <a:spcPts val="0"/>
-              </a:spcAft>
-              <a:buNone/>
-            </a:pPr>
-            <a:r>
-              <a:t/>
-            </a:r>
-            <a:endParaRPr sz="1400">
-              <a:solidFill>
-                <a:schemeClr val="dk1"/>
-              </a:solidFill>
-              <a:latin typeface="Calibri"/>
-              <a:ea typeface="Calibri"/>
-              <a:cs typeface="Calibri"/>
-              <a:sym typeface="Calibri"/>
-            </a:endParaRPr>
-          </a:p>
-        </p:txBody>
-      </p:sp>
-      <p:sp>
-        <p:nvSpPr>
-          <p:cNvPr id="682" name="Google Shape;682;p43"/>
-          <p:cNvSpPr txBox="1"/>
-          <p:nvPr/>
-        </p:nvSpPr>
-        <p:spPr>
-          <a:xfrm>
-            <a:off x="788691" y="3614166"/>
-            <a:ext cx="1783128" cy="171450"/>
-          </a:xfrm>
-          <a:prstGeom prst="rect">
-            <a:avLst/>
-          </a:prstGeom>
-          <a:noFill/>
-          <a:ln>
-            <a:noFill/>
-          </a:ln>
-        </p:spPr>
-        <p:txBody>
-          <a:bodyPr anchorCtr="0" anchor="t" bIns="0" lIns="0" spcFirstLastPara="1" rIns="0" wrap="square" tIns="0">
-            <a:spAutoFit/>
-          </a:bodyPr>
-          <a:lstStyle/>
-          <a:p>
-            <a:pPr indent="0" lvl="0" marL="0" marR="0" rtl="0" algn="l">
-              <a:lnSpc>
-                <a:spcPct val="125000"/>
-              </a:lnSpc>
-              <a:spcBef>
-                <a:spcPts val="0"/>
-              </a:spcBef>
-              <a:spcAft>
-                <a:spcPts val="0"/>
-              </a:spcAft>
-              <a:buNone/>
-            </a:pPr>
-            <a:r>
-              <a:rPr b="0" i="0" lang="en" sz="700">
-                <a:solidFill>
-                  <a:srgbClr val="B45309"/>
-                </a:solidFill>
-                <a:latin typeface="Consolas"/>
-                <a:ea typeface="Consolas"/>
-                <a:cs typeface="Consolas"/>
-                <a:sym typeface="Consolas"/>
-              </a:rPr>
-              <a:t>DATA LAYER</a:t>
-            </a:r>
-            <a:endParaRPr sz="1100"/>
-          </a:p>
-        </p:txBody>
-      </p:sp>
-      <p:sp>
-        <p:nvSpPr>
-          <p:cNvPr id="683" name="Google Shape;683;p43"/>
-          <p:cNvSpPr txBox="1"/>
-          <p:nvPr/>
-        </p:nvSpPr>
-        <p:spPr>
-          <a:xfrm>
-            <a:off x="788691" y="3819906"/>
-            <a:ext cx="1851709" cy="274320"/>
-          </a:xfrm>
-          <a:prstGeom prst="rect">
-            <a:avLst/>
-          </a:prstGeom>
-          <a:noFill/>
-          <a:ln>
-            <a:noFill/>
-          </a:ln>
-        </p:spPr>
-        <p:txBody>
-          <a:bodyPr anchorCtr="0" anchor="t" bIns="0" lIns="0" spcFirstLastPara="1" rIns="0" wrap="square" tIns="0">
-            <a:spAutoFit/>
-          </a:bodyPr>
-          <a:lstStyle/>
-          <a:p>
-            <a:pPr indent="0" lvl="0" marL="0" marR="0" rtl="0" algn="l">
-              <a:lnSpc>
-                <a:spcPct val="125000"/>
-              </a:lnSpc>
-              <a:spcBef>
-                <a:spcPts val="0"/>
-              </a:spcBef>
-              <a:spcAft>
-                <a:spcPts val="0"/>
-              </a:spcAft>
-              <a:buNone/>
-            </a:pPr>
-            <a:r>
-              <a:rPr b="0" i="0" lang="en" sz="1300">
-                <a:solidFill>
-                  <a:srgbClr val="1A1A1A"/>
-                </a:solidFill>
-                <a:latin typeface="Georgia"/>
-                <a:ea typeface="Georgia"/>
-                <a:cs typeface="Georgia"/>
-                <a:sym typeface="Georgia"/>
-              </a:rPr>
-              <a:t>Storage</a:t>
-            </a:r>
-            <a:endParaRPr sz="1100"/>
-          </a:p>
-        </p:txBody>
-      </p:sp>
-      <p:sp>
-        <p:nvSpPr>
-          <p:cNvPr id="684" name="Google Shape;684;p43"/>
-          <p:cNvSpPr/>
-          <p:nvPr/>
-        </p:nvSpPr>
-        <p:spPr>
-          <a:xfrm>
-            <a:off x="2914728" y="3600450"/>
-            <a:ext cx="1715231" cy="617220"/>
-          </a:xfrm>
-          <a:prstGeom prst="rect">
-            <a:avLst/>
-          </a:prstGeom>
-          <a:solidFill>
-            <a:srgbClr val="FAF8F4"/>
-          </a:solidFill>
-          <a:ln cap="flat" cmpd="sng" w="9525">
-            <a:solidFill>
-              <a:srgbClr val="D8D4CC"/>
-            </a:solidFill>
-            <a:prstDash val="solid"/>
-            <a:round/>
-            <a:headEnd len="sm" w="sm" type="none"/>
-            <a:tailEnd len="sm" w="sm" type="none"/>
-          </a:ln>
-        </p:spPr>
-        <p:txBody>
-          <a:bodyPr anchorCtr="0" anchor="ctr" bIns="34275" lIns="68575" spcFirstLastPara="1" rIns="68575" wrap="square" tIns="34275">
-            <a:noAutofit/>
-          </a:bodyPr>
-          <a:lstStyle/>
-          <a:p>
-            <a:pPr indent="0" lvl="0" marL="0" marR="0" rtl="0" algn="ctr">
-              <a:spcBef>
-                <a:spcPts val="0"/>
-              </a:spcBef>
-              <a:spcAft>
-                <a:spcPts val="0"/>
-              </a:spcAft>
-              <a:buNone/>
-            </a:pPr>
-            <a:r>
-              <a:t/>
-            </a:r>
-            <a:endParaRPr sz="1400">
-              <a:solidFill>
-                <a:schemeClr val="dk1"/>
-              </a:solidFill>
-              <a:latin typeface="Calibri"/>
-              <a:ea typeface="Calibri"/>
-              <a:cs typeface="Calibri"/>
-              <a:sym typeface="Calibri"/>
-            </a:endParaRPr>
-          </a:p>
-        </p:txBody>
-      </p:sp>
-      <p:sp>
-        <p:nvSpPr>
-          <p:cNvPr id="685" name="Google Shape;685;p43"/>
-          <p:cNvSpPr txBox="1"/>
-          <p:nvPr/>
-        </p:nvSpPr>
-        <p:spPr>
-          <a:xfrm>
-            <a:off x="3038175" y="3696462"/>
-            <a:ext cx="1468337" cy="171450"/>
-          </a:xfrm>
-          <a:prstGeom prst="rect">
-            <a:avLst/>
-          </a:prstGeom>
-          <a:noFill/>
-          <a:ln>
-            <a:noFill/>
-          </a:ln>
-        </p:spPr>
-        <p:txBody>
-          <a:bodyPr anchorCtr="0" anchor="t" bIns="0" lIns="0" spcFirstLastPara="1" rIns="0" wrap="square" tIns="0">
-            <a:spAutoFit/>
-          </a:bodyPr>
-          <a:lstStyle/>
-          <a:p>
-            <a:pPr indent="0" lvl="0" marL="0" marR="0" rtl="0" algn="l">
-              <a:lnSpc>
-                <a:spcPct val="125000"/>
-              </a:lnSpc>
-              <a:spcBef>
-                <a:spcPts val="0"/>
-              </a:spcBef>
-              <a:spcAft>
-                <a:spcPts val="0"/>
-              </a:spcAft>
-              <a:buNone/>
-            </a:pPr>
-            <a:r>
-              <a:rPr b="1" i="0" lang="en" sz="900">
-                <a:solidFill>
-                  <a:srgbClr val="1A1A1A"/>
-                </a:solidFill>
-                <a:latin typeface="Calibri"/>
-                <a:ea typeface="Calibri"/>
-                <a:cs typeface="Calibri"/>
-                <a:sym typeface="Calibri"/>
-              </a:rPr>
-              <a:t>data.csv</a:t>
-            </a:r>
-            <a:endParaRPr sz="1100"/>
-          </a:p>
-        </p:txBody>
-      </p:sp>
-      <p:sp>
-        <p:nvSpPr>
-          <p:cNvPr id="686" name="Google Shape;686;p43"/>
-          <p:cNvSpPr txBox="1"/>
-          <p:nvPr/>
-        </p:nvSpPr>
-        <p:spPr>
-          <a:xfrm>
-            <a:off x="3038175" y="3881628"/>
-            <a:ext cx="1468337" cy="308610"/>
-          </a:xfrm>
-          <a:prstGeom prst="rect">
-            <a:avLst/>
-          </a:prstGeom>
-          <a:noFill/>
-          <a:ln>
-            <a:noFill/>
-          </a:ln>
-        </p:spPr>
-        <p:txBody>
-          <a:bodyPr anchorCtr="0" anchor="t" bIns="0" lIns="0" spcFirstLastPara="1" rIns="0" wrap="square" tIns="0">
-            <a:spAutoFit/>
-          </a:bodyPr>
-          <a:lstStyle/>
-          <a:p>
-            <a:pPr indent="0" lvl="0" marL="0" marR="0" rtl="0" algn="l">
-              <a:lnSpc>
-                <a:spcPct val="120000"/>
-              </a:lnSpc>
-              <a:spcBef>
-                <a:spcPts val="0"/>
-              </a:spcBef>
-              <a:spcAft>
-                <a:spcPts val="0"/>
-              </a:spcAft>
-              <a:buNone/>
-            </a:pPr>
-            <a:r>
-              <a:rPr b="0" i="0" lang="en" sz="800">
-                <a:solidFill>
-                  <a:srgbClr val="6B6B6B"/>
-                </a:solidFill>
-                <a:latin typeface="Calibri"/>
-                <a:ea typeface="Calibri"/>
-                <a:cs typeface="Calibri"/>
-                <a:sym typeface="Calibri"/>
-              </a:rPr>
-              <a:t>541,909 raw transaction rows</a:t>
-            </a:r>
-            <a:endParaRPr sz="1100"/>
-          </a:p>
-        </p:txBody>
-      </p:sp>
-      <p:sp>
-        <p:nvSpPr>
-          <p:cNvPr id="687" name="Google Shape;687;p43"/>
-          <p:cNvSpPr/>
-          <p:nvPr/>
-        </p:nvSpPr>
-        <p:spPr>
-          <a:xfrm>
-            <a:off x="4739690" y="3600450"/>
-            <a:ext cx="1715231" cy="617220"/>
-          </a:xfrm>
-          <a:prstGeom prst="rect">
-            <a:avLst/>
-          </a:prstGeom>
-          <a:solidFill>
-            <a:srgbClr val="FAF8F4"/>
-          </a:solidFill>
-          <a:ln cap="flat" cmpd="sng" w="9525">
-            <a:solidFill>
-              <a:srgbClr val="D8D4CC"/>
-            </a:solidFill>
-            <a:prstDash val="solid"/>
-            <a:round/>
-            <a:headEnd len="sm" w="sm" type="none"/>
-            <a:tailEnd len="sm" w="sm" type="none"/>
-          </a:ln>
-        </p:spPr>
-        <p:txBody>
-          <a:bodyPr anchorCtr="0" anchor="ctr" bIns="34275" lIns="68575" spcFirstLastPara="1" rIns="68575" wrap="square" tIns="34275">
-            <a:noAutofit/>
-          </a:bodyPr>
-          <a:lstStyle/>
-          <a:p>
-            <a:pPr indent="0" lvl="0" marL="0" marR="0" rtl="0" algn="ctr">
-              <a:spcBef>
-                <a:spcPts val="0"/>
-              </a:spcBef>
-              <a:spcAft>
-                <a:spcPts val="0"/>
-              </a:spcAft>
-              <a:buNone/>
-            </a:pPr>
-            <a:r>
-              <a:t/>
-            </a:r>
-            <a:endParaRPr sz="1400">
-              <a:solidFill>
-                <a:schemeClr val="dk1"/>
-              </a:solidFill>
-              <a:latin typeface="Calibri"/>
-              <a:ea typeface="Calibri"/>
-              <a:cs typeface="Calibri"/>
-              <a:sym typeface="Calibri"/>
-            </a:endParaRPr>
-          </a:p>
-        </p:txBody>
-      </p:sp>
-      <p:sp>
-        <p:nvSpPr>
-          <p:cNvPr id="688" name="Google Shape;688;p43"/>
-          <p:cNvSpPr txBox="1"/>
-          <p:nvPr/>
-        </p:nvSpPr>
-        <p:spPr>
-          <a:xfrm>
-            <a:off x="4863137" y="3696462"/>
-            <a:ext cx="1468337" cy="171450"/>
-          </a:xfrm>
-          <a:prstGeom prst="rect">
-            <a:avLst/>
-          </a:prstGeom>
-          <a:noFill/>
-          <a:ln>
-            <a:noFill/>
-          </a:ln>
-        </p:spPr>
-        <p:txBody>
-          <a:bodyPr anchorCtr="0" anchor="t" bIns="0" lIns="0" spcFirstLastPara="1" rIns="0" wrap="square" tIns="0">
-            <a:spAutoFit/>
-          </a:bodyPr>
-          <a:lstStyle/>
-          <a:p>
-            <a:pPr indent="0" lvl="0" marL="0" marR="0" rtl="0" algn="l">
-              <a:lnSpc>
-                <a:spcPct val="125000"/>
-              </a:lnSpc>
-              <a:spcBef>
-                <a:spcPts val="0"/>
-              </a:spcBef>
-              <a:spcAft>
-                <a:spcPts val="0"/>
-              </a:spcAft>
-              <a:buNone/>
-            </a:pPr>
-            <a:r>
-              <a:rPr b="1" i="0" lang="en" sz="900">
-                <a:solidFill>
-                  <a:srgbClr val="1A1A1A"/>
-                </a:solidFill>
-                <a:latin typeface="Calibri"/>
-                <a:ea typeface="Calibri"/>
-                <a:cs typeface="Calibri"/>
-                <a:sym typeface="Calibri"/>
-              </a:rPr>
-              <a:t>SQLite</a:t>
-            </a:r>
-            <a:endParaRPr sz="1100"/>
-          </a:p>
-        </p:txBody>
-      </p:sp>
-      <p:sp>
-        <p:nvSpPr>
-          <p:cNvPr id="689" name="Google Shape;689;p43"/>
-          <p:cNvSpPr txBox="1"/>
-          <p:nvPr/>
-        </p:nvSpPr>
-        <p:spPr>
-          <a:xfrm>
-            <a:off x="4863137" y="3881628"/>
-            <a:ext cx="1468337" cy="308610"/>
-          </a:xfrm>
-          <a:prstGeom prst="rect">
-            <a:avLst/>
-          </a:prstGeom>
-          <a:noFill/>
-          <a:ln>
-            <a:noFill/>
-          </a:ln>
-        </p:spPr>
-        <p:txBody>
-          <a:bodyPr anchorCtr="0" anchor="t" bIns="0" lIns="0" spcFirstLastPara="1" rIns="0" wrap="square" tIns="0">
-            <a:spAutoFit/>
-          </a:bodyPr>
-          <a:lstStyle/>
-          <a:p>
-            <a:pPr indent="0" lvl="0" marL="0" marR="0" rtl="0" algn="l">
-              <a:lnSpc>
-                <a:spcPct val="120000"/>
-              </a:lnSpc>
-              <a:spcBef>
-                <a:spcPts val="0"/>
-              </a:spcBef>
-              <a:spcAft>
-                <a:spcPts val="0"/>
-              </a:spcAft>
-              <a:buNone/>
-            </a:pPr>
-            <a:r>
-              <a:rPr b="0" i="0" lang="en" sz="800">
-                <a:solidFill>
-                  <a:srgbClr val="6B6B6B"/>
-                </a:solidFill>
-                <a:latin typeface="Calibri"/>
-                <a:ea typeface="Calibri"/>
-                <a:cs typeface="Calibri"/>
-                <a:sym typeface="Calibri"/>
-              </a:rPr>
-              <a:t>Product catalogue + demo purchases</a:t>
-            </a:r>
-            <a:endParaRPr sz="1100"/>
-          </a:p>
-        </p:txBody>
-      </p:sp>
-      <p:sp>
-        <p:nvSpPr>
-          <p:cNvPr id="690" name="Google Shape;690;p43"/>
-          <p:cNvSpPr/>
-          <p:nvPr/>
-        </p:nvSpPr>
-        <p:spPr>
-          <a:xfrm>
-            <a:off x="6564652" y="3600450"/>
-            <a:ext cx="1715231" cy="617220"/>
-          </a:xfrm>
-          <a:prstGeom prst="rect">
-            <a:avLst/>
-          </a:prstGeom>
-          <a:solidFill>
-            <a:srgbClr val="FAF8F4"/>
-          </a:solidFill>
-          <a:ln cap="flat" cmpd="sng" w="9525">
-            <a:solidFill>
-              <a:srgbClr val="D8D4CC"/>
-            </a:solidFill>
-            <a:prstDash val="solid"/>
-            <a:round/>
-            <a:headEnd len="sm" w="sm" type="none"/>
-            <a:tailEnd len="sm" w="sm" type="none"/>
-          </a:ln>
-        </p:spPr>
-        <p:txBody>
-          <a:bodyPr anchorCtr="0" anchor="ctr" bIns="34275" lIns="68575" spcFirstLastPara="1" rIns="68575" wrap="square" tIns="34275">
-            <a:noAutofit/>
-          </a:bodyPr>
-          <a:lstStyle/>
-          <a:p>
-            <a:pPr indent="0" lvl="0" marL="0" marR="0" rtl="0" algn="ctr">
-              <a:spcBef>
-                <a:spcPts val="0"/>
-              </a:spcBef>
-              <a:spcAft>
-                <a:spcPts val="0"/>
-              </a:spcAft>
-              <a:buNone/>
-            </a:pPr>
-            <a:r>
-              <a:t/>
-            </a:r>
-            <a:endParaRPr sz="1400">
-              <a:solidFill>
-                <a:schemeClr val="dk1"/>
-              </a:solidFill>
-              <a:latin typeface="Calibri"/>
-              <a:ea typeface="Calibri"/>
-              <a:cs typeface="Calibri"/>
-              <a:sym typeface="Calibri"/>
-            </a:endParaRPr>
-          </a:p>
-        </p:txBody>
-      </p:sp>
-      <p:sp>
-        <p:nvSpPr>
-          <p:cNvPr id="691" name="Google Shape;691;p43"/>
-          <p:cNvSpPr txBox="1"/>
-          <p:nvPr/>
-        </p:nvSpPr>
-        <p:spPr>
-          <a:xfrm>
-            <a:off x="6688099" y="3696462"/>
-            <a:ext cx="1468337" cy="171450"/>
-          </a:xfrm>
-          <a:prstGeom prst="rect">
-            <a:avLst/>
-          </a:prstGeom>
-          <a:noFill/>
-          <a:ln>
-            <a:noFill/>
-          </a:ln>
-        </p:spPr>
-        <p:txBody>
-          <a:bodyPr anchorCtr="0" anchor="t" bIns="0" lIns="0" spcFirstLastPara="1" rIns="0" wrap="square" tIns="0">
-            <a:spAutoFit/>
-          </a:bodyPr>
-          <a:lstStyle/>
-          <a:p>
-            <a:pPr indent="0" lvl="0" marL="0" marR="0" rtl="0" algn="l">
-              <a:lnSpc>
-                <a:spcPct val="125000"/>
-              </a:lnSpc>
-              <a:spcBef>
-                <a:spcPts val="0"/>
-              </a:spcBef>
-              <a:spcAft>
-                <a:spcPts val="0"/>
-              </a:spcAft>
-              <a:buNone/>
-            </a:pPr>
-            <a:r>
-              <a:rPr b="1" i="0" lang="en" sz="900">
-                <a:solidFill>
-                  <a:srgbClr val="1A1A1A"/>
-                </a:solidFill>
-                <a:latin typeface="Calibri"/>
-                <a:ea typeface="Calibri"/>
-                <a:cs typeface="Calibri"/>
-                <a:sym typeface="Calibri"/>
-              </a:rPr>
-              <a:t>scikit-learn models</a:t>
-            </a:r>
-            <a:endParaRPr sz="1100"/>
-          </a:p>
-        </p:txBody>
-      </p:sp>
-      <p:sp>
-        <p:nvSpPr>
-          <p:cNvPr id="692" name="Google Shape;692;p43"/>
-          <p:cNvSpPr txBox="1"/>
-          <p:nvPr/>
-        </p:nvSpPr>
-        <p:spPr>
-          <a:xfrm>
-            <a:off x="6688099" y="3881628"/>
-            <a:ext cx="1468337" cy="308610"/>
-          </a:xfrm>
-          <a:prstGeom prst="rect">
-            <a:avLst/>
-          </a:prstGeom>
-          <a:noFill/>
-          <a:ln>
-            <a:noFill/>
-          </a:ln>
-        </p:spPr>
-        <p:txBody>
-          <a:bodyPr anchorCtr="0" anchor="t" bIns="0" lIns="0" spcFirstLastPara="1" rIns="0" wrap="square" tIns="0">
-            <a:spAutoFit/>
-          </a:bodyPr>
-          <a:lstStyle/>
-          <a:p>
-            <a:pPr indent="0" lvl="0" marL="0" marR="0" rtl="0" algn="l">
-              <a:lnSpc>
-                <a:spcPct val="120000"/>
-              </a:lnSpc>
-              <a:spcBef>
-                <a:spcPts val="0"/>
-              </a:spcBef>
-              <a:spcAft>
-                <a:spcPts val="0"/>
-              </a:spcAft>
-              <a:buNone/>
-            </a:pPr>
-            <a:r>
-              <a:rPr b="0" i="0" lang="en" sz="800">
-                <a:solidFill>
-                  <a:srgbClr val="6B6B6B"/>
-                </a:solidFill>
-                <a:latin typeface="Calibri"/>
-                <a:ea typeface="Calibri"/>
-                <a:cs typeface="Calibri"/>
-                <a:sym typeface="Calibri"/>
-              </a:rPr>
-              <a:t>Fitted scaler, K-Means, PCA, LR</a:t>
-            </a:r>
-            <a:endParaRPr sz="1100"/>
-          </a:p>
-        </p:txBody>
-      </p:sp>
-      <p:sp>
-        <p:nvSpPr>
-          <p:cNvPr id="693" name="Google Shape;693;p43"/>
-          <p:cNvSpPr/>
-          <p:nvPr/>
-        </p:nvSpPr>
-        <p:spPr>
-          <a:xfrm rot="10800000">
-            <a:off x="4469134" y="2290572"/>
-            <a:ext cx="205745" cy="150876"/>
-          </a:xfrm>
-          <a:prstGeom prst="triangle">
-            <a:avLst>
-              <a:gd fmla="val 50000" name="adj"/>
-            </a:avLst>
-          </a:prstGeom>
-          <a:solidFill>
-            <a:srgbClr val="D8D4CC"/>
-          </a:solidFill>
-          <a:ln>
-            <a:noFill/>
-          </a:ln>
-        </p:spPr>
-        <p:txBody>
-          <a:bodyPr anchorCtr="0" anchor="ctr" bIns="34275" lIns="68575" spcFirstLastPara="1" rIns="68575" wrap="square" tIns="34275">
-            <a:noAutofit/>
-          </a:bodyPr>
-          <a:lstStyle/>
-          <a:p>
-            <a:pPr indent="0" lvl="0" marL="0" marR="0" rtl="0" algn="ctr">
-              <a:spcBef>
-                <a:spcPts val="0"/>
-              </a:spcBef>
-              <a:spcAft>
-                <a:spcPts val="0"/>
-              </a:spcAft>
-              <a:buNone/>
-            </a:pPr>
-            <a:r>
-              <a:t/>
-            </a:r>
-            <a:endParaRPr sz="1400">
-              <a:solidFill>
-                <a:schemeClr val="dk1"/>
-              </a:solidFill>
-              <a:latin typeface="Calibri"/>
-              <a:ea typeface="Calibri"/>
-              <a:cs typeface="Calibri"/>
-              <a:sym typeface="Calibri"/>
-            </a:endParaRPr>
-          </a:p>
-        </p:txBody>
-      </p:sp>
-      <p:sp>
-        <p:nvSpPr>
-          <p:cNvPr id="694" name="Google Shape;694;p43"/>
-          <p:cNvSpPr/>
-          <p:nvPr/>
-        </p:nvSpPr>
-        <p:spPr>
-          <a:xfrm rot="10800000">
-            <a:off x="4469134" y="3319272"/>
-            <a:ext cx="205745" cy="150876"/>
-          </a:xfrm>
-          <a:prstGeom prst="triangle">
-            <a:avLst>
-              <a:gd fmla="val 50000" name="adj"/>
-            </a:avLst>
-          </a:prstGeom>
-          <a:solidFill>
-            <a:srgbClr val="D8D4CC"/>
-          </a:solidFill>
-          <a:ln>
-            <a:noFill/>
-          </a:ln>
-        </p:spPr>
-        <p:txBody>
-          <a:bodyPr anchorCtr="0" anchor="ctr" bIns="34275" lIns="68575" spcFirstLastPara="1" rIns="68575" wrap="square" tIns="34275">
-            <a:noAutofit/>
-          </a:bodyPr>
-          <a:lstStyle/>
-          <a:p>
-            <a:pPr indent="0" lvl="0" marL="0" marR="0" rtl="0" algn="ctr">
-              <a:spcBef>
-                <a:spcPts val="0"/>
-              </a:spcBef>
-              <a:spcAft>
-                <a:spcPts val="0"/>
-              </a:spcAft>
-              <a:buNone/>
-            </a:pPr>
-            <a:r>
-              <a:t/>
-            </a:r>
-            <a:endParaRPr sz="1400">
-              <a:solidFill>
-                <a:schemeClr val="dk1"/>
-              </a:solidFill>
-              <a:latin typeface="Calibri"/>
-              <a:ea typeface="Calibri"/>
-              <a:cs typeface="Calibri"/>
-              <a:sym typeface="Calibri"/>
-            </a:endParaRPr>
-          </a:p>
-        </p:txBody>
-      </p:sp>
-      <p:sp>
-        <p:nvSpPr>
-          <p:cNvPr id="695" name="Google Shape;695;p43"/>
-          <p:cNvSpPr txBox="1"/>
-          <p:nvPr/>
-        </p:nvSpPr>
-        <p:spPr>
-          <a:xfrm>
-            <a:off x="582946" y="4402836"/>
-            <a:ext cx="7978124" cy="274320"/>
-          </a:xfrm>
-          <a:prstGeom prst="rect">
-            <a:avLst/>
-          </a:prstGeom>
-          <a:noFill/>
-          <a:ln>
-            <a:noFill/>
-          </a:ln>
-        </p:spPr>
-        <p:txBody>
-          <a:bodyPr anchorCtr="0" anchor="t" bIns="0" lIns="0" spcFirstLastPara="1" rIns="0" wrap="square" tIns="0">
-            <a:spAutoFit/>
-          </a:bodyPr>
-          <a:lstStyle/>
-          <a:p>
-            <a:pPr indent="0" lvl="0" marL="0" marR="0" rtl="0" algn="l">
-              <a:lnSpc>
-                <a:spcPct val="125000"/>
-              </a:lnSpc>
-              <a:spcBef>
-                <a:spcPts val="0"/>
-              </a:spcBef>
-              <a:spcAft>
-                <a:spcPts val="0"/>
-              </a:spcAft>
-              <a:buNone/>
-            </a:pPr>
-            <a:r>
-              <a:rPr b="0" i="1" lang="en" sz="1000">
-                <a:solidFill>
-                  <a:srgbClr val="B45309"/>
-                </a:solidFill>
-                <a:latin typeface="Georgia"/>
-                <a:ea typeface="Georgia"/>
-                <a:cs typeface="Georgia"/>
-                <a:sym typeface="Georgia"/>
-              </a:rPr>
-              <a:t>Key decision: the backend imports the notebook's own pipeline — dashboard and analysis can never disagree.</a:t>
-            </a:r>
-            <a:endParaRPr sz="1100"/>
-          </a:p>
-        </p:txBody>
-      </p:sp>
-      <p:cxnSp>
-        <p:nvCxnSpPr>
-          <p:cNvPr id="696" name="Google Shape;696;p43"/>
-          <p:cNvCxnSpPr/>
-          <p:nvPr/>
-        </p:nvCxnSpPr>
-        <p:spPr>
-          <a:xfrm>
-            <a:off x="582946" y="4718304"/>
-            <a:ext cx="7978124" cy="0"/>
-          </a:xfrm>
-          <a:prstGeom prst="straightConnector1">
-            <a:avLst/>
-          </a:prstGeom>
-          <a:noFill/>
-          <a:ln cap="flat" cmpd="sng" w="9525">
-            <a:solidFill>
-              <a:srgbClr val="D8D4CC"/>
-            </a:solidFill>
-            <a:prstDash val="solid"/>
-            <a:round/>
-            <a:headEnd len="sm" w="sm" type="none"/>
-            <a:tailEnd len="sm" w="sm" type="none"/>
-          </a:ln>
-          <a:effectLst>
-            <a:outerShdw blurRad="40000" rotWithShape="0" dir="5400000" dist="20000">
-              <a:srgbClr val="000000">
-                <a:alpha val="38039"/>
-              </a:srgbClr>
-            </a:outerShdw>
-          </a:effectLst>
-        </p:spPr>
-      </p:cxnSp>
-      <p:sp>
-        <p:nvSpPr>
-          <p:cNvPr id="697" name="Google Shape;697;p43"/>
-          <p:cNvSpPr txBox="1"/>
-          <p:nvPr/>
-        </p:nvSpPr>
-        <p:spPr>
-          <a:xfrm>
-            <a:off x="582946" y="4800600"/>
-            <a:ext cx="4800728" cy="171450"/>
-          </a:xfrm>
-          <a:prstGeom prst="rect">
-            <a:avLst/>
-          </a:prstGeom>
-          <a:noFill/>
-          <a:ln>
-            <a:noFill/>
-          </a:ln>
-        </p:spPr>
-        <p:txBody>
-          <a:bodyPr anchorCtr="0" anchor="t" bIns="0" lIns="0" spcFirstLastPara="1" rIns="0" wrap="square" tIns="0">
-            <a:spAutoFit/>
-          </a:bodyPr>
-          <a:lstStyle/>
-          <a:p>
-            <a:pPr indent="0" lvl="0" marL="0" marR="0" rtl="0" algn="l">
-              <a:lnSpc>
-                <a:spcPct val="125000"/>
-              </a:lnSpc>
-              <a:spcBef>
-                <a:spcPts val="0"/>
-              </a:spcBef>
-              <a:spcAft>
-                <a:spcPts val="0"/>
-              </a:spcAft>
-              <a:buNone/>
-            </a:pPr>
-            <a:r>
-              <a:rPr b="0" i="0" lang="en" sz="600">
-                <a:solidFill>
-                  <a:srgbClr val="6B6B6B"/>
-                </a:solidFill>
-                <a:latin typeface="Consolas"/>
-                <a:ea typeface="Consolas"/>
-                <a:cs typeface="Consolas"/>
-                <a:sym typeface="Consolas"/>
-              </a:rPr>
-              <a:t>CUSTOMER SEGMENTATION FOR TARGETED E-COMMERCE MARKETING</a:t>
-            </a:r>
-            <a:endParaRPr sz="1100"/>
-          </a:p>
-        </p:txBody>
-      </p:sp>
-      <p:sp>
-        <p:nvSpPr>
-          <p:cNvPr id="698" name="Google Shape;698;p43"/>
-          <p:cNvSpPr txBox="1"/>
-          <p:nvPr/>
-        </p:nvSpPr>
-        <p:spPr>
-          <a:xfrm>
-            <a:off x="7189433" y="4800600"/>
-            <a:ext cx="1371637" cy="171450"/>
-          </a:xfrm>
-          <a:prstGeom prst="rect">
-            <a:avLst/>
-          </a:prstGeom>
-          <a:noFill/>
-          <a:ln>
-            <a:noFill/>
-          </a:ln>
-        </p:spPr>
-        <p:txBody>
-          <a:bodyPr anchorCtr="0" anchor="t" bIns="0" lIns="0" spcFirstLastPara="1" rIns="0" wrap="square" tIns="0">
-            <a:spAutoFit/>
-          </a:bodyPr>
-          <a:lstStyle/>
-          <a:p>
-            <a:pPr indent="0" lvl="0" marL="0" marR="0" rtl="0" algn="r">
-              <a:lnSpc>
-                <a:spcPct val="125000"/>
-              </a:lnSpc>
-              <a:spcBef>
-                <a:spcPts val="0"/>
-              </a:spcBef>
-              <a:spcAft>
-                <a:spcPts val="0"/>
-              </a:spcAft>
-              <a:buNone/>
-            </a:pPr>
-            <a:r>
-              <a:rPr b="0" i="0" lang="en" sz="600">
-                <a:solidFill>
-                  <a:srgbClr val="6B6B6B"/>
-                </a:solidFill>
-                <a:latin typeface="Consolas"/>
-                <a:ea typeface="Consolas"/>
-                <a:cs typeface="Consolas"/>
-                <a:sym typeface="Consolas"/>
-              </a:rPr>
-              <a:t>19 / 27</a:t>
+              <a:t>19 / 28</a:t>
             </a:r>
             <a:endParaRPr sz="1100"/>
           </a:p>
@@ -36581,7 +34813,7 @@
                 <a:cs typeface="Consolas"/>
                 <a:sym typeface="Consolas"/>
               </a:rPr>
-              <a:t>02 / 27</a:t>
+              <a:t>02 / 28</a:t>
             </a:r>
             <a:endParaRPr sz="1100"/>
           </a:p>
@@ -36596,6 +34828,2619 @@
 </file>
 
 <file path=ppt/slides/slide20.xml><?xml version="1.0" encoding="utf-8"?>
+<p:sld xmlns:a="http://schemas.openxmlformats.org/drawingml/2006/main" xmlns:r="http://schemas.openxmlformats.org/officeDocument/2006/relationships" xmlns:mc="http://schemas.openxmlformats.org/markup-compatibility/2006" xmlns:mv="urn:schemas-microsoft-com:mac:vml" xmlns:p="http://schemas.openxmlformats.org/presentationml/2006/main" xmlns:c="http://schemas.openxmlformats.org/drawingml/2006/chart" xmlns:dgm="http://schemas.openxmlformats.org/drawingml/2006/diagram" xmlns:o="urn:schemas-microsoft-com:office:office" xmlns:v="urn:schemas-microsoft-com:vml" xmlns:pvml="urn:schemas-microsoft-com:office:powerpoint" xmlns:com="http://schemas.openxmlformats.org/drawingml/2006/compatibility" xmlns:p14="http://schemas.microsoft.com/office/powerpoint/2010/main" xmlns:p15="http://schemas.microsoft.com/office/powerpoint/2012/main" xmlns:ahyp="http://schemas.microsoft.com/office/drawing/2018/hyperlinkcolor">
+  <p:cSld>
+    <p:spTree>
+      <p:nvGrpSpPr>
+        <p:cNvPr id="649" name="Shape 649"/>
+        <p:cNvGrpSpPr/>
+        <p:nvPr/>
+      </p:nvGrpSpPr>
+      <p:grpSpPr>
+        <a:xfrm>
+          <a:off x="0" y="0"/>
+          <a:ext cx="0" cy="0"/>
+          <a:chOff x="0" y="0"/>
+          <a:chExt cx="0" cy="0"/>
+        </a:xfrm>
+      </p:grpSpPr>
+      <p:sp>
+        <p:nvSpPr>
+          <p:cNvPr id="650" name="Google Shape;650;p43"/>
+          <p:cNvSpPr/>
+          <p:nvPr/>
+        </p:nvSpPr>
+        <p:spPr>
+          <a:xfrm>
+            <a:off x="0" y="0"/>
+            <a:ext cx="9144015" cy="5143500"/>
+          </a:xfrm>
+          <a:prstGeom prst="rect">
+            <a:avLst/>
+          </a:prstGeom>
+          <a:solidFill>
+            <a:srgbClr val="FAF8F4"/>
+          </a:solidFill>
+          <a:ln>
+            <a:noFill/>
+          </a:ln>
+        </p:spPr>
+        <p:txBody>
+          <a:bodyPr anchorCtr="0" anchor="ctr" bIns="34275" lIns="68575" spcFirstLastPara="1" rIns="68575" wrap="square" tIns="34275">
+            <a:noAutofit/>
+          </a:bodyPr>
+          <a:lstStyle/>
+          <a:p>
+            <a:pPr indent="0" lvl="0" marL="0" marR="0" rtl="0" algn="ctr">
+              <a:spcBef>
+                <a:spcPts val="0"/>
+              </a:spcBef>
+              <a:spcAft>
+                <a:spcPts val="0"/>
+              </a:spcAft>
+              <a:buNone/>
+            </a:pPr>
+            <a:r>
+              <a:t/>
+            </a:r>
+            <a:endParaRPr sz="1400">
+              <a:solidFill>
+                <a:schemeClr val="dk1"/>
+              </a:solidFill>
+              <a:latin typeface="Calibri"/>
+              <a:ea typeface="Calibri"/>
+              <a:cs typeface="Calibri"/>
+              <a:sym typeface="Calibri"/>
+            </a:endParaRPr>
+          </a:p>
+        </p:txBody>
+      </p:sp>
+      <p:sp>
+        <p:nvSpPr>
+          <p:cNvPr id="651" name="Google Shape;651;p43"/>
+          <p:cNvSpPr txBox="1"/>
+          <p:nvPr/>
+        </p:nvSpPr>
+        <p:spPr>
+          <a:xfrm>
+            <a:off x="582946" y="425196"/>
+            <a:ext cx="7978124" cy="205740"/>
+          </a:xfrm>
+          <a:prstGeom prst="rect">
+            <a:avLst/>
+          </a:prstGeom>
+          <a:noFill/>
+          <a:ln>
+            <a:noFill/>
+          </a:ln>
+        </p:spPr>
+        <p:txBody>
+          <a:bodyPr anchorCtr="0" anchor="t" bIns="0" lIns="0" spcFirstLastPara="1" rIns="0" wrap="square" tIns="0">
+            <a:spAutoFit/>
+          </a:bodyPr>
+          <a:lstStyle/>
+          <a:p>
+            <a:pPr indent="0" lvl="0" marL="0" marR="0" rtl="0" algn="l">
+              <a:spcBef>
+                <a:spcPts val="0"/>
+              </a:spcBef>
+              <a:spcAft>
+                <a:spcPts val="0"/>
+              </a:spcAft>
+              <a:buNone/>
+            </a:pPr>
+            <a:r>
+              <a:rPr b="1" lang="en" sz="800">
+                <a:solidFill>
+                  <a:srgbClr val="B45309"/>
+                </a:solidFill>
+                <a:latin typeface="Consolas"/>
+                <a:ea typeface="Consolas"/>
+                <a:cs typeface="Consolas"/>
+                <a:sym typeface="Consolas"/>
+              </a:rPr>
+              <a:t>05  </a:t>
+            </a:r>
+            <a:r>
+              <a:rPr lang="en" sz="800">
+                <a:solidFill>
+                  <a:srgbClr val="6B6B6B"/>
+                </a:solidFill>
+                <a:latin typeface="Consolas"/>
+                <a:ea typeface="Consolas"/>
+                <a:cs typeface="Consolas"/>
+                <a:sym typeface="Consolas"/>
+              </a:rPr>
+              <a:t>SYSTEM ARCHITECTURE   ·   SAME PIPELINE, THREE SURFACES</a:t>
+            </a:r>
+            <a:endParaRPr sz="1100"/>
+          </a:p>
+        </p:txBody>
+      </p:sp>
+      <p:sp>
+        <p:nvSpPr>
+          <p:cNvPr id="652" name="Google Shape;652;p43"/>
+          <p:cNvSpPr txBox="1"/>
+          <p:nvPr/>
+        </p:nvSpPr>
+        <p:spPr>
+          <a:xfrm>
+            <a:off x="582946" y="699516"/>
+            <a:ext cx="7978124" cy="514350"/>
+          </a:xfrm>
+          <a:prstGeom prst="rect">
+            <a:avLst/>
+          </a:prstGeom>
+          <a:noFill/>
+          <a:ln>
+            <a:noFill/>
+          </a:ln>
+        </p:spPr>
+        <p:txBody>
+          <a:bodyPr anchorCtr="0" anchor="t" bIns="0" lIns="0" spcFirstLastPara="1" rIns="0" wrap="square" tIns="0">
+            <a:spAutoFit/>
+          </a:bodyPr>
+          <a:lstStyle/>
+          <a:p>
+            <a:pPr indent="0" lvl="0" marL="0" marR="0" rtl="0" algn="l">
+              <a:lnSpc>
+                <a:spcPct val="100000"/>
+              </a:lnSpc>
+              <a:spcBef>
+                <a:spcPts val="0"/>
+              </a:spcBef>
+              <a:spcAft>
+                <a:spcPts val="0"/>
+              </a:spcAft>
+              <a:buNone/>
+            </a:pPr>
+            <a:r>
+              <a:rPr b="0" i="0" lang="en" sz="2400">
+                <a:solidFill>
+                  <a:srgbClr val="1A1A1A"/>
+                </a:solidFill>
+                <a:latin typeface="Georgia"/>
+                <a:ea typeface="Georgia"/>
+                <a:cs typeface="Georgia"/>
+                <a:sym typeface="Georgia"/>
+              </a:rPr>
+              <a:t>How the three layers fit</a:t>
+            </a:r>
+            <a:endParaRPr sz="1100"/>
+          </a:p>
+        </p:txBody>
+      </p:sp>
+      <p:cxnSp>
+        <p:nvCxnSpPr>
+          <p:cNvPr id="653" name="Google Shape;653;p43"/>
+          <p:cNvCxnSpPr/>
+          <p:nvPr/>
+        </p:nvCxnSpPr>
+        <p:spPr>
+          <a:xfrm>
+            <a:off x="582946" y="1248156"/>
+            <a:ext cx="7978124" cy="0"/>
+          </a:xfrm>
+          <a:prstGeom prst="straightConnector1">
+            <a:avLst/>
+          </a:prstGeom>
+          <a:noFill/>
+          <a:ln cap="flat" cmpd="sng" w="9525">
+            <a:solidFill>
+              <a:srgbClr val="D8D4CC"/>
+            </a:solidFill>
+            <a:prstDash val="solid"/>
+            <a:round/>
+            <a:headEnd len="sm" w="sm" type="none"/>
+            <a:tailEnd len="sm" w="sm" type="none"/>
+          </a:ln>
+          <a:effectLst>
+            <a:outerShdw blurRad="40000" rotWithShape="0" dir="5400000" dist="20000">
+              <a:srgbClr val="000000">
+                <a:alpha val="38039"/>
+              </a:srgbClr>
+            </a:outerShdw>
+          </a:effectLst>
+        </p:spPr>
+      </p:cxnSp>
+      <p:sp>
+        <p:nvSpPr>
+          <p:cNvPr id="654" name="Google Shape;654;p43"/>
+          <p:cNvSpPr/>
+          <p:nvPr/>
+        </p:nvSpPr>
+        <p:spPr>
+          <a:xfrm>
+            <a:off x="582946" y="1440180"/>
+            <a:ext cx="7978124" cy="822960"/>
+          </a:xfrm>
+          <a:prstGeom prst="rect">
+            <a:avLst/>
+          </a:prstGeom>
+          <a:solidFill>
+            <a:srgbClr val="F0ECE4"/>
+          </a:solidFill>
+          <a:ln>
+            <a:noFill/>
+          </a:ln>
+        </p:spPr>
+        <p:txBody>
+          <a:bodyPr anchorCtr="0" anchor="ctr" bIns="34275" lIns="68575" spcFirstLastPara="1" rIns="68575" wrap="square" tIns="34275">
+            <a:noAutofit/>
+          </a:bodyPr>
+          <a:lstStyle/>
+          <a:p>
+            <a:pPr indent="0" lvl="0" marL="0" marR="0" rtl="0" algn="ctr">
+              <a:spcBef>
+                <a:spcPts val="0"/>
+              </a:spcBef>
+              <a:spcAft>
+                <a:spcPts val="0"/>
+              </a:spcAft>
+              <a:buNone/>
+            </a:pPr>
+            <a:r>
+              <a:t/>
+            </a:r>
+            <a:endParaRPr sz="1400">
+              <a:solidFill>
+                <a:schemeClr val="dk1"/>
+              </a:solidFill>
+              <a:latin typeface="Calibri"/>
+              <a:ea typeface="Calibri"/>
+              <a:cs typeface="Calibri"/>
+              <a:sym typeface="Calibri"/>
+            </a:endParaRPr>
+          </a:p>
+        </p:txBody>
+      </p:sp>
+      <p:sp>
+        <p:nvSpPr>
+          <p:cNvPr id="655" name="Google Shape;655;p43"/>
+          <p:cNvSpPr/>
+          <p:nvPr/>
+        </p:nvSpPr>
+        <p:spPr>
+          <a:xfrm>
+            <a:off x="582946" y="1440180"/>
+            <a:ext cx="37720" cy="822960"/>
+          </a:xfrm>
+          <a:prstGeom prst="rect">
+            <a:avLst/>
+          </a:prstGeom>
+          <a:solidFill>
+            <a:srgbClr val="7C3AED"/>
+          </a:solidFill>
+          <a:ln>
+            <a:noFill/>
+          </a:ln>
+        </p:spPr>
+        <p:txBody>
+          <a:bodyPr anchorCtr="0" anchor="ctr" bIns="34275" lIns="68575" spcFirstLastPara="1" rIns="68575" wrap="square" tIns="34275">
+            <a:noAutofit/>
+          </a:bodyPr>
+          <a:lstStyle/>
+          <a:p>
+            <a:pPr indent="0" lvl="0" marL="0" marR="0" rtl="0" algn="ctr">
+              <a:spcBef>
+                <a:spcPts val="0"/>
+              </a:spcBef>
+              <a:spcAft>
+                <a:spcPts val="0"/>
+              </a:spcAft>
+              <a:buNone/>
+            </a:pPr>
+            <a:r>
+              <a:t/>
+            </a:r>
+            <a:endParaRPr sz="1400">
+              <a:solidFill>
+                <a:schemeClr val="dk1"/>
+              </a:solidFill>
+              <a:latin typeface="Calibri"/>
+              <a:ea typeface="Calibri"/>
+              <a:cs typeface="Calibri"/>
+              <a:sym typeface="Calibri"/>
+            </a:endParaRPr>
+          </a:p>
+        </p:txBody>
+      </p:sp>
+      <p:sp>
+        <p:nvSpPr>
+          <p:cNvPr id="656" name="Google Shape;656;p43"/>
+          <p:cNvSpPr txBox="1"/>
+          <p:nvPr/>
+        </p:nvSpPr>
+        <p:spPr>
+          <a:xfrm>
+            <a:off x="788691" y="1556766"/>
+            <a:ext cx="1783128" cy="171450"/>
+          </a:xfrm>
+          <a:prstGeom prst="rect">
+            <a:avLst/>
+          </a:prstGeom>
+          <a:noFill/>
+          <a:ln>
+            <a:noFill/>
+          </a:ln>
+        </p:spPr>
+        <p:txBody>
+          <a:bodyPr anchorCtr="0" anchor="t" bIns="0" lIns="0" spcFirstLastPara="1" rIns="0" wrap="square" tIns="0">
+            <a:spAutoFit/>
+          </a:bodyPr>
+          <a:lstStyle/>
+          <a:p>
+            <a:pPr indent="0" lvl="0" marL="0" marR="0" rtl="0" algn="l">
+              <a:lnSpc>
+                <a:spcPct val="125000"/>
+              </a:lnSpc>
+              <a:spcBef>
+                <a:spcPts val="0"/>
+              </a:spcBef>
+              <a:spcAft>
+                <a:spcPts val="0"/>
+              </a:spcAft>
+              <a:buNone/>
+            </a:pPr>
+            <a:r>
+              <a:rPr b="0" i="0" lang="en" sz="700">
+                <a:solidFill>
+                  <a:srgbClr val="7C3AED"/>
+                </a:solidFill>
+                <a:latin typeface="Consolas"/>
+                <a:ea typeface="Consolas"/>
+                <a:cs typeface="Consolas"/>
+                <a:sym typeface="Consolas"/>
+              </a:rPr>
+              <a:t>PRESENTATION LAYER</a:t>
+            </a:r>
+            <a:endParaRPr sz="1100"/>
+          </a:p>
+        </p:txBody>
+      </p:sp>
+      <p:sp>
+        <p:nvSpPr>
+          <p:cNvPr id="657" name="Google Shape;657;p43"/>
+          <p:cNvSpPr txBox="1"/>
+          <p:nvPr/>
+        </p:nvSpPr>
+        <p:spPr>
+          <a:xfrm>
+            <a:off x="788691" y="1762506"/>
+            <a:ext cx="1851709" cy="274320"/>
+          </a:xfrm>
+          <a:prstGeom prst="rect">
+            <a:avLst/>
+          </a:prstGeom>
+          <a:noFill/>
+          <a:ln>
+            <a:noFill/>
+          </a:ln>
+        </p:spPr>
+        <p:txBody>
+          <a:bodyPr anchorCtr="0" anchor="t" bIns="0" lIns="0" spcFirstLastPara="1" rIns="0" wrap="square" tIns="0">
+            <a:spAutoFit/>
+          </a:bodyPr>
+          <a:lstStyle/>
+          <a:p>
+            <a:pPr indent="0" lvl="0" marL="0" marR="0" rtl="0" algn="l">
+              <a:lnSpc>
+                <a:spcPct val="125000"/>
+              </a:lnSpc>
+              <a:spcBef>
+                <a:spcPts val="0"/>
+              </a:spcBef>
+              <a:spcAft>
+                <a:spcPts val="0"/>
+              </a:spcAft>
+              <a:buNone/>
+            </a:pPr>
+            <a:r>
+              <a:rPr b="0" i="0" lang="en" sz="1300">
+                <a:solidFill>
+                  <a:srgbClr val="1A1A1A"/>
+                </a:solidFill>
+                <a:latin typeface="Georgia"/>
+                <a:ea typeface="Georgia"/>
+                <a:cs typeface="Georgia"/>
+                <a:sym typeface="Georgia"/>
+              </a:rPr>
+              <a:t>Frontend</a:t>
+            </a:r>
+            <a:endParaRPr sz="1100"/>
+          </a:p>
+        </p:txBody>
+      </p:sp>
+      <p:sp>
+        <p:nvSpPr>
+          <p:cNvPr id="658" name="Google Shape;658;p43"/>
+          <p:cNvSpPr/>
+          <p:nvPr/>
+        </p:nvSpPr>
+        <p:spPr>
+          <a:xfrm>
+            <a:off x="2914728" y="1543050"/>
+            <a:ext cx="1715231" cy="617220"/>
+          </a:xfrm>
+          <a:prstGeom prst="rect">
+            <a:avLst/>
+          </a:prstGeom>
+          <a:solidFill>
+            <a:srgbClr val="FAF8F4"/>
+          </a:solidFill>
+          <a:ln cap="flat" cmpd="sng" w="9525">
+            <a:solidFill>
+              <a:srgbClr val="D8D4CC"/>
+            </a:solidFill>
+            <a:prstDash val="solid"/>
+            <a:round/>
+            <a:headEnd len="sm" w="sm" type="none"/>
+            <a:tailEnd len="sm" w="sm" type="none"/>
+          </a:ln>
+        </p:spPr>
+        <p:txBody>
+          <a:bodyPr anchorCtr="0" anchor="ctr" bIns="34275" lIns="68575" spcFirstLastPara="1" rIns="68575" wrap="square" tIns="34275">
+            <a:noAutofit/>
+          </a:bodyPr>
+          <a:lstStyle/>
+          <a:p>
+            <a:pPr indent="0" lvl="0" marL="0" marR="0" rtl="0" algn="ctr">
+              <a:spcBef>
+                <a:spcPts val="0"/>
+              </a:spcBef>
+              <a:spcAft>
+                <a:spcPts val="0"/>
+              </a:spcAft>
+              <a:buNone/>
+            </a:pPr>
+            <a:r>
+              <a:t/>
+            </a:r>
+            <a:endParaRPr sz="1400">
+              <a:solidFill>
+                <a:schemeClr val="dk1"/>
+              </a:solidFill>
+              <a:latin typeface="Calibri"/>
+              <a:ea typeface="Calibri"/>
+              <a:cs typeface="Calibri"/>
+              <a:sym typeface="Calibri"/>
+            </a:endParaRPr>
+          </a:p>
+        </p:txBody>
+      </p:sp>
+      <p:sp>
+        <p:nvSpPr>
+          <p:cNvPr id="659" name="Google Shape;659;p43"/>
+          <p:cNvSpPr txBox="1"/>
+          <p:nvPr/>
+        </p:nvSpPr>
+        <p:spPr>
+          <a:xfrm>
+            <a:off x="3038175" y="1639062"/>
+            <a:ext cx="1468337" cy="171450"/>
+          </a:xfrm>
+          <a:prstGeom prst="rect">
+            <a:avLst/>
+          </a:prstGeom>
+          <a:noFill/>
+          <a:ln>
+            <a:noFill/>
+          </a:ln>
+        </p:spPr>
+        <p:txBody>
+          <a:bodyPr anchorCtr="0" anchor="t" bIns="0" lIns="0" spcFirstLastPara="1" rIns="0" wrap="square" tIns="0">
+            <a:spAutoFit/>
+          </a:bodyPr>
+          <a:lstStyle/>
+          <a:p>
+            <a:pPr indent="0" lvl="0" marL="0" marR="0" rtl="0" algn="l">
+              <a:lnSpc>
+                <a:spcPct val="125000"/>
+              </a:lnSpc>
+              <a:spcBef>
+                <a:spcPts val="0"/>
+              </a:spcBef>
+              <a:spcAft>
+                <a:spcPts val="0"/>
+              </a:spcAft>
+              <a:buNone/>
+            </a:pPr>
+            <a:r>
+              <a:rPr b="1" i="0" lang="en" sz="900">
+                <a:solidFill>
+                  <a:srgbClr val="1A1A1A"/>
+                </a:solidFill>
+                <a:latin typeface="Calibri"/>
+                <a:ea typeface="Calibri"/>
+                <a:cs typeface="Calibri"/>
+                <a:sym typeface="Calibri"/>
+              </a:rPr>
+              <a:t>React 19 + TypeScript</a:t>
+            </a:r>
+            <a:endParaRPr sz="1100"/>
+          </a:p>
+        </p:txBody>
+      </p:sp>
+      <p:sp>
+        <p:nvSpPr>
+          <p:cNvPr id="660" name="Google Shape;660;p43"/>
+          <p:cNvSpPr txBox="1"/>
+          <p:nvPr/>
+        </p:nvSpPr>
+        <p:spPr>
+          <a:xfrm>
+            <a:off x="3038175" y="1824228"/>
+            <a:ext cx="1468337" cy="308610"/>
+          </a:xfrm>
+          <a:prstGeom prst="rect">
+            <a:avLst/>
+          </a:prstGeom>
+          <a:noFill/>
+          <a:ln>
+            <a:noFill/>
+          </a:ln>
+        </p:spPr>
+        <p:txBody>
+          <a:bodyPr anchorCtr="0" anchor="t" bIns="0" lIns="0" spcFirstLastPara="1" rIns="0" wrap="square" tIns="0">
+            <a:spAutoFit/>
+          </a:bodyPr>
+          <a:lstStyle/>
+          <a:p>
+            <a:pPr indent="0" lvl="0" marL="0" marR="0" rtl="0" algn="l">
+              <a:lnSpc>
+                <a:spcPct val="120000"/>
+              </a:lnSpc>
+              <a:spcBef>
+                <a:spcPts val="0"/>
+              </a:spcBef>
+              <a:spcAft>
+                <a:spcPts val="0"/>
+              </a:spcAft>
+              <a:buNone/>
+            </a:pPr>
+            <a:r>
+              <a:rPr b="0" i="0" lang="en" sz="800">
+                <a:solidFill>
+                  <a:srgbClr val="6B6B6B"/>
+                </a:solidFill>
+                <a:latin typeface="Calibri"/>
+                <a:ea typeface="Calibri"/>
+                <a:cs typeface="Calibri"/>
+                <a:sym typeface="Calibri"/>
+              </a:rPr>
+              <a:t>Vite build, shadcn/ui components</a:t>
+            </a:r>
+            <a:endParaRPr sz="1100"/>
+          </a:p>
+        </p:txBody>
+      </p:sp>
+      <p:sp>
+        <p:nvSpPr>
+          <p:cNvPr id="661" name="Google Shape;661;p43"/>
+          <p:cNvSpPr/>
+          <p:nvPr/>
+        </p:nvSpPr>
+        <p:spPr>
+          <a:xfrm>
+            <a:off x="4739690" y="1543050"/>
+            <a:ext cx="1715231" cy="617220"/>
+          </a:xfrm>
+          <a:prstGeom prst="rect">
+            <a:avLst/>
+          </a:prstGeom>
+          <a:solidFill>
+            <a:srgbClr val="FAF8F4"/>
+          </a:solidFill>
+          <a:ln cap="flat" cmpd="sng" w="9525">
+            <a:solidFill>
+              <a:srgbClr val="D8D4CC"/>
+            </a:solidFill>
+            <a:prstDash val="solid"/>
+            <a:round/>
+            <a:headEnd len="sm" w="sm" type="none"/>
+            <a:tailEnd len="sm" w="sm" type="none"/>
+          </a:ln>
+        </p:spPr>
+        <p:txBody>
+          <a:bodyPr anchorCtr="0" anchor="ctr" bIns="34275" lIns="68575" spcFirstLastPara="1" rIns="68575" wrap="square" tIns="34275">
+            <a:noAutofit/>
+          </a:bodyPr>
+          <a:lstStyle/>
+          <a:p>
+            <a:pPr indent="0" lvl="0" marL="0" marR="0" rtl="0" algn="ctr">
+              <a:spcBef>
+                <a:spcPts val="0"/>
+              </a:spcBef>
+              <a:spcAft>
+                <a:spcPts val="0"/>
+              </a:spcAft>
+              <a:buNone/>
+            </a:pPr>
+            <a:r>
+              <a:t/>
+            </a:r>
+            <a:endParaRPr sz="1400">
+              <a:solidFill>
+                <a:schemeClr val="dk1"/>
+              </a:solidFill>
+              <a:latin typeface="Calibri"/>
+              <a:ea typeface="Calibri"/>
+              <a:cs typeface="Calibri"/>
+              <a:sym typeface="Calibri"/>
+            </a:endParaRPr>
+          </a:p>
+        </p:txBody>
+      </p:sp>
+      <p:sp>
+        <p:nvSpPr>
+          <p:cNvPr id="662" name="Google Shape;662;p43"/>
+          <p:cNvSpPr txBox="1"/>
+          <p:nvPr/>
+        </p:nvSpPr>
+        <p:spPr>
+          <a:xfrm>
+            <a:off x="4863137" y="1639062"/>
+            <a:ext cx="1468337" cy="171450"/>
+          </a:xfrm>
+          <a:prstGeom prst="rect">
+            <a:avLst/>
+          </a:prstGeom>
+          <a:noFill/>
+          <a:ln>
+            <a:noFill/>
+          </a:ln>
+        </p:spPr>
+        <p:txBody>
+          <a:bodyPr anchorCtr="0" anchor="t" bIns="0" lIns="0" spcFirstLastPara="1" rIns="0" wrap="square" tIns="0">
+            <a:spAutoFit/>
+          </a:bodyPr>
+          <a:lstStyle/>
+          <a:p>
+            <a:pPr indent="0" lvl="0" marL="0" marR="0" rtl="0" algn="l">
+              <a:lnSpc>
+                <a:spcPct val="125000"/>
+              </a:lnSpc>
+              <a:spcBef>
+                <a:spcPts val="0"/>
+              </a:spcBef>
+              <a:spcAft>
+                <a:spcPts val="0"/>
+              </a:spcAft>
+              <a:buNone/>
+            </a:pPr>
+            <a:r>
+              <a:rPr b="1" i="0" lang="en" sz="900">
+                <a:solidFill>
+                  <a:srgbClr val="1A1A1A"/>
+                </a:solidFill>
+                <a:latin typeface="Calibri"/>
+                <a:ea typeface="Calibri"/>
+                <a:cs typeface="Calibri"/>
+                <a:sym typeface="Calibri"/>
+              </a:rPr>
+              <a:t>Recharts</a:t>
+            </a:r>
+            <a:endParaRPr sz="1100"/>
+          </a:p>
+        </p:txBody>
+      </p:sp>
+      <p:sp>
+        <p:nvSpPr>
+          <p:cNvPr id="663" name="Google Shape;663;p43"/>
+          <p:cNvSpPr txBox="1"/>
+          <p:nvPr/>
+        </p:nvSpPr>
+        <p:spPr>
+          <a:xfrm>
+            <a:off x="4863137" y="1824228"/>
+            <a:ext cx="1468337" cy="308610"/>
+          </a:xfrm>
+          <a:prstGeom prst="rect">
+            <a:avLst/>
+          </a:prstGeom>
+          <a:noFill/>
+          <a:ln>
+            <a:noFill/>
+          </a:ln>
+        </p:spPr>
+        <p:txBody>
+          <a:bodyPr anchorCtr="0" anchor="t" bIns="0" lIns="0" spcFirstLastPara="1" rIns="0" wrap="square" tIns="0">
+            <a:spAutoFit/>
+          </a:bodyPr>
+          <a:lstStyle/>
+          <a:p>
+            <a:pPr indent="0" lvl="0" marL="0" marR="0" rtl="0" algn="l">
+              <a:lnSpc>
+                <a:spcPct val="120000"/>
+              </a:lnSpc>
+              <a:spcBef>
+                <a:spcPts val="0"/>
+              </a:spcBef>
+              <a:spcAft>
+                <a:spcPts val="0"/>
+              </a:spcAft>
+              <a:buNone/>
+            </a:pPr>
+            <a:r>
+              <a:rPr b="0" i="0" lang="en" sz="800">
+                <a:solidFill>
+                  <a:srgbClr val="6B6B6B"/>
+                </a:solidFill>
+                <a:latin typeface="Calibri"/>
+                <a:ea typeface="Calibri"/>
+                <a:cs typeface="Calibri"/>
+                <a:sym typeface="Calibri"/>
+              </a:rPr>
+              <a:t>PCA scatter, elbow, histograms</a:t>
+            </a:r>
+            <a:endParaRPr sz="1100"/>
+          </a:p>
+        </p:txBody>
+      </p:sp>
+      <p:sp>
+        <p:nvSpPr>
+          <p:cNvPr id="664" name="Google Shape;664;p43"/>
+          <p:cNvSpPr/>
+          <p:nvPr/>
+        </p:nvSpPr>
+        <p:spPr>
+          <a:xfrm>
+            <a:off x="6564652" y="1543050"/>
+            <a:ext cx="1715231" cy="617220"/>
+          </a:xfrm>
+          <a:prstGeom prst="rect">
+            <a:avLst/>
+          </a:prstGeom>
+          <a:solidFill>
+            <a:srgbClr val="FAF8F4"/>
+          </a:solidFill>
+          <a:ln cap="flat" cmpd="sng" w="9525">
+            <a:solidFill>
+              <a:srgbClr val="D8D4CC"/>
+            </a:solidFill>
+            <a:prstDash val="solid"/>
+            <a:round/>
+            <a:headEnd len="sm" w="sm" type="none"/>
+            <a:tailEnd len="sm" w="sm" type="none"/>
+          </a:ln>
+        </p:spPr>
+        <p:txBody>
+          <a:bodyPr anchorCtr="0" anchor="ctr" bIns="34275" lIns="68575" spcFirstLastPara="1" rIns="68575" wrap="square" tIns="34275">
+            <a:noAutofit/>
+          </a:bodyPr>
+          <a:lstStyle/>
+          <a:p>
+            <a:pPr indent="0" lvl="0" marL="0" marR="0" rtl="0" algn="ctr">
+              <a:spcBef>
+                <a:spcPts val="0"/>
+              </a:spcBef>
+              <a:spcAft>
+                <a:spcPts val="0"/>
+              </a:spcAft>
+              <a:buNone/>
+            </a:pPr>
+            <a:r>
+              <a:t/>
+            </a:r>
+            <a:endParaRPr sz="1400">
+              <a:solidFill>
+                <a:schemeClr val="dk1"/>
+              </a:solidFill>
+              <a:latin typeface="Calibri"/>
+              <a:ea typeface="Calibri"/>
+              <a:cs typeface="Calibri"/>
+              <a:sym typeface="Calibri"/>
+            </a:endParaRPr>
+          </a:p>
+        </p:txBody>
+      </p:sp>
+      <p:sp>
+        <p:nvSpPr>
+          <p:cNvPr id="665" name="Google Shape;665;p43"/>
+          <p:cNvSpPr txBox="1"/>
+          <p:nvPr/>
+        </p:nvSpPr>
+        <p:spPr>
+          <a:xfrm>
+            <a:off x="6688099" y="1639062"/>
+            <a:ext cx="1468337" cy="171450"/>
+          </a:xfrm>
+          <a:prstGeom prst="rect">
+            <a:avLst/>
+          </a:prstGeom>
+          <a:noFill/>
+          <a:ln>
+            <a:noFill/>
+          </a:ln>
+        </p:spPr>
+        <p:txBody>
+          <a:bodyPr anchorCtr="0" anchor="t" bIns="0" lIns="0" spcFirstLastPara="1" rIns="0" wrap="square" tIns="0">
+            <a:spAutoFit/>
+          </a:bodyPr>
+          <a:lstStyle/>
+          <a:p>
+            <a:pPr indent="0" lvl="0" marL="0" marR="0" rtl="0" algn="l">
+              <a:lnSpc>
+                <a:spcPct val="125000"/>
+              </a:lnSpc>
+              <a:spcBef>
+                <a:spcPts val="0"/>
+              </a:spcBef>
+              <a:spcAft>
+                <a:spcPts val="0"/>
+              </a:spcAft>
+              <a:buNone/>
+            </a:pPr>
+            <a:r>
+              <a:rPr b="1" i="0" lang="en" sz="900">
+                <a:solidFill>
+                  <a:srgbClr val="1A1A1A"/>
+                </a:solidFill>
+                <a:latin typeface="Calibri"/>
+                <a:ea typeface="Calibri"/>
+                <a:cs typeface="Calibri"/>
+                <a:sym typeface="Calibri"/>
+              </a:rPr>
+              <a:t>TanStack Query</a:t>
+            </a:r>
+            <a:endParaRPr sz="1100"/>
+          </a:p>
+        </p:txBody>
+      </p:sp>
+      <p:sp>
+        <p:nvSpPr>
+          <p:cNvPr id="666" name="Google Shape;666;p43"/>
+          <p:cNvSpPr txBox="1"/>
+          <p:nvPr/>
+        </p:nvSpPr>
+        <p:spPr>
+          <a:xfrm>
+            <a:off x="6688099" y="1824228"/>
+            <a:ext cx="1468337" cy="308610"/>
+          </a:xfrm>
+          <a:prstGeom prst="rect">
+            <a:avLst/>
+          </a:prstGeom>
+          <a:noFill/>
+          <a:ln>
+            <a:noFill/>
+          </a:ln>
+        </p:spPr>
+        <p:txBody>
+          <a:bodyPr anchorCtr="0" anchor="t" bIns="0" lIns="0" spcFirstLastPara="1" rIns="0" wrap="square" tIns="0">
+            <a:spAutoFit/>
+          </a:bodyPr>
+          <a:lstStyle/>
+          <a:p>
+            <a:pPr indent="0" lvl="0" marL="0" marR="0" rtl="0" algn="l">
+              <a:lnSpc>
+                <a:spcPct val="120000"/>
+              </a:lnSpc>
+              <a:spcBef>
+                <a:spcPts val="0"/>
+              </a:spcBef>
+              <a:spcAft>
+                <a:spcPts val="0"/>
+              </a:spcAft>
+              <a:buNone/>
+            </a:pPr>
+            <a:r>
+              <a:rPr b="0" i="0" lang="en" sz="800">
+                <a:solidFill>
+                  <a:srgbClr val="6B6B6B"/>
+                </a:solidFill>
+                <a:latin typeface="Calibri"/>
+                <a:ea typeface="Calibri"/>
+                <a:cs typeface="Calibri"/>
+                <a:sym typeface="Calibri"/>
+              </a:rPr>
+              <a:t>Data fetching and caching</a:t>
+            </a:r>
+            <a:endParaRPr sz="1100"/>
+          </a:p>
+        </p:txBody>
+      </p:sp>
+      <p:sp>
+        <p:nvSpPr>
+          <p:cNvPr id="667" name="Google Shape;667;p43"/>
+          <p:cNvSpPr/>
+          <p:nvPr/>
+        </p:nvSpPr>
+        <p:spPr>
+          <a:xfrm>
+            <a:off x="582946" y="2468880"/>
+            <a:ext cx="7978124" cy="822960"/>
+          </a:xfrm>
+          <a:prstGeom prst="rect">
+            <a:avLst/>
+          </a:prstGeom>
+          <a:solidFill>
+            <a:srgbClr val="F0ECE4"/>
+          </a:solidFill>
+          <a:ln>
+            <a:noFill/>
+          </a:ln>
+        </p:spPr>
+        <p:txBody>
+          <a:bodyPr anchorCtr="0" anchor="ctr" bIns="34275" lIns="68575" spcFirstLastPara="1" rIns="68575" wrap="square" tIns="34275">
+            <a:noAutofit/>
+          </a:bodyPr>
+          <a:lstStyle/>
+          <a:p>
+            <a:pPr indent="0" lvl="0" marL="0" marR="0" rtl="0" algn="ctr">
+              <a:spcBef>
+                <a:spcPts val="0"/>
+              </a:spcBef>
+              <a:spcAft>
+                <a:spcPts val="0"/>
+              </a:spcAft>
+              <a:buNone/>
+            </a:pPr>
+            <a:r>
+              <a:t/>
+            </a:r>
+            <a:endParaRPr sz="1400">
+              <a:solidFill>
+                <a:schemeClr val="dk1"/>
+              </a:solidFill>
+              <a:latin typeface="Calibri"/>
+              <a:ea typeface="Calibri"/>
+              <a:cs typeface="Calibri"/>
+              <a:sym typeface="Calibri"/>
+            </a:endParaRPr>
+          </a:p>
+        </p:txBody>
+      </p:sp>
+      <p:sp>
+        <p:nvSpPr>
+          <p:cNvPr id="668" name="Google Shape;668;p43"/>
+          <p:cNvSpPr/>
+          <p:nvPr/>
+        </p:nvSpPr>
+        <p:spPr>
+          <a:xfrm>
+            <a:off x="582946" y="2468880"/>
+            <a:ext cx="37720" cy="822960"/>
+          </a:xfrm>
+          <a:prstGeom prst="rect">
+            <a:avLst/>
+          </a:prstGeom>
+          <a:solidFill>
+            <a:srgbClr val="0F766E"/>
+          </a:solidFill>
+          <a:ln>
+            <a:noFill/>
+          </a:ln>
+        </p:spPr>
+        <p:txBody>
+          <a:bodyPr anchorCtr="0" anchor="ctr" bIns="34275" lIns="68575" spcFirstLastPara="1" rIns="68575" wrap="square" tIns="34275">
+            <a:noAutofit/>
+          </a:bodyPr>
+          <a:lstStyle/>
+          <a:p>
+            <a:pPr indent="0" lvl="0" marL="0" marR="0" rtl="0" algn="ctr">
+              <a:spcBef>
+                <a:spcPts val="0"/>
+              </a:spcBef>
+              <a:spcAft>
+                <a:spcPts val="0"/>
+              </a:spcAft>
+              <a:buNone/>
+            </a:pPr>
+            <a:r>
+              <a:t/>
+            </a:r>
+            <a:endParaRPr sz="1400">
+              <a:solidFill>
+                <a:schemeClr val="dk1"/>
+              </a:solidFill>
+              <a:latin typeface="Calibri"/>
+              <a:ea typeface="Calibri"/>
+              <a:cs typeface="Calibri"/>
+              <a:sym typeface="Calibri"/>
+            </a:endParaRPr>
+          </a:p>
+        </p:txBody>
+      </p:sp>
+      <p:sp>
+        <p:nvSpPr>
+          <p:cNvPr id="669" name="Google Shape;669;p43"/>
+          <p:cNvSpPr txBox="1"/>
+          <p:nvPr/>
+        </p:nvSpPr>
+        <p:spPr>
+          <a:xfrm>
+            <a:off x="788691" y="2585466"/>
+            <a:ext cx="1783128" cy="171450"/>
+          </a:xfrm>
+          <a:prstGeom prst="rect">
+            <a:avLst/>
+          </a:prstGeom>
+          <a:noFill/>
+          <a:ln>
+            <a:noFill/>
+          </a:ln>
+        </p:spPr>
+        <p:txBody>
+          <a:bodyPr anchorCtr="0" anchor="t" bIns="0" lIns="0" spcFirstLastPara="1" rIns="0" wrap="square" tIns="0">
+            <a:spAutoFit/>
+          </a:bodyPr>
+          <a:lstStyle/>
+          <a:p>
+            <a:pPr indent="0" lvl="0" marL="0" marR="0" rtl="0" algn="l">
+              <a:lnSpc>
+                <a:spcPct val="125000"/>
+              </a:lnSpc>
+              <a:spcBef>
+                <a:spcPts val="0"/>
+              </a:spcBef>
+              <a:spcAft>
+                <a:spcPts val="0"/>
+              </a:spcAft>
+              <a:buNone/>
+            </a:pPr>
+            <a:r>
+              <a:rPr b="0" i="0" lang="en" sz="700">
+                <a:solidFill>
+                  <a:srgbClr val="0F766E"/>
+                </a:solidFill>
+                <a:latin typeface="Consolas"/>
+                <a:ea typeface="Consolas"/>
+                <a:cs typeface="Consolas"/>
+                <a:sym typeface="Consolas"/>
+              </a:rPr>
+              <a:t>APPLICATION LAYER</a:t>
+            </a:r>
+            <a:endParaRPr sz="1100"/>
+          </a:p>
+        </p:txBody>
+      </p:sp>
+      <p:sp>
+        <p:nvSpPr>
+          <p:cNvPr id="670" name="Google Shape;670;p43"/>
+          <p:cNvSpPr txBox="1"/>
+          <p:nvPr/>
+        </p:nvSpPr>
+        <p:spPr>
+          <a:xfrm>
+            <a:off x="788691" y="2791206"/>
+            <a:ext cx="1851709" cy="274320"/>
+          </a:xfrm>
+          <a:prstGeom prst="rect">
+            <a:avLst/>
+          </a:prstGeom>
+          <a:noFill/>
+          <a:ln>
+            <a:noFill/>
+          </a:ln>
+        </p:spPr>
+        <p:txBody>
+          <a:bodyPr anchorCtr="0" anchor="t" bIns="0" lIns="0" spcFirstLastPara="1" rIns="0" wrap="square" tIns="0">
+            <a:spAutoFit/>
+          </a:bodyPr>
+          <a:lstStyle/>
+          <a:p>
+            <a:pPr indent="0" lvl="0" marL="0" marR="0" rtl="0" algn="l">
+              <a:lnSpc>
+                <a:spcPct val="125000"/>
+              </a:lnSpc>
+              <a:spcBef>
+                <a:spcPts val="0"/>
+              </a:spcBef>
+              <a:spcAft>
+                <a:spcPts val="0"/>
+              </a:spcAft>
+              <a:buNone/>
+            </a:pPr>
+            <a:r>
+              <a:rPr b="0" i="0" lang="en" sz="1300">
+                <a:solidFill>
+                  <a:srgbClr val="1A1A1A"/>
+                </a:solidFill>
+                <a:latin typeface="Georgia"/>
+                <a:ea typeface="Georgia"/>
+                <a:cs typeface="Georgia"/>
+                <a:sym typeface="Georgia"/>
+              </a:rPr>
+              <a:t>Backend API</a:t>
+            </a:r>
+            <a:endParaRPr sz="1100"/>
+          </a:p>
+        </p:txBody>
+      </p:sp>
+      <p:sp>
+        <p:nvSpPr>
+          <p:cNvPr id="671" name="Google Shape;671;p43"/>
+          <p:cNvSpPr/>
+          <p:nvPr/>
+        </p:nvSpPr>
+        <p:spPr>
+          <a:xfrm>
+            <a:off x="2914728" y="2571750"/>
+            <a:ext cx="1715231" cy="617220"/>
+          </a:xfrm>
+          <a:prstGeom prst="rect">
+            <a:avLst/>
+          </a:prstGeom>
+          <a:solidFill>
+            <a:srgbClr val="FAF8F4"/>
+          </a:solidFill>
+          <a:ln cap="flat" cmpd="sng" w="9525">
+            <a:solidFill>
+              <a:srgbClr val="D8D4CC"/>
+            </a:solidFill>
+            <a:prstDash val="solid"/>
+            <a:round/>
+            <a:headEnd len="sm" w="sm" type="none"/>
+            <a:tailEnd len="sm" w="sm" type="none"/>
+          </a:ln>
+        </p:spPr>
+        <p:txBody>
+          <a:bodyPr anchorCtr="0" anchor="ctr" bIns="34275" lIns="68575" spcFirstLastPara="1" rIns="68575" wrap="square" tIns="34275">
+            <a:noAutofit/>
+          </a:bodyPr>
+          <a:lstStyle/>
+          <a:p>
+            <a:pPr indent="0" lvl="0" marL="0" marR="0" rtl="0" algn="ctr">
+              <a:spcBef>
+                <a:spcPts val="0"/>
+              </a:spcBef>
+              <a:spcAft>
+                <a:spcPts val="0"/>
+              </a:spcAft>
+              <a:buNone/>
+            </a:pPr>
+            <a:r>
+              <a:t/>
+            </a:r>
+            <a:endParaRPr sz="1400">
+              <a:solidFill>
+                <a:schemeClr val="dk1"/>
+              </a:solidFill>
+              <a:latin typeface="Calibri"/>
+              <a:ea typeface="Calibri"/>
+              <a:cs typeface="Calibri"/>
+              <a:sym typeface="Calibri"/>
+            </a:endParaRPr>
+          </a:p>
+        </p:txBody>
+      </p:sp>
+      <p:sp>
+        <p:nvSpPr>
+          <p:cNvPr id="672" name="Google Shape;672;p43"/>
+          <p:cNvSpPr txBox="1"/>
+          <p:nvPr/>
+        </p:nvSpPr>
+        <p:spPr>
+          <a:xfrm>
+            <a:off x="3038175" y="2667762"/>
+            <a:ext cx="1468337" cy="171450"/>
+          </a:xfrm>
+          <a:prstGeom prst="rect">
+            <a:avLst/>
+          </a:prstGeom>
+          <a:noFill/>
+          <a:ln>
+            <a:noFill/>
+          </a:ln>
+        </p:spPr>
+        <p:txBody>
+          <a:bodyPr anchorCtr="0" anchor="t" bIns="0" lIns="0" spcFirstLastPara="1" rIns="0" wrap="square" tIns="0">
+            <a:spAutoFit/>
+          </a:bodyPr>
+          <a:lstStyle/>
+          <a:p>
+            <a:pPr indent="0" lvl="0" marL="0" marR="0" rtl="0" algn="l">
+              <a:lnSpc>
+                <a:spcPct val="125000"/>
+              </a:lnSpc>
+              <a:spcBef>
+                <a:spcPts val="0"/>
+              </a:spcBef>
+              <a:spcAft>
+                <a:spcPts val="0"/>
+              </a:spcAft>
+              <a:buNone/>
+            </a:pPr>
+            <a:r>
+              <a:rPr b="1" i="0" lang="en" sz="900">
+                <a:solidFill>
+                  <a:srgbClr val="1A1A1A"/>
+                </a:solidFill>
+                <a:latin typeface="Calibri"/>
+                <a:ea typeface="Calibri"/>
+                <a:cs typeface="Calibri"/>
+                <a:sym typeface="Calibri"/>
+              </a:rPr>
+              <a:t>FastAPI + Uvicorn</a:t>
+            </a:r>
+            <a:endParaRPr sz="1100"/>
+          </a:p>
+        </p:txBody>
+      </p:sp>
+      <p:sp>
+        <p:nvSpPr>
+          <p:cNvPr id="673" name="Google Shape;673;p43"/>
+          <p:cNvSpPr txBox="1"/>
+          <p:nvPr/>
+        </p:nvSpPr>
+        <p:spPr>
+          <a:xfrm>
+            <a:off x="3038175" y="2852928"/>
+            <a:ext cx="1468337" cy="308610"/>
+          </a:xfrm>
+          <a:prstGeom prst="rect">
+            <a:avLst/>
+          </a:prstGeom>
+          <a:noFill/>
+          <a:ln>
+            <a:noFill/>
+          </a:ln>
+        </p:spPr>
+        <p:txBody>
+          <a:bodyPr anchorCtr="0" anchor="t" bIns="0" lIns="0" spcFirstLastPara="1" rIns="0" wrap="square" tIns="0">
+            <a:spAutoFit/>
+          </a:bodyPr>
+          <a:lstStyle/>
+          <a:p>
+            <a:pPr indent="0" lvl="0" marL="0" marR="0" rtl="0" algn="l">
+              <a:lnSpc>
+                <a:spcPct val="120000"/>
+              </a:lnSpc>
+              <a:spcBef>
+                <a:spcPts val="0"/>
+              </a:spcBef>
+              <a:spcAft>
+                <a:spcPts val="0"/>
+              </a:spcAft>
+              <a:buNone/>
+            </a:pPr>
+            <a:r>
+              <a:rPr b="0" i="0" lang="en" sz="800">
+                <a:solidFill>
+                  <a:srgbClr val="6B6B6B"/>
+                </a:solidFill>
+                <a:latin typeface="Calibri"/>
+                <a:ea typeface="Calibri"/>
+                <a:cs typeface="Calibri"/>
+                <a:sym typeface="Calibri"/>
+              </a:rPr>
+              <a:t>Typed Pydantic response models</a:t>
+            </a:r>
+            <a:endParaRPr sz="1100"/>
+          </a:p>
+        </p:txBody>
+      </p:sp>
+      <p:sp>
+        <p:nvSpPr>
+          <p:cNvPr id="674" name="Google Shape;674;p43"/>
+          <p:cNvSpPr/>
+          <p:nvPr/>
+        </p:nvSpPr>
+        <p:spPr>
+          <a:xfrm>
+            <a:off x="4739690" y="2571750"/>
+            <a:ext cx="1715231" cy="617220"/>
+          </a:xfrm>
+          <a:prstGeom prst="rect">
+            <a:avLst/>
+          </a:prstGeom>
+          <a:solidFill>
+            <a:srgbClr val="FAF8F4"/>
+          </a:solidFill>
+          <a:ln cap="flat" cmpd="sng" w="9525">
+            <a:solidFill>
+              <a:srgbClr val="D8D4CC"/>
+            </a:solidFill>
+            <a:prstDash val="solid"/>
+            <a:round/>
+            <a:headEnd len="sm" w="sm" type="none"/>
+            <a:tailEnd len="sm" w="sm" type="none"/>
+          </a:ln>
+        </p:spPr>
+        <p:txBody>
+          <a:bodyPr anchorCtr="0" anchor="ctr" bIns="34275" lIns="68575" spcFirstLastPara="1" rIns="68575" wrap="square" tIns="34275">
+            <a:noAutofit/>
+          </a:bodyPr>
+          <a:lstStyle/>
+          <a:p>
+            <a:pPr indent="0" lvl="0" marL="0" marR="0" rtl="0" algn="ctr">
+              <a:spcBef>
+                <a:spcPts val="0"/>
+              </a:spcBef>
+              <a:spcAft>
+                <a:spcPts val="0"/>
+              </a:spcAft>
+              <a:buNone/>
+            </a:pPr>
+            <a:r>
+              <a:t/>
+            </a:r>
+            <a:endParaRPr sz="1400">
+              <a:solidFill>
+                <a:schemeClr val="dk1"/>
+              </a:solidFill>
+              <a:latin typeface="Calibri"/>
+              <a:ea typeface="Calibri"/>
+              <a:cs typeface="Calibri"/>
+              <a:sym typeface="Calibri"/>
+            </a:endParaRPr>
+          </a:p>
+        </p:txBody>
+      </p:sp>
+      <p:sp>
+        <p:nvSpPr>
+          <p:cNvPr id="675" name="Google Shape;675;p43"/>
+          <p:cNvSpPr txBox="1"/>
+          <p:nvPr/>
+        </p:nvSpPr>
+        <p:spPr>
+          <a:xfrm>
+            <a:off x="4863137" y="2667762"/>
+            <a:ext cx="1468337" cy="171450"/>
+          </a:xfrm>
+          <a:prstGeom prst="rect">
+            <a:avLst/>
+          </a:prstGeom>
+          <a:noFill/>
+          <a:ln>
+            <a:noFill/>
+          </a:ln>
+        </p:spPr>
+        <p:txBody>
+          <a:bodyPr anchorCtr="0" anchor="t" bIns="0" lIns="0" spcFirstLastPara="1" rIns="0" wrap="square" tIns="0">
+            <a:spAutoFit/>
+          </a:bodyPr>
+          <a:lstStyle/>
+          <a:p>
+            <a:pPr indent="0" lvl="0" marL="0" marR="0" rtl="0" algn="l">
+              <a:lnSpc>
+                <a:spcPct val="125000"/>
+              </a:lnSpc>
+              <a:spcBef>
+                <a:spcPts val="0"/>
+              </a:spcBef>
+              <a:spcAft>
+                <a:spcPts val="0"/>
+              </a:spcAft>
+              <a:buNone/>
+            </a:pPr>
+            <a:r>
+              <a:rPr b="1" i="0" lang="en" sz="900">
+                <a:solidFill>
+                  <a:srgbClr val="1A1A1A"/>
+                </a:solidFill>
+                <a:latin typeface="Calibri"/>
+                <a:ea typeface="Calibri"/>
+                <a:cs typeface="Calibri"/>
+                <a:sym typeface="Calibri"/>
+              </a:rPr>
+              <a:t>pipeline.py</a:t>
+            </a:r>
+            <a:endParaRPr sz="1100"/>
+          </a:p>
+        </p:txBody>
+      </p:sp>
+      <p:sp>
+        <p:nvSpPr>
+          <p:cNvPr id="676" name="Google Shape;676;p43"/>
+          <p:cNvSpPr txBox="1"/>
+          <p:nvPr/>
+        </p:nvSpPr>
+        <p:spPr>
+          <a:xfrm>
+            <a:off x="4863137" y="2852928"/>
+            <a:ext cx="1468337" cy="308610"/>
+          </a:xfrm>
+          <a:prstGeom prst="rect">
+            <a:avLst/>
+          </a:prstGeom>
+          <a:noFill/>
+          <a:ln>
+            <a:noFill/>
+          </a:ln>
+        </p:spPr>
+        <p:txBody>
+          <a:bodyPr anchorCtr="0" anchor="t" bIns="0" lIns="0" spcFirstLastPara="1" rIns="0" wrap="square" tIns="0">
+            <a:spAutoFit/>
+          </a:bodyPr>
+          <a:lstStyle/>
+          <a:p>
+            <a:pPr indent="0" lvl="0" marL="0" marR="0" rtl="0" algn="l">
+              <a:lnSpc>
+                <a:spcPct val="120000"/>
+              </a:lnSpc>
+              <a:spcBef>
+                <a:spcPts val="0"/>
+              </a:spcBef>
+              <a:spcAft>
+                <a:spcPts val="0"/>
+              </a:spcAft>
+              <a:buNone/>
+            </a:pPr>
+            <a:r>
+              <a:rPr b="0" i="0" lang="en" sz="800">
+                <a:solidFill>
+                  <a:srgbClr val="6B6B6B"/>
+                </a:solidFill>
+                <a:latin typeface="Calibri"/>
+                <a:ea typeface="Calibri"/>
+                <a:cs typeface="Calibri"/>
+                <a:sym typeface="Calibri"/>
+              </a:rPr>
+              <a:t>The same code the notebook runs</a:t>
+            </a:r>
+            <a:endParaRPr sz="1100"/>
+          </a:p>
+        </p:txBody>
+      </p:sp>
+      <p:sp>
+        <p:nvSpPr>
+          <p:cNvPr id="677" name="Google Shape;677;p43"/>
+          <p:cNvSpPr/>
+          <p:nvPr/>
+        </p:nvSpPr>
+        <p:spPr>
+          <a:xfrm>
+            <a:off x="6564652" y="2571750"/>
+            <a:ext cx="1715231" cy="617220"/>
+          </a:xfrm>
+          <a:prstGeom prst="rect">
+            <a:avLst/>
+          </a:prstGeom>
+          <a:solidFill>
+            <a:srgbClr val="FAF8F4"/>
+          </a:solidFill>
+          <a:ln cap="flat" cmpd="sng" w="9525">
+            <a:solidFill>
+              <a:srgbClr val="D8D4CC"/>
+            </a:solidFill>
+            <a:prstDash val="solid"/>
+            <a:round/>
+            <a:headEnd len="sm" w="sm" type="none"/>
+            <a:tailEnd len="sm" w="sm" type="none"/>
+          </a:ln>
+        </p:spPr>
+        <p:txBody>
+          <a:bodyPr anchorCtr="0" anchor="ctr" bIns="34275" lIns="68575" spcFirstLastPara="1" rIns="68575" wrap="square" tIns="34275">
+            <a:noAutofit/>
+          </a:bodyPr>
+          <a:lstStyle/>
+          <a:p>
+            <a:pPr indent="0" lvl="0" marL="0" marR="0" rtl="0" algn="ctr">
+              <a:spcBef>
+                <a:spcPts val="0"/>
+              </a:spcBef>
+              <a:spcAft>
+                <a:spcPts val="0"/>
+              </a:spcAft>
+              <a:buNone/>
+            </a:pPr>
+            <a:r>
+              <a:t/>
+            </a:r>
+            <a:endParaRPr sz="1400">
+              <a:solidFill>
+                <a:schemeClr val="dk1"/>
+              </a:solidFill>
+              <a:latin typeface="Calibri"/>
+              <a:ea typeface="Calibri"/>
+              <a:cs typeface="Calibri"/>
+              <a:sym typeface="Calibri"/>
+            </a:endParaRPr>
+          </a:p>
+        </p:txBody>
+      </p:sp>
+      <p:sp>
+        <p:nvSpPr>
+          <p:cNvPr id="678" name="Google Shape;678;p43"/>
+          <p:cNvSpPr txBox="1"/>
+          <p:nvPr/>
+        </p:nvSpPr>
+        <p:spPr>
+          <a:xfrm>
+            <a:off x="6688099" y="2667762"/>
+            <a:ext cx="1468337" cy="171450"/>
+          </a:xfrm>
+          <a:prstGeom prst="rect">
+            <a:avLst/>
+          </a:prstGeom>
+          <a:noFill/>
+          <a:ln>
+            <a:noFill/>
+          </a:ln>
+        </p:spPr>
+        <p:txBody>
+          <a:bodyPr anchorCtr="0" anchor="t" bIns="0" lIns="0" spcFirstLastPara="1" rIns="0" wrap="square" tIns="0">
+            <a:spAutoFit/>
+          </a:bodyPr>
+          <a:lstStyle/>
+          <a:p>
+            <a:pPr indent="0" lvl="0" marL="0" marR="0" rtl="0" algn="l">
+              <a:lnSpc>
+                <a:spcPct val="125000"/>
+              </a:lnSpc>
+              <a:spcBef>
+                <a:spcPts val="0"/>
+              </a:spcBef>
+              <a:spcAft>
+                <a:spcPts val="0"/>
+              </a:spcAft>
+              <a:buNone/>
+            </a:pPr>
+            <a:r>
+              <a:rPr b="1" i="0" lang="en" sz="900">
+                <a:solidFill>
+                  <a:srgbClr val="1A1A1A"/>
+                </a:solidFill>
+                <a:latin typeface="Calibri"/>
+                <a:ea typeface="Calibri"/>
+                <a:cs typeface="Calibri"/>
+                <a:sym typeface="Calibri"/>
+              </a:rPr>
+              <a:t>In-memory cache</a:t>
+            </a:r>
+            <a:endParaRPr sz="1100"/>
+          </a:p>
+        </p:txBody>
+      </p:sp>
+      <p:sp>
+        <p:nvSpPr>
+          <p:cNvPr id="679" name="Google Shape;679;p43"/>
+          <p:cNvSpPr txBox="1"/>
+          <p:nvPr/>
+        </p:nvSpPr>
+        <p:spPr>
+          <a:xfrm>
+            <a:off x="6688099" y="2852928"/>
+            <a:ext cx="1468337" cy="308610"/>
+          </a:xfrm>
+          <a:prstGeom prst="rect">
+            <a:avLst/>
+          </a:prstGeom>
+          <a:noFill/>
+          <a:ln>
+            <a:noFill/>
+          </a:ln>
+        </p:spPr>
+        <p:txBody>
+          <a:bodyPr anchorCtr="0" anchor="t" bIns="0" lIns="0" spcFirstLastPara="1" rIns="0" wrap="square" tIns="0">
+            <a:spAutoFit/>
+          </a:bodyPr>
+          <a:lstStyle/>
+          <a:p>
+            <a:pPr indent="0" lvl="0" marL="0" marR="0" rtl="0" algn="l">
+              <a:lnSpc>
+                <a:spcPct val="120000"/>
+              </a:lnSpc>
+              <a:spcBef>
+                <a:spcPts val="0"/>
+              </a:spcBef>
+              <a:spcAft>
+                <a:spcPts val="0"/>
+              </a:spcAft>
+              <a:buNone/>
+            </a:pPr>
+            <a:r>
+              <a:rPr b="0" i="0" lang="en" sz="800">
+                <a:solidFill>
+                  <a:srgbClr val="6B6B6B"/>
+                </a:solidFill>
+                <a:latin typeface="Calibri"/>
+                <a:ea typeface="Calibri"/>
+                <a:cs typeface="Calibri"/>
+                <a:sym typeface="Calibri"/>
+              </a:rPr>
+              <a:t>Pipeline runs once at startup</a:t>
+            </a:r>
+            <a:endParaRPr sz="1100"/>
+          </a:p>
+        </p:txBody>
+      </p:sp>
+      <p:sp>
+        <p:nvSpPr>
+          <p:cNvPr id="680" name="Google Shape;680;p43"/>
+          <p:cNvSpPr/>
+          <p:nvPr/>
+        </p:nvSpPr>
+        <p:spPr>
+          <a:xfrm>
+            <a:off x="582946" y="3497580"/>
+            <a:ext cx="7978124" cy="822960"/>
+          </a:xfrm>
+          <a:prstGeom prst="rect">
+            <a:avLst/>
+          </a:prstGeom>
+          <a:solidFill>
+            <a:srgbClr val="F0ECE4"/>
+          </a:solidFill>
+          <a:ln>
+            <a:noFill/>
+          </a:ln>
+        </p:spPr>
+        <p:txBody>
+          <a:bodyPr anchorCtr="0" anchor="ctr" bIns="34275" lIns="68575" spcFirstLastPara="1" rIns="68575" wrap="square" tIns="34275">
+            <a:noAutofit/>
+          </a:bodyPr>
+          <a:lstStyle/>
+          <a:p>
+            <a:pPr indent="0" lvl="0" marL="0" marR="0" rtl="0" algn="ctr">
+              <a:spcBef>
+                <a:spcPts val="0"/>
+              </a:spcBef>
+              <a:spcAft>
+                <a:spcPts val="0"/>
+              </a:spcAft>
+              <a:buNone/>
+            </a:pPr>
+            <a:r>
+              <a:t/>
+            </a:r>
+            <a:endParaRPr sz="1400">
+              <a:solidFill>
+                <a:schemeClr val="dk1"/>
+              </a:solidFill>
+              <a:latin typeface="Calibri"/>
+              <a:ea typeface="Calibri"/>
+              <a:cs typeface="Calibri"/>
+              <a:sym typeface="Calibri"/>
+            </a:endParaRPr>
+          </a:p>
+        </p:txBody>
+      </p:sp>
+      <p:sp>
+        <p:nvSpPr>
+          <p:cNvPr id="681" name="Google Shape;681;p43"/>
+          <p:cNvSpPr/>
+          <p:nvPr/>
+        </p:nvSpPr>
+        <p:spPr>
+          <a:xfrm>
+            <a:off x="582946" y="3497580"/>
+            <a:ext cx="37720" cy="822960"/>
+          </a:xfrm>
+          <a:prstGeom prst="rect">
+            <a:avLst/>
+          </a:prstGeom>
+          <a:solidFill>
+            <a:srgbClr val="B45309"/>
+          </a:solidFill>
+          <a:ln>
+            <a:noFill/>
+          </a:ln>
+        </p:spPr>
+        <p:txBody>
+          <a:bodyPr anchorCtr="0" anchor="ctr" bIns="34275" lIns="68575" spcFirstLastPara="1" rIns="68575" wrap="square" tIns="34275">
+            <a:noAutofit/>
+          </a:bodyPr>
+          <a:lstStyle/>
+          <a:p>
+            <a:pPr indent="0" lvl="0" marL="0" marR="0" rtl="0" algn="ctr">
+              <a:spcBef>
+                <a:spcPts val="0"/>
+              </a:spcBef>
+              <a:spcAft>
+                <a:spcPts val="0"/>
+              </a:spcAft>
+              <a:buNone/>
+            </a:pPr>
+            <a:r>
+              <a:t/>
+            </a:r>
+            <a:endParaRPr sz="1400">
+              <a:solidFill>
+                <a:schemeClr val="dk1"/>
+              </a:solidFill>
+              <a:latin typeface="Calibri"/>
+              <a:ea typeface="Calibri"/>
+              <a:cs typeface="Calibri"/>
+              <a:sym typeface="Calibri"/>
+            </a:endParaRPr>
+          </a:p>
+        </p:txBody>
+      </p:sp>
+      <p:sp>
+        <p:nvSpPr>
+          <p:cNvPr id="682" name="Google Shape;682;p43"/>
+          <p:cNvSpPr txBox="1"/>
+          <p:nvPr/>
+        </p:nvSpPr>
+        <p:spPr>
+          <a:xfrm>
+            <a:off x="788691" y="3614166"/>
+            <a:ext cx="1783128" cy="171450"/>
+          </a:xfrm>
+          <a:prstGeom prst="rect">
+            <a:avLst/>
+          </a:prstGeom>
+          <a:noFill/>
+          <a:ln>
+            <a:noFill/>
+          </a:ln>
+        </p:spPr>
+        <p:txBody>
+          <a:bodyPr anchorCtr="0" anchor="t" bIns="0" lIns="0" spcFirstLastPara="1" rIns="0" wrap="square" tIns="0">
+            <a:spAutoFit/>
+          </a:bodyPr>
+          <a:lstStyle/>
+          <a:p>
+            <a:pPr indent="0" lvl="0" marL="0" marR="0" rtl="0" algn="l">
+              <a:lnSpc>
+                <a:spcPct val="125000"/>
+              </a:lnSpc>
+              <a:spcBef>
+                <a:spcPts val="0"/>
+              </a:spcBef>
+              <a:spcAft>
+                <a:spcPts val="0"/>
+              </a:spcAft>
+              <a:buNone/>
+            </a:pPr>
+            <a:r>
+              <a:rPr b="0" i="0" lang="en" sz="700">
+                <a:solidFill>
+                  <a:srgbClr val="B45309"/>
+                </a:solidFill>
+                <a:latin typeface="Consolas"/>
+                <a:ea typeface="Consolas"/>
+                <a:cs typeface="Consolas"/>
+                <a:sym typeface="Consolas"/>
+              </a:rPr>
+              <a:t>DATA LAYER</a:t>
+            </a:r>
+            <a:endParaRPr sz="1100"/>
+          </a:p>
+        </p:txBody>
+      </p:sp>
+      <p:sp>
+        <p:nvSpPr>
+          <p:cNvPr id="683" name="Google Shape;683;p43"/>
+          <p:cNvSpPr txBox="1"/>
+          <p:nvPr/>
+        </p:nvSpPr>
+        <p:spPr>
+          <a:xfrm>
+            <a:off x="788691" y="3819906"/>
+            <a:ext cx="1851709" cy="274320"/>
+          </a:xfrm>
+          <a:prstGeom prst="rect">
+            <a:avLst/>
+          </a:prstGeom>
+          <a:noFill/>
+          <a:ln>
+            <a:noFill/>
+          </a:ln>
+        </p:spPr>
+        <p:txBody>
+          <a:bodyPr anchorCtr="0" anchor="t" bIns="0" lIns="0" spcFirstLastPara="1" rIns="0" wrap="square" tIns="0">
+            <a:spAutoFit/>
+          </a:bodyPr>
+          <a:lstStyle/>
+          <a:p>
+            <a:pPr indent="0" lvl="0" marL="0" marR="0" rtl="0" algn="l">
+              <a:lnSpc>
+                <a:spcPct val="125000"/>
+              </a:lnSpc>
+              <a:spcBef>
+                <a:spcPts val="0"/>
+              </a:spcBef>
+              <a:spcAft>
+                <a:spcPts val="0"/>
+              </a:spcAft>
+              <a:buNone/>
+            </a:pPr>
+            <a:r>
+              <a:rPr b="0" i="0" lang="en" sz="1300">
+                <a:solidFill>
+                  <a:srgbClr val="1A1A1A"/>
+                </a:solidFill>
+                <a:latin typeface="Georgia"/>
+                <a:ea typeface="Georgia"/>
+                <a:cs typeface="Georgia"/>
+                <a:sym typeface="Georgia"/>
+              </a:rPr>
+              <a:t>Storage</a:t>
+            </a:r>
+            <a:endParaRPr sz="1100"/>
+          </a:p>
+        </p:txBody>
+      </p:sp>
+      <p:sp>
+        <p:nvSpPr>
+          <p:cNvPr id="684" name="Google Shape;684;p43"/>
+          <p:cNvSpPr/>
+          <p:nvPr/>
+        </p:nvSpPr>
+        <p:spPr>
+          <a:xfrm>
+            <a:off x="2914728" y="3600450"/>
+            <a:ext cx="1715231" cy="617220"/>
+          </a:xfrm>
+          <a:prstGeom prst="rect">
+            <a:avLst/>
+          </a:prstGeom>
+          <a:solidFill>
+            <a:srgbClr val="FAF8F4"/>
+          </a:solidFill>
+          <a:ln cap="flat" cmpd="sng" w="9525">
+            <a:solidFill>
+              <a:srgbClr val="D8D4CC"/>
+            </a:solidFill>
+            <a:prstDash val="solid"/>
+            <a:round/>
+            <a:headEnd len="sm" w="sm" type="none"/>
+            <a:tailEnd len="sm" w="sm" type="none"/>
+          </a:ln>
+        </p:spPr>
+        <p:txBody>
+          <a:bodyPr anchorCtr="0" anchor="ctr" bIns="34275" lIns="68575" spcFirstLastPara="1" rIns="68575" wrap="square" tIns="34275">
+            <a:noAutofit/>
+          </a:bodyPr>
+          <a:lstStyle/>
+          <a:p>
+            <a:pPr indent="0" lvl="0" marL="0" marR="0" rtl="0" algn="ctr">
+              <a:spcBef>
+                <a:spcPts val="0"/>
+              </a:spcBef>
+              <a:spcAft>
+                <a:spcPts val="0"/>
+              </a:spcAft>
+              <a:buNone/>
+            </a:pPr>
+            <a:r>
+              <a:t/>
+            </a:r>
+            <a:endParaRPr sz="1400">
+              <a:solidFill>
+                <a:schemeClr val="dk1"/>
+              </a:solidFill>
+              <a:latin typeface="Calibri"/>
+              <a:ea typeface="Calibri"/>
+              <a:cs typeface="Calibri"/>
+              <a:sym typeface="Calibri"/>
+            </a:endParaRPr>
+          </a:p>
+        </p:txBody>
+      </p:sp>
+      <p:sp>
+        <p:nvSpPr>
+          <p:cNvPr id="685" name="Google Shape;685;p43"/>
+          <p:cNvSpPr txBox="1"/>
+          <p:nvPr/>
+        </p:nvSpPr>
+        <p:spPr>
+          <a:xfrm>
+            <a:off x="3038175" y="3696462"/>
+            <a:ext cx="1468337" cy="171450"/>
+          </a:xfrm>
+          <a:prstGeom prst="rect">
+            <a:avLst/>
+          </a:prstGeom>
+          <a:noFill/>
+          <a:ln>
+            <a:noFill/>
+          </a:ln>
+        </p:spPr>
+        <p:txBody>
+          <a:bodyPr anchorCtr="0" anchor="t" bIns="0" lIns="0" spcFirstLastPara="1" rIns="0" wrap="square" tIns="0">
+            <a:spAutoFit/>
+          </a:bodyPr>
+          <a:lstStyle/>
+          <a:p>
+            <a:pPr indent="0" lvl="0" marL="0" marR="0" rtl="0" algn="l">
+              <a:lnSpc>
+                <a:spcPct val="125000"/>
+              </a:lnSpc>
+              <a:spcBef>
+                <a:spcPts val="0"/>
+              </a:spcBef>
+              <a:spcAft>
+                <a:spcPts val="0"/>
+              </a:spcAft>
+              <a:buNone/>
+            </a:pPr>
+            <a:r>
+              <a:rPr b="1" i="0" lang="en" sz="900">
+                <a:solidFill>
+                  <a:srgbClr val="1A1A1A"/>
+                </a:solidFill>
+                <a:latin typeface="Calibri"/>
+                <a:ea typeface="Calibri"/>
+                <a:cs typeface="Calibri"/>
+                <a:sym typeface="Calibri"/>
+              </a:rPr>
+              <a:t>data.csv</a:t>
+            </a:r>
+            <a:endParaRPr sz="1100"/>
+          </a:p>
+        </p:txBody>
+      </p:sp>
+      <p:sp>
+        <p:nvSpPr>
+          <p:cNvPr id="686" name="Google Shape;686;p43"/>
+          <p:cNvSpPr txBox="1"/>
+          <p:nvPr/>
+        </p:nvSpPr>
+        <p:spPr>
+          <a:xfrm>
+            <a:off x="3038175" y="3881628"/>
+            <a:ext cx="1468337" cy="308610"/>
+          </a:xfrm>
+          <a:prstGeom prst="rect">
+            <a:avLst/>
+          </a:prstGeom>
+          <a:noFill/>
+          <a:ln>
+            <a:noFill/>
+          </a:ln>
+        </p:spPr>
+        <p:txBody>
+          <a:bodyPr anchorCtr="0" anchor="t" bIns="0" lIns="0" spcFirstLastPara="1" rIns="0" wrap="square" tIns="0">
+            <a:spAutoFit/>
+          </a:bodyPr>
+          <a:lstStyle/>
+          <a:p>
+            <a:pPr indent="0" lvl="0" marL="0" marR="0" rtl="0" algn="l">
+              <a:lnSpc>
+                <a:spcPct val="120000"/>
+              </a:lnSpc>
+              <a:spcBef>
+                <a:spcPts val="0"/>
+              </a:spcBef>
+              <a:spcAft>
+                <a:spcPts val="0"/>
+              </a:spcAft>
+              <a:buNone/>
+            </a:pPr>
+            <a:r>
+              <a:rPr b="0" i="0" lang="en" sz="800">
+                <a:solidFill>
+                  <a:srgbClr val="6B6B6B"/>
+                </a:solidFill>
+                <a:latin typeface="Calibri"/>
+                <a:ea typeface="Calibri"/>
+                <a:cs typeface="Calibri"/>
+                <a:sym typeface="Calibri"/>
+              </a:rPr>
+              <a:t>541,909 raw transaction rows</a:t>
+            </a:r>
+            <a:endParaRPr sz="1100"/>
+          </a:p>
+        </p:txBody>
+      </p:sp>
+      <p:sp>
+        <p:nvSpPr>
+          <p:cNvPr id="687" name="Google Shape;687;p43"/>
+          <p:cNvSpPr/>
+          <p:nvPr/>
+        </p:nvSpPr>
+        <p:spPr>
+          <a:xfrm>
+            <a:off x="4739690" y="3600450"/>
+            <a:ext cx="1715231" cy="617220"/>
+          </a:xfrm>
+          <a:prstGeom prst="rect">
+            <a:avLst/>
+          </a:prstGeom>
+          <a:solidFill>
+            <a:srgbClr val="FAF8F4"/>
+          </a:solidFill>
+          <a:ln cap="flat" cmpd="sng" w="9525">
+            <a:solidFill>
+              <a:srgbClr val="D8D4CC"/>
+            </a:solidFill>
+            <a:prstDash val="solid"/>
+            <a:round/>
+            <a:headEnd len="sm" w="sm" type="none"/>
+            <a:tailEnd len="sm" w="sm" type="none"/>
+          </a:ln>
+        </p:spPr>
+        <p:txBody>
+          <a:bodyPr anchorCtr="0" anchor="ctr" bIns="34275" lIns="68575" spcFirstLastPara="1" rIns="68575" wrap="square" tIns="34275">
+            <a:noAutofit/>
+          </a:bodyPr>
+          <a:lstStyle/>
+          <a:p>
+            <a:pPr indent="0" lvl="0" marL="0" marR="0" rtl="0" algn="ctr">
+              <a:spcBef>
+                <a:spcPts val="0"/>
+              </a:spcBef>
+              <a:spcAft>
+                <a:spcPts val="0"/>
+              </a:spcAft>
+              <a:buNone/>
+            </a:pPr>
+            <a:r>
+              <a:t/>
+            </a:r>
+            <a:endParaRPr sz="1400">
+              <a:solidFill>
+                <a:schemeClr val="dk1"/>
+              </a:solidFill>
+              <a:latin typeface="Calibri"/>
+              <a:ea typeface="Calibri"/>
+              <a:cs typeface="Calibri"/>
+              <a:sym typeface="Calibri"/>
+            </a:endParaRPr>
+          </a:p>
+        </p:txBody>
+      </p:sp>
+      <p:sp>
+        <p:nvSpPr>
+          <p:cNvPr id="688" name="Google Shape;688;p43"/>
+          <p:cNvSpPr txBox="1"/>
+          <p:nvPr/>
+        </p:nvSpPr>
+        <p:spPr>
+          <a:xfrm>
+            <a:off x="4863137" y="3696462"/>
+            <a:ext cx="1468337" cy="171450"/>
+          </a:xfrm>
+          <a:prstGeom prst="rect">
+            <a:avLst/>
+          </a:prstGeom>
+          <a:noFill/>
+          <a:ln>
+            <a:noFill/>
+          </a:ln>
+        </p:spPr>
+        <p:txBody>
+          <a:bodyPr anchorCtr="0" anchor="t" bIns="0" lIns="0" spcFirstLastPara="1" rIns="0" wrap="square" tIns="0">
+            <a:spAutoFit/>
+          </a:bodyPr>
+          <a:lstStyle/>
+          <a:p>
+            <a:pPr indent="0" lvl="0" marL="0" marR="0" rtl="0" algn="l">
+              <a:lnSpc>
+                <a:spcPct val="125000"/>
+              </a:lnSpc>
+              <a:spcBef>
+                <a:spcPts val="0"/>
+              </a:spcBef>
+              <a:spcAft>
+                <a:spcPts val="0"/>
+              </a:spcAft>
+              <a:buNone/>
+            </a:pPr>
+            <a:r>
+              <a:rPr b="1" i="0" lang="en" sz="900">
+                <a:solidFill>
+                  <a:srgbClr val="1A1A1A"/>
+                </a:solidFill>
+                <a:latin typeface="Calibri"/>
+                <a:ea typeface="Calibri"/>
+                <a:cs typeface="Calibri"/>
+                <a:sym typeface="Calibri"/>
+              </a:rPr>
+              <a:t>SQLite</a:t>
+            </a:r>
+            <a:endParaRPr sz="1100"/>
+          </a:p>
+        </p:txBody>
+      </p:sp>
+      <p:sp>
+        <p:nvSpPr>
+          <p:cNvPr id="689" name="Google Shape;689;p43"/>
+          <p:cNvSpPr txBox="1"/>
+          <p:nvPr/>
+        </p:nvSpPr>
+        <p:spPr>
+          <a:xfrm>
+            <a:off x="4863137" y="3881628"/>
+            <a:ext cx="1468337" cy="308610"/>
+          </a:xfrm>
+          <a:prstGeom prst="rect">
+            <a:avLst/>
+          </a:prstGeom>
+          <a:noFill/>
+          <a:ln>
+            <a:noFill/>
+          </a:ln>
+        </p:spPr>
+        <p:txBody>
+          <a:bodyPr anchorCtr="0" anchor="t" bIns="0" lIns="0" spcFirstLastPara="1" rIns="0" wrap="square" tIns="0">
+            <a:spAutoFit/>
+          </a:bodyPr>
+          <a:lstStyle/>
+          <a:p>
+            <a:pPr indent="0" lvl="0" marL="0" marR="0" rtl="0" algn="l">
+              <a:lnSpc>
+                <a:spcPct val="120000"/>
+              </a:lnSpc>
+              <a:spcBef>
+                <a:spcPts val="0"/>
+              </a:spcBef>
+              <a:spcAft>
+                <a:spcPts val="0"/>
+              </a:spcAft>
+              <a:buNone/>
+            </a:pPr>
+            <a:r>
+              <a:rPr b="0" i="0" lang="en" sz="800">
+                <a:solidFill>
+                  <a:srgbClr val="6B6B6B"/>
+                </a:solidFill>
+                <a:latin typeface="Calibri"/>
+                <a:ea typeface="Calibri"/>
+                <a:cs typeface="Calibri"/>
+                <a:sym typeface="Calibri"/>
+              </a:rPr>
+              <a:t>Product catalogue + demo purchases</a:t>
+            </a:r>
+            <a:endParaRPr sz="1100"/>
+          </a:p>
+        </p:txBody>
+      </p:sp>
+      <p:sp>
+        <p:nvSpPr>
+          <p:cNvPr id="690" name="Google Shape;690;p43"/>
+          <p:cNvSpPr/>
+          <p:nvPr/>
+        </p:nvSpPr>
+        <p:spPr>
+          <a:xfrm>
+            <a:off x="6564652" y="3600450"/>
+            <a:ext cx="1715231" cy="617220"/>
+          </a:xfrm>
+          <a:prstGeom prst="rect">
+            <a:avLst/>
+          </a:prstGeom>
+          <a:solidFill>
+            <a:srgbClr val="FAF8F4"/>
+          </a:solidFill>
+          <a:ln cap="flat" cmpd="sng" w="9525">
+            <a:solidFill>
+              <a:srgbClr val="D8D4CC"/>
+            </a:solidFill>
+            <a:prstDash val="solid"/>
+            <a:round/>
+            <a:headEnd len="sm" w="sm" type="none"/>
+            <a:tailEnd len="sm" w="sm" type="none"/>
+          </a:ln>
+        </p:spPr>
+        <p:txBody>
+          <a:bodyPr anchorCtr="0" anchor="ctr" bIns="34275" lIns="68575" spcFirstLastPara="1" rIns="68575" wrap="square" tIns="34275">
+            <a:noAutofit/>
+          </a:bodyPr>
+          <a:lstStyle/>
+          <a:p>
+            <a:pPr indent="0" lvl="0" marL="0" marR="0" rtl="0" algn="ctr">
+              <a:spcBef>
+                <a:spcPts val="0"/>
+              </a:spcBef>
+              <a:spcAft>
+                <a:spcPts val="0"/>
+              </a:spcAft>
+              <a:buNone/>
+            </a:pPr>
+            <a:r>
+              <a:t/>
+            </a:r>
+            <a:endParaRPr sz="1400">
+              <a:solidFill>
+                <a:schemeClr val="dk1"/>
+              </a:solidFill>
+              <a:latin typeface="Calibri"/>
+              <a:ea typeface="Calibri"/>
+              <a:cs typeface="Calibri"/>
+              <a:sym typeface="Calibri"/>
+            </a:endParaRPr>
+          </a:p>
+        </p:txBody>
+      </p:sp>
+      <p:sp>
+        <p:nvSpPr>
+          <p:cNvPr id="691" name="Google Shape;691;p43"/>
+          <p:cNvSpPr txBox="1"/>
+          <p:nvPr/>
+        </p:nvSpPr>
+        <p:spPr>
+          <a:xfrm>
+            <a:off x="6688099" y="3696462"/>
+            <a:ext cx="1468337" cy="171450"/>
+          </a:xfrm>
+          <a:prstGeom prst="rect">
+            <a:avLst/>
+          </a:prstGeom>
+          <a:noFill/>
+          <a:ln>
+            <a:noFill/>
+          </a:ln>
+        </p:spPr>
+        <p:txBody>
+          <a:bodyPr anchorCtr="0" anchor="t" bIns="0" lIns="0" spcFirstLastPara="1" rIns="0" wrap="square" tIns="0">
+            <a:spAutoFit/>
+          </a:bodyPr>
+          <a:lstStyle/>
+          <a:p>
+            <a:pPr indent="0" lvl="0" marL="0" marR="0" rtl="0" algn="l">
+              <a:lnSpc>
+                <a:spcPct val="125000"/>
+              </a:lnSpc>
+              <a:spcBef>
+                <a:spcPts val="0"/>
+              </a:spcBef>
+              <a:spcAft>
+                <a:spcPts val="0"/>
+              </a:spcAft>
+              <a:buNone/>
+            </a:pPr>
+            <a:r>
+              <a:rPr b="1" i="0" lang="en" sz="900">
+                <a:solidFill>
+                  <a:srgbClr val="1A1A1A"/>
+                </a:solidFill>
+                <a:latin typeface="Calibri"/>
+                <a:ea typeface="Calibri"/>
+                <a:cs typeface="Calibri"/>
+                <a:sym typeface="Calibri"/>
+              </a:rPr>
+              <a:t>scikit-learn models</a:t>
+            </a:r>
+            <a:endParaRPr sz="1100"/>
+          </a:p>
+        </p:txBody>
+      </p:sp>
+      <p:sp>
+        <p:nvSpPr>
+          <p:cNvPr id="692" name="Google Shape;692;p43"/>
+          <p:cNvSpPr txBox="1"/>
+          <p:nvPr/>
+        </p:nvSpPr>
+        <p:spPr>
+          <a:xfrm>
+            <a:off x="6688099" y="3881628"/>
+            <a:ext cx="1468337" cy="308610"/>
+          </a:xfrm>
+          <a:prstGeom prst="rect">
+            <a:avLst/>
+          </a:prstGeom>
+          <a:noFill/>
+          <a:ln>
+            <a:noFill/>
+          </a:ln>
+        </p:spPr>
+        <p:txBody>
+          <a:bodyPr anchorCtr="0" anchor="t" bIns="0" lIns="0" spcFirstLastPara="1" rIns="0" wrap="square" tIns="0">
+            <a:spAutoFit/>
+          </a:bodyPr>
+          <a:lstStyle/>
+          <a:p>
+            <a:pPr indent="0" lvl="0" marL="0" marR="0" rtl="0" algn="l">
+              <a:lnSpc>
+                <a:spcPct val="120000"/>
+              </a:lnSpc>
+              <a:spcBef>
+                <a:spcPts val="0"/>
+              </a:spcBef>
+              <a:spcAft>
+                <a:spcPts val="0"/>
+              </a:spcAft>
+              <a:buNone/>
+            </a:pPr>
+            <a:r>
+              <a:rPr b="0" i="0" lang="en" sz="800">
+                <a:solidFill>
+                  <a:srgbClr val="6B6B6B"/>
+                </a:solidFill>
+                <a:latin typeface="Calibri"/>
+                <a:ea typeface="Calibri"/>
+                <a:cs typeface="Calibri"/>
+                <a:sym typeface="Calibri"/>
+              </a:rPr>
+              <a:t>Fitted scaler, K-Means, PCA, LR</a:t>
+            </a:r>
+            <a:endParaRPr sz="1100"/>
+          </a:p>
+        </p:txBody>
+      </p:sp>
+      <p:sp>
+        <p:nvSpPr>
+          <p:cNvPr id="693" name="Google Shape;693;p43"/>
+          <p:cNvSpPr/>
+          <p:nvPr/>
+        </p:nvSpPr>
+        <p:spPr>
+          <a:xfrm rot="10800000">
+            <a:off x="4469134" y="2290572"/>
+            <a:ext cx="205745" cy="150876"/>
+          </a:xfrm>
+          <a:prstGeom prst="triangle">
+            <a:avLst>
+              <a:gd fmla="val 50000" name="adj"/>
+            </a:avLst>
+          </a:prstGeom>
+          <a:solidFill>
+            <a:srgbClr val="D8D4CC"/>
+          </a:solidFill>
+          <a:ln>
+            <a:noFill/>
+          </a:ln>
+        </p:spPr>
+        <p:txBody>
+          <a:bodyPr anchorCtr="0" anchor="ctr" bIns="34275" lIns="68575" spcFirstLastPara="1" rIns="68575" wrap="square" tIns="34275">
+            <a:noAutofit/>
+          </a:bodyPr>
+          <a:lstStyle/>
+          <a:p>
+            <a:pPr indent="0" lvl="0" marL="0" marR="0" rtl="0" algn="ctr">
+              <a:spcBef>
+                <a:spcPts val="0"/>
+              </a:spcBef>
+              <a:spcAft>
+                <a:spcPts val="0"/>
+              </a:spcAft>
+              <a:buNone/>
+            </a:pPr>
+            <a:r>
+              <a:t/>
+            </a:r>
+            <a:endParaRPr sz="1400">
+              <a:solidFill>
+                <a:schemeClr val="dk1"/>
+              </a:solidFill>
+              <a:latin typeface="Calibri"/>
+              <a:ea typeface="Calibri"/>
+              <a:cs typeface="Calibri"/>
+              <a:sym typeface="Calibri"/>
+            </a:endParaRPr>
+          </a:p>
+        </p:txBody>
+      </p:sp>
+      <p:sp>
+        <p:nvSpPr>
+          <p:cNvPr id="694" name="Google Shape;694;p43"/>
+          <p:cNvSpPr/>
+          <p:nvPr/>
+        </p:nvSpPr>
+        <p:spPr>
+          <a:xfrm rot="10800000">
+            <a:off x="4469134" y="3319272"/>
+            <a:ext cx="205745" cy="150876"/>
+          </a:xfrm>
+          <a:prstGeom prst="triangle">
+            <a:avLst>
+              <a:gd fmla="val 50000" name="adj"/>
+            </a:avLst>
+          </a:prstGeom>
+          <a:solidFill>
+            <a:srgbClr val="D8D4CC"/>
+          </a:solidFill>
+          <a:ln>
+            <a:noFill/>
+          </a:ln>
+        </p:spPr>
+        <p:txBody>
+          <a:bodyPr anchorCtr="0" anchor="ctr" bIns="34275" lIns="68575" spcFirstLastPara="1" rIns="68575" wrap="square" tIns="34275">
+            <a:noAutofit/>
+          </a:bodyPr>
+          <a:lstStyle/>
+          <a:p>
+            <a:pPr indent="0" lvl="0" marL="0" marR="0" rtl="0" algn="ctr">
+              <a:spcBef>
+                <a:spcPts val="0"/>
+              </a:spcBef>
+              <a:spcAft>
+                <a:spcPts val="0"/>
+              </a:spcAft>
+              <a:buNone/>
+            </a:pPr>
+            <a:r>
+              <a:t/>
+            </a:r>
+            <a:endParaRPr sz="1400">
+              <a:solidFill>
+                <a:schemeClr val="dk1"/>
+              </a:solidFill>
+              <a:latin typeface="Calibri"/>
+              <a:ea typeface="Calibri"/>
+              <a:cs typeface="Calibri"/>
+              <a:sym typeface="Calibri"/>
+            </a:endParaRPr>
+          </a:p>
+        </p:txBody>
+      </p:sp>
+      <p:sp>
+        <p:nvSpPr>
+          <p:cNvPr id="695" name="Google Shape;695;p43"/>
+          <p:cNvSpPr txBox="1"/>
+          <p:nvPr/>
+        </p:nvSpPr>
+        <p:spPr>
+          <a:xfrm>
+            <a:off x="582946" y="4402836"/>
+            <a:ext cx="7978124" cy="274320"/>
+          </a:xfrm>
+          <a:prstGeom prst="rect">
+            <a:avLst/>
+          </a:prstGeom>
+          <a:noFill/>
+          <a:ln>
+            <a:noFill/>
+          </a:ln>
+        </p:spPr>
+        <p:txBody>
+          <a:bodyPr anchorCtr="0" anchor="t" bIns="0" lIns="0" spcFirstLastPara="1" rIns="0" wrap="square" tIns="0">
+            <a:spAutoFit/>
+          </a:bodyPr>
+          <a:lstStyle/>
+          <a:p>
+            <a:pPr indent="0" lvl="0" marL="0" marR="0" rtl="0" algn="l">
+              <a:lnSpc>
+                <a:spcPct val="125000"/>
+              </a:lnSpc>
+              <a:spcBef>
+                <a:spcPts val="0"/>
+              </a:spcBef>
+              <a:spcAft>
+                <a:spcPts val="0"/>
+              </a:spcAft>
+              <a:buNone/>
+            </a:pPr>
+            <a:r>
+              <a:rPr b="0" i="1" lang="en" sz="1000">
+                <a:solidFill>
+                  <a:srgbClr val="B45309"/>
+                </a:solidFill>
+                <a:latin typeface="Georgia"/>
+                <a:ea typeface="Georgia"/>
+                <a:cs typeface="Georgia"/>
+                <a:sym typeface="Georgia"/>
+              </a:rPr>
+              <a:t>Key decision: the backend imports the notebook's own pipeline — dashboard and analysis can never disagree.</a:t>
+            </a:r>
+            <a:endParaRPr sz="1100"/>
+          </a:p>
+        </p:txBody>
+      </p:sp>
+      <p:cxnSp>
+        <p:nvCxnSpPr>
+          <p:cNvPr id="696" name="Google Shape;696;p43"/>
+          <p:cNvCxnSpPr/>
+          <p:nvPr/>
+        </p:nvCxnSpPr>
+        <p:spPr>
+          <a:xfrm>
+            <a:off x="582946" y="4718304"/>
+            <a:ext cx="7978124" cy="0"/>
+          </a:xfrm>
+          <a:prstGeom prst="straightConnector1">
+            <a:avLst/>
+          </a:prstGeom>
+          <a:noFill/>
+          <a:ln cap="flat" cmpd="sng" w="9525">
+            <a:solidFill>
+              <a:srgbClr val="D8D4CC"/>
+            </a:solidFill>
+            <a:prstDash val="solid"/>
+            <a:round/>
+            <a:headEnd len="sm" w="sm" type="none"/>
+            <a:tailEnd len="sm" w="sm" type="none"/>
+          </a:ln>
+          <a:effectLst>
+            <a:outerShdw blurRad="40000" rotWithShape="0" dir="5400000" dist="20000">
+              <a:srgbClr val="000000">
+                <a:alpha val="38039"/>
+              </a:srgbClr>
+            </a:outerShdw>
+          </a:effectLst>
+        </p:spPr>
+      </p:cxnSp>
+      <p:sp>
+        <p:nvSpPr>
+          <p:cNvPr id="697" name="Google Shape;697;p43"/>
+          <p:cNvSpPr txBox="1"/>
+          <p:nvPr/>
+        </p:nvSpPr>
+        <p:spPr>
+          <a:xfrm>
+            <a:off x="582946" y="4800600"/>
+            <a:ext cx="4800728" cy="171450"/>
+          </a:xfrm>
+          <a:prstGeom prst="rect">
+            <a:avLst/>
+          </a:prstGeom>
+          <a:noFill/>
+          <a:ln>
+            <a:noFill/>
+          </a:ln>
+        </p:spPr>
+        <p:txBody>
+          <a:bodyPr anchorCtr="0" anchor="t" bIns="0" lIns="0" spcFirstLastPara="1" rIns="0" wrap="square" tIns="0">
+            <a:spAutoFit/>
+          </a:bodyPr>
+          <a:lstStyle/>
+          <a:p>
+            <a:pPr indent="0" lvl="0" marL="0" marR="0" rtl="0" algn="l">
+              <a:lnSpc>
+                <a:spcPct val="125000"/>
+              </a:lnSpc>
+              <a:spcBef>
+                <a:spcPts val="0"/>
+              </a:spcBef>
+              <a:spcAft>
+                <a:spcPts val="0"/>
+              </a:spcAft>
+              <a:buNone/>
+            </a:pPr>
+            <a:r>
+              <a:rPr b="0" i="0" lang="en" sz="600">
+                <a:solidFill>
+                  <a:srgbClr val="6B6B6B"/>
+                </a:solidFill>
+                <a:latin typeface="Consolas"/>
+                <a:ea typeface="Consolas"/>
+                <a:cs typeface="Consolas"/>
+                <a:sym typeface="Consolas"/>
+              </a:rPr>
+              <a:t>CUSTOMER SEGMENTATION FOR TARGETED E-COMMERCE MARKETING</a:t>
+            </a:r>
+            <a:endParaRPr sz="1100"/>
+          </a:p>
+        </p:txBody>
+      </p:sp>
+      <p:sp>
+        <p:nvSpPr>
+          <p:cNvPr id="698" name="Google Shape;698;p43"/>
+          <p:cNvSpPr txBox="1"/>
+          <p:nvPr/>
+        </p:nvSpPr>
+        <p:spPr>
+          <a:xfrm>
+            <a:off x="7189433" y="4800600"/>
+            <a:ext cx="1371637" cy="171450"/>
+          </a:xfrm>
+          <a:prstGeom prst="rect">
+            <a:avLst/>
+          </a:prstGeom>
+          <a:noFill/>
+          <a:ln>
+            <a:noFill/>
+          </a:ln>
+        </p:spPr>
+        <p:txBody>
+          <a:bodyPr anchorCtr="0" anchor="t" bIns="0" lIns="0" spcFirstLastPara="1" rIns="0" wrap="square" tIns="0">
+            <a:spAutoFit/>
+          </a:bodyPr>
+          <a:lstStyle/>
+          <a:p>
+            <a:pPr indent="0" lvl="0" marL="0" marR="0" rtl="0" algn="r">
+              <a:lnSpc>
+                <a:spcPct val="125000"/>
+              </a:lnSpc>
+              <a:spcBef>
+                <a:spcPts val="0"/>
+              </a:spcBef>
+              <a:spcAft>
+                <a:spcPts val="0"/>
+              </a:spcAft>
+              <a:buNone/>
+            </a:pPr>
+            <a:r>
+              <a:rPr b="0" i="0" lang="en" sz="600">
+                <a:solidFill>
+                  <a:srgbClr val="6B6B6B"/>
+                </a:solidFill>
+                <a:latin typeface="Consolas"/>
+                <a:ea typeface="Consolas"/>
+                <a:cs typeface="Consolas"/>
+                <a:sym typeface="Consolas"/>
+              </a:rPr>
+              <a:t>20 / 28</a:t>
+            </a:r>
+            <a:endParaRPr sz="1100"/>
+          </a:p>
+        </p:txBody>
+      </p:sp>
+    </p:spTree>
+  </p:cSld>
+  <p:clrMapOvr>
+    <a:masterClrMapping/>
+  </p:clrMapOvr>
+</p:sld>
+</file>
+
+<file path=ppt/slides/slide21.xml><?xml version="1.0" encoding="utf-8"?>
 <p:sld xmlns:a="http://schemas.openxmlformats.org/drawingml/2006/main" xmlns:r="http://schemas.openxmlformats.org/officeDocument/2006/relationships" xmlns:mc="http://schemas.openxmlformats.org/markup-compatibility/2006" xmlns:mv="urn:schemas-microsoft-com:mac:vml" xmlns:p="http://schemas.openxmlformats.org/presentationml/2006/main" xmlns:c="http://schemas.openxmlformats.org/drawingml/2006/chart" xmlns:dgm="http://schemas.openxmlformats.org/drawingml/2006/diagram" xmlns:o="urn:schemas-microsoft-com:office:office" xmlns:v="urn:schemas-microsoft-com:vml" xmlns:pvml="urn:schemas-microsoft-com:office:powerpoint" xmlns:com="http://schemas.openxmlformats.org/drawingml/2006/compatibility" xmlns:p14="http://schemas.microsoft.com/office/powerpoint/2010/main" xmlns:p15="http://schemas.microsoft.com/office/powerpoint/2012/main" xmlns:ahyp="http://schemas.microsoft.com/office/drawing/2018/hyperlinkcolor">
   <p:cSld>
     <p:spTree>
@@ -38299,7 +39144,7 @@
                 <a:cs typeface="Consolas"/>
                 <a:sym typeface="Consolas"/>
               </a:rPr>
-              <a:t>20 / 27</a:t>
+              <a:t>21 / 28</a:t>
             </a:r>
             <a:endParaRPr sz="1100"/>
           </a:p>
@@ -38313,7 +39158,7 @@
 </p:sld>
 </file>
 
-<file path=ppt/slides/slide21.xml><?xml version="1.0" encoding="utf-8"?>
+<file path=ppt/slides/slide22.xml><?xml version="1.0" encoding="utf-8"?>
 <p:sld xmlns:a="http://schemas.openxmlformats.org/drawingml/2006/main" xmlns:r="http://schemas.openxmlformats.org/officeDocument/2006/relationships" xmlns:mc="http://schemas.openxmlformats.org/markup-compatibility/2006" xmlns:mv="urn:schemas-microsoft-com:mac:vml" xmlns:p="http://schemas.openxmlformats.org/presentationml/2006/main" xmlns:c="http://schemas.openxmlformats.org/drawingml/2006/chart" xmlns:dgm="http://schemas.openxmlformats.org/drawingml/2006/diagram" xmlns:o="urn:schemas-microsoft-com:office:office" xmlns:v="urn:schemas-microsoft-com:vml" xmlns:pvml="urn:schemas-microsoft-com:office:powerpoint" xmlns:com="http://schemas.openxmlformats.org/drawingml/2006/compatibility" xmlns:p14="http://schemas.microsoft.com/office/powerpoint/2010/main" xmlns:p15="http://schemas.microsoft.com/office/powerpoint/2012/main" xmlns:ahyp="http://schemas.microsoft.com/office/drawing/2018/hyperlinkcolor">
   <p:cSld>
     <p:spTree>
@@ -39918,7 +40763,7 @@
                 <a:cs typeface="Consolas"/>
                 <a:sym typeface="Consolas"/>
               </a:rPr>
-              <a:t>21 / 27</a:t>
+              <a:t>22 / 28</a:t>
             </a:r>
             <a:endParaRPr sz="1100"/>
           </a:p>
@@ -39932,7 +40777,7 @@
 </p:sld>
 </file>
 
-<file path=ppt/slides/slide22.xml><?xml version="1.0" encoding="utf-8"?>
+<file path=ppt/slides/slide23.xml><?xml version="1.0" encoding="utf-8"?>
 <p:sld xmlns:a="http://schemas.openxmlformats.org/drawingml/2006/main" xmlns:r="http://schemas.openxmlformats.org/officeDocument/2006/relationships" xmlns:mc="http://schemas.openxmlformats.org/markup-compatibility/2006" xmlns:mv="urn:schemas-microsoft-com:mac:vml" xmlns:p="http://schemas.openxmlformats.org/presentationml/2006/main" xmlns:c="http://schemas.openxmlformats.org/drawingml/2006/chart" xmlns:dgm="http://schemas.openxmlformats.org/drawingml/2006/diagram" xmlns:o="urn:schemas-microsoft-com:office:office" xmlns:v="urn:schemas-microsoft-com:vml" xmlns:pvml="urn:schemas-microsoft-com:office:powerpoint" xmlns:com="http://schemas.openxmlformats.org/drawingml/2006/compatibility" xmlns:p14="http://schemas.microsoft.com/office/powerpoint/2010/main" xmlns:p15="http://schemas.microsoft.com/office/powerpoint/2012/main" xmlns:ahyp="http://schemas.microsoft.com/office/drawing/2018/hyperlinkcolor">
   <p:cSld>
     <p:spTree>
@@ -41410,7 +42255,7 @@
                 <a:cs typeface="Consolas"/>
                 <a:sym typeface="Consolas"/>
               </a:rPr>
-              <a:t>22 / 27</a:t>
+              <a:t>23 / 28</a:t>
             </a:r>
             <a:endParaRPr sz="1100"/>
           </a:p>
@@ -41424,7 +42269,7 @@
 </p:sld>
 </file>
 
-<file path=ppt/slides/slide23.xml><?xml version="1.0" encoding="utf-8"?>
+<file path=ppt/slides/slide24.xml><?xml version="1.0" encoding="utf-8"?>
 <p:sld xmlns:a="http://schemas.openxmlformats.org/drawingml/2006/main" xmlns:r="http://schemas.openxmlformats.org/officeDocument/2006/relationships" xmlns:mc="http://schemas.openxmlformats.org/markup-compatibility/2006" xmlns:mv="urn:schemas-microsoft-com:mac:vml" xmlns:p="http://schemas.openxmlformats.org/presentationml/2006/main" xmlns:c="http://schemas.openxmlformats.org/drawingml/2006/chart" xmlns:dgm="http://schemas.openxmlformats.org/drawingml/2006/diagram" xmlns:o="urn:schemas-microsoft-com:office:office" xmlns:v="urn:schemas-microsoft-com:vml" xmlns:pvml="urn:schemas-microsoft-com:office:powerpoint" xmlns:com="http://schemas.openxmlformats.org/drawingml/2006/compatibility" xmlns:p14="http://schemas.microsoft.com/office/powerpoint/2010/main" xmlns:p15="http://schemas.microsoft.com/office/powerpoint/2012/main" xmlns:ahyp="http://schemas.microsoft.com/office/drawing/2018/hyperlinkcolor">
   <p:cSld>
     <p:spTree>
@@ -42724,7 +43569,7 @@
                 <a:cs typeface="Consolas"/>
                 <a:sym typeface="Consolas"/>
               </a:rPr>
-              <a:t>23 / 27</a:t>
+              <a:t>24 / 28</a:t>
             </a:r>
             <a:endParaRPr sz="1100"/>
           </a:p>
@@ -42738,7 +43583,7 @@
 </p:sld>
 </file>
 
-<file path=ppt/slides/slide24.xml><?xml version="1.0" encoding="utf-8"?>
+<file path=ppt/slides/slide25.xml><?xml version="1.0" encoding="utf-8"?>
 <p:sld xmlns:a="http://schemas.openxmlformats.org/drawingml/2006/main" xmlns:r="http://schemas.openxmlformats.org/officeDocument/2006/relationships" xmlns:mc="http://schemas.openxmlformats.org/markup-compatibility/2006" xmlns:mv="urn:schemas-microsoft-com:mac:vml" xmlns:p="http://schemas.openxmlformats.org/presentationml/2006/main" xmlns:c="http://schemas.openxmlformats.org/drawingml/2006/chart" xmlns:dgm="http://schemas.openxmlformats.org/drawingml/2006/diagram" xmlns:o="urn:schemas-microsoft-com:office:office" xmlns:v="urn:schemas-microsoft-com:vml" xmlns:pvml="urn:schemas-microsoft-com:office:powerpoint" xmlns:com="http://schemas.openxmlformats.org/drawingml/2006/compatibility" xmlns:p14="http://schemas.microsoft.com/office/powerpoint/2010/main" xmlns:p15="http://schemas.microsoft.com/office/powerpoint/2012/main" xmlns:ahyp="http://schemas.microsoft.com/office/drawing/2018/hyperlinkcolor">
   <p:cSld>
     <p:spTree>
@@ -44569,7 +45414,7 @@
                 <a:cs typeface="Consolas"/>
                 <a:sym typeface="Consolas"/>
               </a:rPr>
-              <a:t>24 / 27</a:t>
+              <a:t>25 / 28</a:t>
             </a:r>
             <a:endParaRPr sz="1100"/>
           </a:p>
@@ -44583,7 +45428,7 @@
 </p:sld>
 </file>
 
-<file path=ppt/slides/slide25.xml><?xml version="1.0" encoding="utf-8"?>
+<file path=ppt/slides/slide26.xml><?xml version="1.0" encoding="utf-8"?>
 <p:sld xmlns:a="http://schemas.openxmlformats.org/drawingml/2006/main" xmlns:r="http://schemas.openxmlformats.org/officeDocument/2006/relationships" xmlns:mc="http://schemas.openxmlformats.org/markup-compatibility/2006" xmlns:mv="urn:schemas-microsoft-com:mac:vml" xmlns:p="http://schemas.openxmlformats.org/presentationml/2006/main" xmlns:c="http://schemas.openxmlformats.org/drawingml/2006/chart" xmlns:dgm="http://schemas.openxmlformats.org/drawingml/2006/diagram" xmlns:o="urn:schemas-microsoft-com:office:office" xmlns:v="urn:schemas-microsoft-com:vml" xmlns:pvml="urn:schemas-microsoft-com:office:powerpoint" xmlns:com="http://schemas.openxmlformats.org/drawingml/2006/compatibility" xmlns:p14="http://schemas.microsoft.com/office/powerpoint/2010/main" xmlns:p15="http://schemas.microsoft.com/office/powerpoint/2012/main" xmlns:ahyp="http://schemas.microsoft.com/office/drawing/2018/hyperlinkcolor">
   <p:cSld>
     <p:spTree>
@@ -46028,7 +46873,7 @@
                 <a:cs typeface="Consolas"/>
                 <a:sym typeface="Consolas"/>
               </a:rPr>
-              <a:t>25 / 27</a:t>
+              <a:t>26 / 28</a:t>
             </a:r>
             <a:endParaRPr sz="1100"/>
           </a:p>
@@ -46042,7 +46887,7 @@
 </p:sld>
 </file>
 
-<file path=ppt/slides/slide26.xml><?xml version="1.0" encoding="utf-8"?>
+<file path=ppt/slides/slide27.xml><?xml version="1.0" encoding="utf-8"?>
 <p:sld xmlns:a="http://schemas.openxmlformats.org/drawingml/2006/main" xmlns:r="http://schemas.openxmlformats.org/officeDocument/2006/relationships" xmlns:mc="http://schemas.openxmlformats.org/markup-compatibility/2006" xmlns:mv="urn:schemas-microsoft-com:mac:vml" xmlns:p="http://schemas.openxmlformats.org/presentationml/2006/main" xmlns:c="http://schemas.openxmlformats.org/drawingml/2006/chart" xmlns:dgm="http://schemas.openxmlformats.org/drawingml/2006/diagram" xmlns:o="urn:schemas-microsoft-com:office:office" xmlns:v="urn:schemas-microsoft-com:vml" xmlns:pvml="urn:schemas-microsoft-com:office:powerpoint" xmlns:com="http://schemas.openxmlformats.org/drawingml/2006/compatibility" xmlns:p14="http://schemas.microsoft.com/office/powerpoint/2010/main" xmlns:p15="http://schemas.microsoft.com/office/powerpoint/2012/main" xmlns:ahyp="http://schemas.microsoft.com/office/drawing/2018/hyperlinkcolor">
   <p:cSld>
     <p:spTree>
@@ -47174,7 +48019,7 @@
                 <a:cs typeface="Consolas"/>
                 <a:sym typeface="Consolas"/>
               </a:rPr>
-              <a:t>26 / 27</a:t>
+              <a:t>27 / 28</a:t>
             </a:r>
             <a:endParaRPr sz="1100"/>
           </a:p>
@@ -47188,7 +48033,7 @@
 </p:sld>
 </file>
 
-<file path=ppt/slides/slide27.xml><?xml version="1.0" encoding="utf-8"?>
+<file path=ppt/slides/slide28.xml><?xml version="1.0" encoding="utf-8"?>
 <p:sld xmlns:a="http://schemas.openxmlformats.org/drawingml/2006/main" xmlns:r="http://schemas.openxmlformats.org/officeDocument/2006/relationships" xmlns:mc="http://schemas.openxmlformats.org/markup-compatibility/2006" xmlns:mv="urn:schemas-microsoft-com:mac:vml" xmlns:p="http://schemas.openxmlformats.org/presentationml/2006/main" xmlns:c="http://schemas.openxmlformats.org/drawingml/2006/chart" xmlns:dgm="http://schemas.openxmlformats.org/drawingml/2006/diagram" xmlns:o="urn:schemas-microsoft-com:office:office" xmlns:v="urn:schemas-microsoft-com:vml" xmlns:pvml="urn:schemas-microsoft-com:office:powerpoint" xmlns:com="http://schemas.openxmlformats.org/drawingml/2006/compatibility" xmlns:p14="http://schemas.microsoft.com/office/powerpoint/2010/main" xmlns:p15="http://schemas.microsoft.com/office/powerpoint/2012/main" xmlns:ahyp="http://schemas.microsoft.com/office/drawing/2018/hyperlinkcolor">
   <p:cSld>
     <p:spTree>
@@ -48701,7 +49546,7 @@
                 <a:cs typeface="Consolas"/>
                 <a:sym typeface="Consolas"/>
               </a:rPr>
-              <a:t>03 / 27</a:t>
+              <a:t>03 / 28</a:t>
             </a:r>
             <a:endParaRPr sz="1100"/>
           </a:p>
@@ -48716,6 +49561,336 @@
 </file>
 
 <file path=ppt/slides/slide4.xml><?xml version="1.0" encoding="utf-8"?>
+<p:sld xmlns:a="http://schemas.openxmlformats.org/drawingml/2006/main" xmlns:p="http://schemas.openxmlformats.org/presentationml/2006/main" xmlns:r="http://schemas.openxmlformats.org/officeDocument/2006/relationships">
+  <p:cSld>
+    <p:spTree>
+      <p:nvGrpSpPr>
+        <p:cNvPr id="1" name=""/>
+        <p:cNvGrpSpPr/>
+        <p:nvPr/>
+      </p:nvGrpSpPr>
+      <p:grpSpPr/>
+      <p:sp>
+        <p:nvSpPr>
+          <p:cNvPr id="2" name="Rectangle 1"/>
+          <p:cNvSpPr/>
+          <p:nvPr/>
+        </p:nvSpPr>
+        <p:spPr>
+          <a:xfrm>
+            <a:off x="0" y="0"/>
+            <a:ext cx="9144000" cy="5143500"/>
+          </a:xfrm>
+          <a:prstGeom prst="rect">
+            <a:avLst/>
+          </a:prstGeom>
+          <a:solidFill>
+            <a:srgbClr val="FAF8F4"/>
+          </a:solidFill>
+          <a:ln>
+            <a:noFill/>
+          </a:ln>
+          <a:effectLst/>
+        </p:spPr>
+        <p:style>
+          <a:lnRef idx="1">
+            <a:schemeClr val="accent1"/>
+          </a:lnRef>
+          <a:fillRef idx="3">
+            <a:schemeClr val="accent1"/>
+          </a:fillRef>
+          <a:effectRef idx="2">
+            <a:schemeClr val="accent1"/>
+          </a:effectRef>
+          <a:fontRef idx="minor">
+            <a:schemeClr val="lt1"/>
+          </a:fontRef>
+        </p:style>
+        <p:txBody>
+          <a:bodyPr rtlCol="0" anchor="ctr"/>
+          <a:lstStyle/>
+          <a:p>
+            <a:pPr algn="ctr"/>
+          </a:p>
+        </p:txBody>
+      </p:sp>
+      <p:sp>
+        <p:nvSpPr>
+          <p:cNvPr id="3" name="TextBox 2"/>
+          <p:cNvSpPr txBox="1"/>
+          <p:nvPr/>
+        </p:nvSpPr>
+        <p:spPr>
+          <a:xfrm>
+            <a:off x="582930" y="425450"/>
+            <a:ext cx="7978140" cy="205740"/>
+          </a:xfrm>
+          <a:prstGeom prst="rect">
+            <a:avLst/>
+          </a:prstGeom>
+          <a:noFill/>
+        </p:spPr>
+        <p:txBody>
+          <a:bodyPr wrap="square" anchor="t" lIns="0" rIns="0" tIns="0" bIns="0">
+            <a:spAutoFit/>
+          </a:bodyPr>
+          <a:lstStyle/>
+          <a:p>
+            <a:pPr algn="l">
+              <a:spcAft>
+                <a:spcPts val="0"/>
+              </a:spcAft>
+            </a:pPr>
+            <a:r>
+              <a:rPr sz="800" b="1" i="0">
+                <a:solidFill>
+                  <a:srgbClr val="B45309"/>
+                </a:solidFill>
+                <a:latin typeface="Consolas"/>
+              </a:rPr>
+              <a:t>01  </a:t>
+            </a:r>
+            <a:r>
+              <a:rPr sz="800" b="0" i="0">
+                <a:solidFill>
+                  <a:srgbClr val="6B6B6B"/>
+                </a:solidFill>
+                <a:latin typeface="Consolas"/>
+              </a:rPr>
+              <a:t>THE APPROACH   ·   FROM RAW DATA TO DEPLOYED MODEL</a:t>
+            </a:r>
+          </a:p>
+        </p:txBody>
+      </p:sp>
+      <p:sp>
+        <p:nvSpPr>
+          <p:cNvPr id="4" name="TextBox 3"/>
+          <p:cNvSpPr txBox="1"/>
+          <p:nvPr/>
+        </p:nvSpPr>
+        <p:spPr>
+          <a:xfrm>
+            <a:off x="582930" y="699770"/>
+            <a:ext cx="7978140" cy="514350"/>
+          </a:xfrm>
+          <a:prstGeom prst="rect">
+            <a:avLst/>
+          </a:prstGeom>
+          <a:noFill/>
+        </p:spPr>
+        <p:txBody>
+          <a:bodyPr wrap="square" anchor="t" lIns="0" rIns="0" tIns="0" bIns="0">
+            <a:spAutoFit/>
+          </a:bodyPr>
+          <a:lstStyle/>
+          <a:p>
+            <a:pPr algn="l">
+              <a:lnSpc>
+                <a:spcPct val="100000"/>
+              </a:lnSpc>
+              <a:spcAft>
+                <a:spcPts val="0"/>
+              </a:spcAft>
+            </a:pPr>
+            <a:r>
+              <a:rPr sz="2400" b="0" i="0">
+                <a:solidFill>
+                  <a:srgbClr val="1A1A1A"/>
+                </a:solidFill>
+                <a:latin typeface="Georgia"/>
+              </a:rPr>
+              <a:t>The end-to-end workflow</a:t>
+            </a:r>
+          </a:p>
+        </p:txBody>
+      </p:sp>
+      <p:cxnSp>
+        <p:nvCxnSpPr>
+          <p:cNvPr id="5" name="Connector 4"/>
+          <p:cNvCxnSpPr/>
+          <p:nvPr/>
+        </p:nvCxnSpPr>
+        <p:spPr>
+          <a:xfrm>
+            <a:off x="582930" y="1248410"/>
+            <a:ext cx="7978140" cy="0"/>
+          </a:xfrm>
+          <a:prstGeom prst="line">
+            <a:avLst/>
+          </a:prstGeom>
+          <a:ln w="9525">
+            <a:solidFill>
+              <a:srgbClr val="D8D4CC"/>
+            </a:solidFill>
+          </a:ln>
+        </p:spPr>
+        <p:style>
+          <a:lnRef idx="2">
+            <a:schemeClr val="accent1"/>
+          </a:lnRef>
+          <a:fillRef idx="0">
+            <a:schemeClr val="accent1"/>
+          </a:fillRef>
+          <a:effectRef idx="1">
+            <a:schemeClr val="accent1"/>
+          </a:effectRef>
+          <a:fontRef idx="minor">
+            <a:schemeClr val="tx1"/>
+          </a:fontRef>
+        </p:style>
+      </p:cxnSp>
+      <p:pic>
+        <p:nvPicPr>
+          <p:cNvPr id="6" name="Picture 5" descr="workflow.png"/>
+          <p:cNvPicPr>
+            <a:picLocks noChangeAspect="1"/>
+          </p:cNvPicPr>
+          <p:nvPr/>
+        </p:nvPicPr>
+        <p:blipFill>
+          <a:blip r:embed="rId2"/>
+          <a:stretch>
+            <a:fillRect/>
+          </a:stretch>
+        </p:blipFill>
+        <p:spPr>
+          <a:xfrm>
+            <a:off x="1570892" y="1320800"/>
+            <a:ext cx="6002215" cy="3352800"/>
+          </a:xfrm>
+          <a:prstGeom prst="rect">
+            <a:avLst/>
+          </a:prstGeom>
+        </p:spPr>
+      </p:pic>
+      <p:cxnSp>
+        <p:nvCxnSpPr>
+          <p:cNvPr id="7" name="Connector 6"/>
+          <p:cNvCxnSpPr/>
+          <p:nvPr/>
+        </p:nvCxnSpPr>
+        <p:spPr>
+          <a:xfrm>
+            <a:off x="582930" y="4718050"/>
+            <a:ext cx="7978140" cy="0"/>
+          </a:xfrm>
+          <a:prstGeom prst="line">
+            <a:avLst/>
+          </a:prstGeom>
+          <a:ln w="9525">
+            <a:solidFill>
+              <a:srgbClr val="D8D4CC"/>
+            </a:solidFill>
+          </a:ln>
+        </p:spPr>
+        <p:style>
+          <a:lnRef idx="2">
+            <a:schemeClr val="accent1"/>
+          </a:lnRef>
+          <a:fillRef idx="0">
+            <a:schemeClr val="accent1"/>
+          </a:fillRef>
+          <a:effectRef idx="1">
+            <a:schemeClr val="accent1"/>
+          </a:effectRef>
+          <a:fontRef idx="minor">
+            <a:schemeClr val="tx1"/>
+          </a:fontRef>
+        </p:style>
+      </p:cxnSp>
+      <p:sp>
+        <p:nvSpPr>
+          <p:cNvPr id="8" name="TextBox 7"/>
+          <p:cNvSpPr txBox="1"/>
+          <p:nvPr/>
+        </p:nvSpPr>
+        <p:spPr>
+          <a:xfrm>
+            <a:off x="582930" y="4800600"/>
+            <a:ext cx="4800600" cy="171450"/>
+          </a:xfrm>
+          <a:prstGeom prst="rect">
+            <a:avLst/>
+          </a:prstGeom>
+          <a:noFill/>
+        </p:spPr>
+        <p:txBody>
+          <a:bodyPr wrap="square" anchor="t" lIns="0" rIns="0" tIns="0" bIns="0">
+            <a:spAutoFit/>
+          </a:bodyPr>
+          <a:lstStyle/>
+          <a:p>
+            <a:pPr algn="l">
+              <a:lnSpc>
+                <a:spcPct val="125000"/>
+              </a:lnSpc>
+              <a:spcAft>
+                <a:spcPts val="0"/>
+              </a:spcAft>
+            </a:pPr>
+            <a:r>
+              <a:rPr sz="600" b="0" i="0">
+                <a:solidFill>
+                  <a:srgbClr val="6B6B6B"/>
+                </a:solidFill>
+                <a:latin typeface="Consolas"/>
+              </a:rPr>
+              <a:t>CUSTOMER SEGMENTATION FOR TARGETED E-COMMERCE MARKETING</a:t>
+            </a:r>
+          </a:p>
+        </p:txBody>
+      </p:sp>
+      <p:sp>
+        <p:nvSpPr>
+          <p:cNvPr id="9" name="TextBox 8"/>
+          <p:cNvSpPr txBox="1"/>
+          <p:nvPr/>
+        </p:nvSpPr>
+        <p:spPr>
+          <a:xfrm>
+            <a:off x="7189470" y="4800600"/>
+            <a:ext cx="1371600" cy="171450"/>
+          </a:xfrm>
+          <a:prstGeom prst="rect">
+            <a:avLst/>
+          </a:prstGeom>
+          <a:noFill/>
+        </p:spPr>
+        <p:txBody>
+          <a:bodyPr wrap="square" anchor="t" lIns="0" rIns="0" tIns="0" bIns="0">
+            <a:spAutoFit/>
+          </a:bodyPr>
+          <a:lstStyle/>
+          <a:p>
+            <a:pPr algn="r">
+              <a:lnSpc>
+                <a:spcPct val="125000"/>
+              </a:lnSpc>
+              <a:spcAft>
+                <a:spcPts val="0"/>
+              </a:spcAft>
+            </a:pPr>
+            <a:r>
+              <a:rPr sz="600" b="0" i="0">
+                <a:solidFill>
+                  <a:srgbClr val="6B6B6B"/>
+                </a:solidFill>
+                <a:latin typeface="Consolas"/>
+              </a:rPr>
+              <a:t>04 / 28</a:t>
+            </a:r>
+          </a:p>
+        </p:txBody>
+      </p:sp>
+    </p:spTree>
+  </p:cSld>
+  <p:clrMapOvr>
+    <a:masterClrMapping/>
+  </p:clrMapOvr>
+</p:sld>
+</file>
+
+<file path=ppt/slides/slide5.xml><?xml version="1.0" encoding="utf-8"?>
 <p:sld xmlns:a="http://schemas.openxmlformats.org/drawingml/2006/main" xmlns:r="http://schemas.openxmlformats.org/officeDocument/2006/relationships" xmlns:mc="http://schemas.openxmlformats.org/markup-compatibility/2006" xmlns:mv="urn:schemas-microsoft-com:mac:vml" xmlns:p="http://schemas.openxmlformats.org/presentationml/2006/main" xmlns:c="http://schemas.openxmlformats.org/drawingml/2006/chart" xmlns:dgm="http://schemas.openxmlformats.org/drawingml/2006/diagram" xmlns:o="urn:schemas-microsoft-com:office:office" xmlns:v="urn:schemas-microsoft-com:vml" xmlns:pvml="urn:schemas-microsoft-com:office:powerpoint" xmlns:com="http://schemas.openxmlformats.org/drawingml/2006/compatibility" xmlns:p14="http://schemas.microsoft.com/office/powerpoint/2010/main" xmlns:p15="http://schemas.microsoft.com/office/powerpoint/2012/main" xmlns:ahyp="http://schemas.microsoft.com/office/drawing/2018/hyperlinkcolor">
   <p:cSld>
     <p:spTree>
@@ -49991,7 +51166,7 @@
                 <a:cs typeface="Consolas"/>
                 <a:sym typeface="Consolas"/>
               </a:rPr>
-              <a:t>04 / 27</a:t>
+              <a:t>05 / 28</a:t>
             </a:r>
             <a:endParaRPr sz="1100"/>
           </a:p>
@@ -50005,7 +51180,7 @@
 </p:sld>
 </file>
 
-<file path=ppt/slides/slide5.xml><?xml version="1.0" encoding="utf-8"?>
+<file path=ppt/slides/slide6.xml><?xml version="1.0" encoding="utf-8"?>
 <p:sld xmlns:a="http://schemas.openxmlformats.org/drawingml/2006/main" xmlns:r="http://schemas.openxmlformats.org/officeDocument/2006/relationships" xmlns:mc="http://schemas.openxmlformats.org/markup-compatibility/2006" xmlns:mv="urn:schemas-microsoft-com:mac:vml" xmlns:p="http://schemas.openxmlformats.org/presentationml/2006/main" xmlns:c="http://schemas.openxmlformats.org/drawingml/2006/chart" xmlns:dgm="http://schemas.openxmlformats.org/drawingml/2006/diagram" xmlns:o="urn:schemas-microsoft-com:office:office" xmlns:v="urn:schemas-microsoft-com:vml" xmlns:pvml="urn:schemas-microsoft-com:office:powerpoint" xmlns:com="http://schemas.openxmlformats.org/drawingml/2006/compatibility" xmlns:p14="http://schemas.microsoft.com/office/powerpoint/2010/main" xmlns:p15="http://schemas.microsoft.com/office/powerpoint/2012/main" xmlns:ahyp="http://schemas.microsoft.com/office/drawing/2018/hyperlinkcolor">
   <p:cSld>
     <p:spTree>
@@ -51690,7 +52865,7 @@
                 <a:cs typeface="Consolas"/>
                 <a:sym typeface="Consolas"/>
               </a:rPr>
-              <a:t>05 / 27</a:t>
+              <a:t>06 / 28</a:t>
             </a:r>
             <a:endParaRPr sz="1100"/>
           </a:p>
@@ -51704,7 +52879,7 @@
 </p:sld>
 </file>
 
-<file path=ppt/slides/slide6.xml><?xml version="1.0" encoding="utf-8"?>
+<file path=ppt/slides/slide7.xml><?xml version="1.0" encoding="utf-8"?>
 <p:sld xmlns:a="http://schemas.openxmlformats.org/drawingml/2006/main" xmlns:r="http://schemas.openxmlformats.org/officeDocument/2006/relationships" xmlns:mc="http://schemas.openxmlformats.org/markup-compatibility/2006" xmlns:mv="urn:schemas-microsoft-com:mac:vml" xmlns:p="http://schemas.openxmlformats.org/presentationml/2006/main" xmlns:c="http://schemas.openxmlformats.org/drawingml/2006/chart" xmlns:dgm="http://schemas.openxmlformats.org/drawingml/2006/diagram" xmlns:o="urn:schemas-microsoft-com:office:office" xmlns:v="urn:schemas-microsoft-com:vml" xmlns:pvml="urn:schemas-microsoft-com:office:powerpoint" xmlns:com="http://schemas.openxmlformats.org/drawingml/2006/compatibility" xmlns:p14="http://schemas.microsoft.com/office/powerpoint/2010/main" xmlns:p15="http://schemas.microsoft.com/office/powerpoint/2012/main" xmlns:ahyp="http://schemas.microsoft.com/office/drawing/2018/hyperlinkcolor">
   <p:cSld>
     <p:spTree>
@@ -53308,7 +54483,7 @@
                 <a:cs typeface="Consolas"/>
                 <a:sym typeface="Consolas"/>
               </a:rPr>
-              <a:t>06 / 27</a:t>
+              <a:t>07 / 28</a:t>
             </a:r>
             <a:endParaRPr sz="1100"/>
           </a:p>
@@ -53322,7 +54497,7 @@
 </p:sld>
 </file>
 
-<file path=ppt/slides/slide7.xml><?xml version="1.0" encoding="utf-8"?>
+<file path=ppt/slides/slide8.xml><?xml version="1.0" encoding="utf-8"?>
 <p:sld xmlns:a="http://schemas.openxmlformats.org/drawingml/2006/main" xmlns:r="http://schemas.openxmlformats.org/officeDocument/2006/relationships" xmlns:mc="http://schemas.openxmlformats.org/markup-compatibility/2006" xmlns:mv="urn:schemas-microsoft-com:mac:vml" xmlns:p="http://schemas.openxmlformats.org/presentationml/2006/main" xmlns:c="http://schemas.openxmlformats.org/drawingml/2006/chart" xmlns:dgm="http://schemas.openxmlformats.org/drawingml/2006/diagram" xmlns:o="urn:schemas-microsoft-com:office:office" xmlns:v="urn:schemas-microsoft-com:vml" xmlns:pvml="urn:schemas-microsoft-com:office:powerpoint" xmlns:com="http://schemas.openxmlformats.org/drawingml/2006/compatibility" xmlns:p14="http://schemas.microsoft.com/office/powerpoint/2010/main" xmlns:p15="http://schemas.microsoft.com/office/powerpoint/2012/main" xmlns:ahyp="http://schemas.microsoft.com/office/drawing/2018/hyperlinkcolor">
   <p:cSld>
     <p:spTree>
@@ -54874,7 +56049,7 @@
                 <a:cs typeface="Consolas"/>
                 <a:sym typeface="Consolas"/>
               </a:rPr>
-              <a:t>07 / 27</a:t>
+              <a:t>08 / 28</a:t>
             </a:r>
             <a:endParaRPr sz="1100"/>
           </a:p>
@@ -54888,7 +56063,7 @@
 </p:sld>
 </file>
 
-<file path=ppt/slides/slide8.xml><?xml version="1.0" encoding="utf-8"?>
+<file path=ppt/slides/slide9.xml><?xml version="1.0" encoding="utf-8"?>
 <p:sld xmlns:a="http://schemas.openxmlformats.org/drawingml/2006/main" xmlns:r="http://schemas.openxmlformats.org/officeDocument/2006/relationships" xmlns:mc="http://schemas.openxmlformats.org/markup-compatibility/2006" xmlns:mv="urn:schemas-microsoft-com:mac:vml" xmlns:p="http://schemas.openxmlformats.org/presentationml/2006/main" xmlns:c="http://schemas.openxmlformats.org/drawingml/2006/chart" xmlns:dgm="http://schemas.openxmlformats.org/drawingml/2006/diagram" xmlns:o="urn:schemas-microsoft-com:office:office" xmlns:v="urn:schemas-microsoft-com:vml" xmlns:pvml="urn:schemas-microsoft-com:office:powerpoint" xmlns:com="http://schemas.openxmlformats.org/drawingml/2006/compatibility" xmlns:p14="http://schemas.microsoft.com/office/powerpoint/2010/main" xmlns:p15="http://schemas.microsoft.com/office/powerpoint/2012/main" xmlns:ahyp="http://schemas.microsoft.com/office/drawing/2018/hyperlinkcolor">
   <p:cSld>
     <p:spTree>
@@ -55598,769 +56773,7 @@
                 <a:cs typeface="Consolas"/>
                 <a:sym typeface="Consolas"/>
               </a:rPr>
-              <a:t>08 / 27</a:t>
-            </a:r>
-            <a:endParaRPr sz="1100"/>
-          </a:p>
-        </p:txBody>
-      </p:sp>
-    </p:spTree>
-  </p:cSld>
-  <p:clrMapOvr>
-    <a:masterClrMapping/>
-  </p:clrMapOvr>
-</p:sld>
-</file>
-
-<file path=ppt/slides/slide9.xml><?xml version="1.0" encoding="utf-8"?>
-<p:sld xmlns:a="http://schemas.openxmlformats.org/drawingml/2006/main" xmlns:r="http://schemas.openxmlformats.org/officeDocument/2006/relationships" xmlns:mc="http://schemas.openxmlformats.org/markup-compatibility/2006" xmlns:mv="urn:schemas-microsoft-com:mac:vml" xmlns:p="http://schemas.openxmlformats.org/presentationml/2006/main" xmlns:c="http://schemas.openxmlformats.org/drawingml/2006/chart" xmlns:dgm="http://schemas.openxmlformats.org/drawingml/2006/diagram" xmlns:o="urn:schemas-microsoft-com:office:office" xmlns:v="urn:schemas-microsoft-com:vml" xmlns:pvml="urn:schemas-microsoft-com:office:powerpoint" xmlns:com="http://schemas.openxmlformats.org/drawingml/2006/compatibility" xmlns:p14="http://schemas.microsoft.com/office/powerpoint/2010/main" xmlns:p15="http://schemas.microsoft.com/office/powerpoint/2012/main" xmlns:ahyp="http://schemas.microsoft.com/office/drawing/2018/hyperlinkcolor">
-  <p:cSld>
-    <p:spTree>
-      <p:nvGrpSpPr>
-        <p:cNvPr id="363" name="Shape 363"/>
-        <p:cNvGrpSpPr/>
-        <p:nvPr/>
-      </p:nvGrpSpPr>
-      <p:grpSpPr>
-        <a:xfrm>
-          <a:off x="0" y="0"/>
-          <a:ext cx="0" cy="0"/>
-          <a:chOff x="0" y="0"/>
-          <a:chExt cx="0" cy="0"/>
-        </a:xfrm>
-      </p:grpSpPr>
-      <p:sp>
-        <p:nvSpPr>
-          <p:cNvPr id="364" name="Google Shape;364;p33"/>
-          <p:cNvSpPr/>
-          <p:nvPr/>
-        </p:nvSpPr>
-        <p:spPr>
-          <a:xfrm>
-            <a:off x="0" y="0"/>
-            <a:ext cx="9144015" cy="5143500"/>
-          </a:xfrm>
-          <a:prstGeom prst="rect">
-            <a:avLst/>
-          </a:prstGeom>
-          <a:solidFill>
-            <a:srgbClr val="FAF8F4"/>
-          </a:solidFill>
-          <a:ln>
-            <a:noFill/>
-          </a:ln>
-        </p:spPr>
-        <p:txBody>
-          <a:bodyPr anchorCtr="0" anchor="ctr" bIns="34275" lIns="68575" spcFirstLastPara="1" rIns="68575" wrap="square" tIns="34275">
-            <a:noAutofit/>
-          </a:bodyPr>
-          <a:lstStyle/>
-          <a:p>
-            <a:pPr indent="0" lvl="0" marL="0" marR="0" rtl="0" algn="ctr">
-              <a:spcBef>
-                <a:spcPts val="0"/>
-              </a:spcBef>
-              <a:spcAft>
-                <a:spcPts val="0"/>
-              </a:spcAft>
-              <a:buNone/>
-            </a:pPr>
-            <a:r>
-              <a:t/>
-            </a:r>
-            <a:endParaRPr sz="1400">
-              <a:solidFill>
-                <a:schemeClr val="dk1"/>
-              </a:solidFill>
-              <a:latin typeface="Calibri"/>
-              <a:ea typeface="Calibri"/>
-              <a:cs typeface="Calibri"/>
-              <a:sym typeface="Calibri"/>
-            </a:endParaRPr>
-          </a:p>
-        </p:txBody>
-      </p:sp>
-      <p:sp>
-        <p:nvSpPr>
-          <p:cNvPr id="365" name="Google Shape;365;p33"/>
-          <p:cNvSpPr txBox="1"/>
-          <p:nvPr/>
-        </p:nvSpPr>
-        <p:spPr>
-          <a:xfrm>
-            <a:off x="582946" y="425196"/>
-            <a:ext cx="7978124" cy="205740"/>
-          </a:xfrm>
-          <a:prstGeom prst="rect">
-            <a:avLst/>
-          </a:prstGeom>
-          <a:noFill/>
-          <a:ln>
-            <a:noFill/>
-          </a:ln>
-        </p:spPr>
-        <p:txBody>
-          <a:bodyPr anchorCtr="0" anchor="t" bIns="0" lIns="0" spcFirstLastPara="1" rIns="0" wrap="square" tIns="0">
-            <a:spAutoFit/>
-          </a:bodyPr>
-          <a:lstStyle/>
-          <a:p>
-            <a:pPr indent="0" lvl="0" marL="0" marR="0" rtl="0" algn="l">
-              <a:spcBef>
-                <a:spcPts val="0"/>
-              </a:spcBef>
-              <a:spcAft>
-                <a:spcPts val="0"/>
-              </a:spcAft>
-              <a:buNone/>
-            </a:pPr>
-            <a:r>
-              <a:rPr b="1" lang="en" sz="800">
-                <a:solidFill>
-                  <a:srgbClr val="B45309"/>
-                </a:solidFill>
-                <a:latin typeface="Consolas"/>
-                <a:ea typeface="Consolas"/>
-                <a:cs typeface="Consolas"/>
-                <a:sym typeface="Consolas"/>
-              </a:rPr>
-              <a:t>02  </a:t>
-            </a:r>
-            <a:r>
-              <a:rPr lang="en" sz="800">
-                <a:solidFill>
-                  <a:srgbClr val="6B6B6B"/>
-                </a:solidFill>
-                <a:latin typeface="Consolas"/>
-                <a:ea typeface="Consolas"/>
-                <a:cs typeface="Consolas"/>
-                <a:sym typeface="Consolas"/>
-              </a:rPr>
-              <a:t>MODEL SELECTION   ·   ELBOW, SILHOUETTE, AND A JUDGEMENT CALL</a:t>
-            </a:r>
-            <a:endParaRPr sz="1100"/>
-          </a:p>
-        </p:txBody>
-      </p:sp>
-      <p:sp>
-        <p:nvSpPr>
-          <p:cNvPr id="366" name="Google Shape;366;p33"/>
-          <p:cNvSpPr txBox="1"/>
-          <p:nvPr/>
-        </p:nvSpPr>
-        <p:spPr>
-          <a:xfrm>
-            <a:off x="582946" y="699516"/>
-            <a:ext cx="7978124" cy="514350"/>
-          </a:xfrm>
-          <a:prstGeom prst="rect">
-            <a:avLst/>
-          </a:prstGeom>
-          <a:noFill/>
-          <a:ln>
-            <a:noFill/>
-          </a:ln>
-        </p:spPr>
-        <p:txBody>
-          <a:bodyPr anchorCtr="0" anchor="t" bIns="0" lIns="0" spcFirstLastPara="1" rIns="0" wrap="square" tIns="0">
-            <a:spAutoFit/>
-          </a:bodyPr>
-          <a:lstStyle/>
-          <a:p>
-            <a:pPr indent="0" lvl="0" marL="0" marR="0" rtl="0" algn="l">
-              <a:lnSpc>
-                <a:spcPct val="100000"/>
-              </a:lnSpc>
-              <a:spcBef>
-                <a:spcPts val="0"/>
-              </a:spcBef>
-              <a:spcAft>
-                <a:spcPts val="0"/>
-              </a:spcAft>
-              <a:buNone/>
-            </a:pPr>
-            <a:r>
-              <a:rPr b="0" i="0" lang="en" sz="2400">
-                <a:solidFill>
-                  <a:srgbClr val="1A1A1A"/>
-                </a:solidFill>
-                <a:latin typeface="Georgia"/>
-                <a:ea typeface="Georgia"/>
-                <a:cs typeface="Georgia"/>
-                <a:sym typeface="Georgia"/>
-              </a:rPr>
-              <a:t>Why K = 4</a:t>
-            </a:r>
-            <a:endParaRPr sz="1100"/>
-          </a:p>
-        </p:txBody>
-      </p:sp>
-      <p:cxnSp>
-        <p:nvCxnSpPr>
-          <p:cNvPr id="367" name="Google Shape;367;p33"/>
-          <p:cNvCxnSpPr/>
-          <p:nvPr/>
-        </p:nvCxnSpPr>
-        <p:spPr>
-          <a:xfrm>
-            <a:off x="582946" y="1248156"/>
-            <a:ext cx="7978124" cy="0"/>
-          </a:xfrm>
-          <a:prstGeom prst="straightConnector1">
-            <a:avLst/>
-          </a:prstGeom>
-          <a:noFill/>
-          <a:ln cap="flat" cmpd="sng" w="9525">
-            <a:solidFill>
-              <a:srgbClr val="D8D4CC"/>
-            </a:solidFill>
-            <a:prstDash val="solid"/>
-            <a:round/>
-            <a:headEnd len="sm" w="sm" type="none"/>
-            <a:tailEnd len="sm" w="sm" type="none"/>
-          </a:ln>
-          <a:effectLst>
-            <a:outerShdw blurRad="40000" rotWithShape="0" dir="5400000" dist="20000">
-              <a:srgbClr val="000000">
-                <a:alpha val="38039"/>
-              </a:srgbClr>
-            </a:outerShdw>
-          </a:effectLst>
-        </p:spPr>
-      </p:cxnSp>
-      <p:pic>
-        <p:nvPicPr>
-          <p:cNvPr descr="elbow.png" id="368" name="Google Shape;368;p33"/>
-          <p:cNvPicPr preferRelativeResize="0"/>
-          <p:nvPr/>
-        </p:nvPicPr>
-        <p:blipFill rotWithShape="1">
-          <a:blip r:embed="rId3">
-            <a:alphaModFix/>
-          </a:blip>
-          <a:srcRect b="0" l="0" r="0" t="0"/>
-          <a:stretch/>
-        </p:blipFill>
-        <p:spPr>
-          <a:xfrm>
-            <a:off x="582946" y="1385316"/>
-            <a:ext cx="3703320" cy="1706999"/>
-          </a:xfrm>
-          <a:prstGeom prst="rect">
-            <a:avLst/>
-          </a:prstGeom>
-          <a:noFill/>
-          <a:ln>
-            <a:noFill/>
-          </a:ln>
-        </p:spPr>
-      </p:pic>
-      <p:pic>
-        <p:nvPicPr>
-          <p:cNvPr descr="silhouette.png" id="369" name="Google Shape;369;p33"/>
-          <p:cNvPicPr preferRelativeResize="0"/>
-          <p:nvPr/>
-        </p:nvPicPr>
-        <p:blipFill rotWithShape="1">
-          <a:blip r:embed="rId4">
-            <a:alphaModFix/>
-          </a:blip>
-          <a:srcRect b="0" l="0" r="0" t="0"/>
-          <a:stretch/>
-        </p:blipFill>
-        <p:spPr>
-          <a:xfrm>
-            <a:off x="4526401" y="1385316"/>
-            <a:ext cx="3703320" cy="1706999"/>
-          </a:xfrm>
-          <a:prstGeom prst="rect">
-            <a:avLst/>
-          </a:prstGeom>
-          <a:noFill/>
-          <a:ln>
-            <a:noFill/>
-          </a:ln>
-        </p:spPr>
-      </p:pic>
-      <p:sp>
-        <p:nvSpPr>
-          <p:cNvPr id="370" name="Google Shape;370;p33"/>
-          <p:cNvSpPr/>
-          <p:nvPr/>
-        </p:nvSpPr>
-        <p:spPr>
-          <a:xfrm>
-            <a:off x="582946" y="3195828"/>
-            <a:ext cx="7978124" cy="1440180"/>
-          </a:xfrm>
-          <a:prstGeom prst="rect">
-            <a:avLst/>
-          </a:prstGeom>
-          <a:solidFill>
-            <a:srgbClr val="F0ECE4"/>
-          </a:solidFill>
-          <a:ln>
-            <a:noFill/>
-          </a:ln>
-        </p:spPr>
-        <p:txBody>
-          <a:bodyPr anchorCtr="0" anchor="ctr" bIns="34275" lIns="68575" spcFirstLastPara="1" rIns="68575" wrap="square" tIns="34275">
-            <a:noAutofit/>
-          </a:bodyPr>
-          <a:lstStyle/>
-          <a:p>
-            <a:pPr indent="0" lvl="0" marL="0" marR="0" rtl="0" algn="ctr">
-              <a:spcBef>
-                <a:spcPts val="0"/>
-              </a:spcBef>
-              <a:spcAft>
-                <a:spcPts val="0"/>
-              </a:spcAft>
-              <a:buNone/>
-            </a:pPr>
-            <a:r>
-              <a:t/>
-            </a:r>
-            <a:endParaRPr sz="1400">
-              <a:solidFill>
-                <a:schemeClr val="dk1"/>
-              </a:solidFill>
-              <a:latin typeface="Calibri"/>
-              <a:ea typeface="Calibri"/>
-              <a:cs typeface="Calibri"/>
-              <a:sym typeface="Calibri"/>
-            </a:endParaRPr>
-          </a:p>
-        </p:txBody>
-      </p:sp>
-      <p:cxnSp>
-        <p:nvCxnSpPr>
-          <p:cNvPr id="371" name="Google Shape;371;p33"/>
-          <p:cNvCxnSpPr/>
-          <p:nvPr/>
-        </p:nvCxnSpPr>
-        <p:spPr>
-          <a:xfrm>
-            <a:off x="582946" y="3195828"/>
-            <a:ext cx="7978124" cy="0"/>
-          </a:xfrm>
-          <a:prstGeom prst="straightConnector1">
-            <a:avLst/>
-          </a:prstGeom>
-          <a:noFill/>
-          <a:ln cap="flat" cmpd="sng" w="28575">
-            <a:solidFill>
-              <a:srgbClr val="B45309"/>
-            </a:solidFill>
-            <a:prstDash val="solid"/>
-            <a:round/>
-            <a:headEnd len="sm" w="sm" type="none"/>
-            <a:tailEnd len="sm" w="sm" type="none"/>
-          </a:ln>
-          <a:effectLst>
-            <a:outerShdw blurRad="40000" rotWithShape="0" dir="5400000" dist="20000">
-              <a:srgbClr val="000000">
-                <a:alpha val="38039"/>
-              </a:srgbClr>
-            </a:outerShdw>
-          </a:effectLst>
-        </p:spPr>
-      </p:cxnSp>
-      <p:sp>
-        <p:nvSpPr>
-          <p:cNvPr id="372" name="Google Shape;372;p33"/>
-          <p:cNvSpPr txBox="1"/>
-          <p:nvPr/>
-        </p:nvSpPr>
-        <p:spPr>
-          <a:xfrm>
-            <a:off x="788691" y="3346704"/>
-            <a:ext cx="2057455" cy="205740"/>
-          </a:xfrm>
-          <a:prstGeom prst="rect">
-            <a:avLst/>
-          </a:prstGeom>
-          <a:noFill/>
-          <a:ln>
-            <a:noFill/>
-          </a:ln>
-        </p:spPr>
-        <p:txBody>
-          <a:bodyPr anchorCtr="0" anchor="t" bIns="0" lIns="0" spcFirstLastPara="1" rIns="0" wrap="square" tIns="0">
-            <a:spAutoFit/>
-          </a:bodyPr>
-          <a:lstStyle/>
-          <a:p>
-            <a:pPr indent="0" lvl="0" marL="0" marR="0" rtl="0" algn="l">
-              <a:lnSpc>
-                <a:spcPct val="125000"/>
-              </a:lnSpc>
-              <a:spcBef>
-                <a:spcPts val="0"/>
-              </a:spcBef>
-              <a:spcAft>
-                <a:spcPts val="0"/>
-              </a:spcAft>
-              <a:buNone/>
-            </a:pPr>
-            <a:r>
-              <a:rPr b="0" i="0" lang="en" sz="700">
-                <a:solidFill>
-                  <a:srgbClr val="B45309"/>
-                </a:solidFill>
-                <a:latin typeface="Consolas"/>
-                <a:ea typeface="Consolas"/>
-                <a:cs typeface="Consolas"/>
-                <a:sym typeface="Consolas"/>
-              </a:rPr>
-              <a:t>THE HONEST ANSWER</a:t>
-            </a:r>
-            <a:endParaRPr sz="1100"/>
-          </a:p>
-        </p:txBody>
-      </p:sp>
-      <p:sp>
-        <p:nvSpPr>
-          <p:cNvPr id="373" name="Google Shape;373;p33"/>
-          <p:cNvSpPr txBox="1"/>
-          <p:nvPr/>
-        </p:nvSpPr>
-        <p:spPr>
-          <a:xfrm>
-            <a:off x="788691" y="3593592"/>
-            <a:ext cx="3600546" cy="274320"/>
-          </a:xfrm>
-          <a:prstGeom prst="rect">
-            <a:avLst/>
-          </a:prstGeom>
-          <a:noFill/>
-          <a:ln>
-            <a:noFill/>
-          </a:ln>
-        </p:spPr>
-        <p:txBody>
-          <a:bodyPr anchorCtr="0" anchor="t" bIns="0" lIns="0" spcFirstLastPara="1" rIns="0" wrap="square" tIns="0">
-            <a:spAutoFit/>
-          </a:bodyPr>
-          <a:lstStyle/>
-          <a:p>
-            <a:pPr indent="0" lvl="0" marL="0" marR="0" rtl="0" algn="l">
-              <a:lnSpc>
-                <a:spcPct val="124000"/>
-              </a:lnSpc>
-              <a:spcBef>
-                <a:spcPts val="0"/>
-              </a:spcBef>
-              <a:spcAft>
-                <a:spcPts val="0"/>
-              </a:spcAft>
-              <a:buNone/>
-            </a:pPr>
-            <a:r>
-              <a:rPr b="1" lang="en" sz="900">
-                <a:solidFill>
-                  <a:srgbClr val="B45309"/>
-                </a:solidFill>
-                <a:latin typeface="Calibri"/>
-                <a:ea typeface="Calibri"/>
-                <a:cs typeface="Calibri"/>
-                <a:sym typeface="Calibri"/>
-              </a:rPr>
-              <a:t>— </a:t>
-            </a:r>
-            <a:r>
-              <a:rPr lang="en" sz="900">
-                <a:solidFill>
-                  <a:srgbClr val="1A1A1A"/>
-                </a:solidFill>
-                <a:latin typeface="Calibri"/>
-                <a:ea typeface="Calibri"/>
-                <a:cs typeface="Calibri"/>
-                <a:sym typeface="Calibri"/>
-              </a:rPr>
-              <a:t>Silhouette actually peaks at K = 2 (0.432), not at K = 4 (0.337).</a:t>
-            </a:r>
-            <a:endParaRPr sz="1100"/>
-          </a:p>
-          <a:p>
-            <a:pPr indent="0" lvl="0" marL="0" marR="0" rtl="0" algn="l">
-              <a:lnSpc>
-                <a:spcPct val="124000"/>
-              </a:lnSpc>
-              <a:spcBef>
-                <a:spcPts val="400"/>
-              </a:spcBef>
-              <a:spcAft>
-                <a:spcPts val="0"/>
-              </a:spcAft>
-              <a:buNone/>
-            </a:pPr>
-            <a:r>
-              <a:rPr b="1" lang="en" sz="900">
-                <a:solidFill>
-                  <a:srgbClr val="B45309"/>
-                </a:solidFill>
-                <a:latin typeface="Calibri"/>
-                <a:ea typeface="Calibri"/>
-                <a:cs typeface="Calibri"/>
-                <a:sym typeface="Calibri"/>
-              </a:rPr>
-              <a:t>— </a:t>
-            </a:r>
-            <a:r>
-              <a:rPr lang="en" sz="900">
-                <a:solidFill>
-                  <a:srgbClr val="1A1A1A"/>
-                </a:solidFill>
-                <a:latin typeface="Calibri"/>
-                <a:ea typeface="Calibri"/>
-                <a:cs typeface="Calibri"/>
-                <a:sym typeface="Calibri"/>
-              </a:rPr>
-              <a:t>It rewards few, well-separated blobs — but RFM behaviour is a continuum, so it will nearly always favour the smallest K.</a:t>
-            </a:r>
-            <a:endParaRPr sz="1100"/>
-          </a:p>
-        </p:txBody>
-      </p:sp>
-      <p:sp>
-        <p:nvSpPr>
-          <p:cNvPr id="374" name="Google Shape;374;p33"/>
-          <p:cNvSpPr txBox="1"/>
-          <p:nvPr/>
-        </p:nvSpPr>
-        <p:spPr>
-          <a:xfrm>
-            <a:off x="4766437" y="3593592"/>
-            <a:ext cx="3600546" cy="274320"/>
-          </a:xfrm>
-          <a:prstGeom prst="rect">
-            <a:avLst/>
-          </a:prstGeom>
-          <a:noFill/>
-          <a:ln>
-            <a:noFill/>
-          </a:ln>
-        </p:spPr>
-        <p:txBody>
-          <a:bodyPr anchorCtr="0" anchor="t" bIns="0" lIns="0" spcFirstLastPara="1" rIns="0" wrap="square" tIns="0">
-            <a:spAutoFit/>
-          </a:bodyPr>
-          <a:lstStyle/>
-          <a:p>
-            <a:pPr indent="0" lvl="0" marL="0" marR="0" rtl="0" algn="l">
-              <a:lnSpc>
-                <a:spcPct val="124000"/>
-              </a:lnSpc>
-              <a:spcBef>
-                <a:spcPts val="0"/>
-              </a:spcBef>
-              <a:spcAft>
-                <a:spcPts val="0"/>
-              </a:spcAft>
-              <a:buNone/>
-            </a:pPr>
-            <a:r>
-              <a:rPr b="1" lang="en" sz="900">
-                <a:solidFill>
-                  <a:srgbClr val="B45309"/>
-                </a:solidFill>
-                <a:latin typeface="Calibri"/>
-                <a:ea typeface="Calibri"/>
-                <a:cs typeface="Calibri"/>
-                <a:sym typeface="Calibri"/>
-              </a:rPr>
-              <a:t>— </a:t>
-            </a:r>
-            <a:r>
-              <a:rPr lang="en" sz="900">
-                <a:solidFill>
-                  <a:srgbClr val="1A1A1A"/>
-                </a:solidFill>
-                <a:latin typeface="Calibri"/>
-                <a:ea typeface="Calibri"/>
-                <a:cs typeface="Calibri"/>
-                <a:sym typeface="Calibri"/>
-              </a:rPr>
-              <a:t>K = 2 only separates 'active' from 'inactive' — not something marketing can act on differently.</a:t>
-            </a:r>
-            <a:endParaRPr sz="1100"/>
-          </a:p>
-          <a:p>
-            <a:pPr indent="0" lvl="0" marL="0" marR="0" rtl="0" algn="l">
-              <a:lnSpc>
-                <a:spcPct val="124000"/>
-              </a:lnSpc>
-              <a:spcBef>
-                <a:spcPts val="400"/>
-              </a:spcBef>
-              <a:spcAft>
-                <a:spcPts val="0"/>
-              </a:spcAft>
-              <a:buNone/>
-            </a:pPr>
-            <a:r>
-              <a:rPr b="1" lang="en" sz="900">
-                <a:solidFill>
-                  <a:srgbClr val="B45309"/>
-                </a:solidFill>
-                <a:latin typeface="Calibri"/>
-                <a:ea typeface="Calibri"/>
-                <a:cs typeface="Calibri"/>
-                <a:sym typeface="Calibri"/>
-              </a:rPr>
-              <a:t>— </a:t>
-            </a:r>
-            <a:r>
-              <a:rPr lang="en" sz="900">
-                <a:solidFill>
-                  <a:srgbClr val="1A1A1A"/>
-                </a:solidFill>
-                <a:latin typeface="Calibri"/>
-                <a:ea typeface="Calibri"/>
-                <a:cs typeface="Calibri"/>
-                <a:sym typeface="Calibri"/>
-              </a:rPr>
-              <a:t>K = 4 keeps a reasonable score and recovers the four standard RFM segments. Chosen for actionability, sanity-checked statistically.</a:t>
-            </a:r>
-            <a:endParaRPr sz="1100"/>
-          </a:p>
-        </p:txBody>
-      </p:sp>
-      <p:cxnSp>
-        <p:nvCxnSpPr>
-          <p:cNvPr id="375" name="Google Shape;375;p33"/>
-          <p:cNvCxnSpPr/>
-          <p:nvPr/>
-        </p:nvCxnSpPr>
-        <p:spPr>
-          <a:xfrm>
-            <a:off x="582946" y="4718304"/>
-            <a:ext cx="7978124" cy="0"/>
-          </a:xfrm>
-          <a:prstGeom prst="straightConnector1">
-            <a:avLst/>
-          </a:prstGeom>
-          <a:noFill/>
-          <a:ln cap="flat" cmpd="sng" w="9525">
-            <a:solidFill>
-              <a:srgbClr val="D8D4CC"/>
-            </a:solidFill>
-            <a:prstDash val="solid"/>
-            <a:round/>
-            <a:headEnd len="sm" w="sm" type="none"/>
-            <a:tailEnd len="sm" w="sm" type="none"/>
-          </a:ln>
-          <a:effectLst>
-            <a:outerShdw blurRad="40000" rotWithShape="0" dir="5400000" dist="20000">
-              <a:srgbClr val="000000">
-                <a:alpha val="38039"/>
-              </a:srgbClr>
-            </a:outerShdw>
-          </a:effectLst>
-        </p:spPr>
-      </p:cxnSp>
-      <p:sp>
-        <p:nvSpPr>
-          <p:cNvPr id="376" name="Google Shape;376;p33"/>
-          <p:cNvSpPr txBox="1"/>
-          <p:nvPr/>
-        </p:nvSpPr>
-        <p:spPr>
-          <a:xfrm>
-            <a:off x="582946" y="4800600"/>
-            <a:ext cx="4800728" cy="171450"/>
-          </a:xfrm>
-          <a:prstGeom prst="rect">
-            <a:avLst/>
-          </a:prstGeom>
-          <a:noFill/>
-          <a:ln>
-            <a:noFill/>
-          </a:ln>
-        </p:spPr>
-        <p:txBody>
-          <a:bodyPr anchorCtr="0" anchor="t" bIns="0" lIns="0" spcFirstLastPara="1" rIns="0" wrap="square" tIns="0">
-            <a:spAutoFit/>
-          </a:bodyPr>
-          <a:lstStyle/>
-          <a:p>
-            <a:pPr indent="0" lvl="0" marL="0" marR="0" rtl="0" algn="l">
-              <a:lnSpc>
-                <a:spcPct val="125000"/>
-              </a:lnSpc>
-              <a:spcBef>
-                <a:spcPts val="0"/>
-              </a:spcBef>
-              <a:spcAft>
-                <a:spcPts val="0"/>
-              </a:spcAft>
-              <a:buNone/>
-            </a:pPr>
-            <a:r>
-              <a:rPr b="0" i="0" lang="en" sz="600">
-                <a:solidFill>
-                  <a:srgbClr val="6B6B6B"/>
-                </a:solidFill>
-                <a:latin typeface="Consolas"/>
-                <a:ea typeface="Consolas"/>
-                <a:cs typeface="Consolas"/>
-                <a:sym typeface="Consolas"/>
-              </a:rPr>
-              <a:t>CUSTOMER SEGMENTATION FOR TARGETED E-COMMERCE MARKETING</a:t>
-            </a:r>
-            <a:endParaRPr sz="1100"/>
-          </a:p>
-        </p:txBody>
-      </p:sp>
-      <p:sp>
-        <p:nvSpPr>
-          <p:cNvPr id="377" name="Google Shape;377;p33"/>
-          <p:cNvSpPr txBox="1"/>
-          <p:nvPr/>
-        </p:nvSpPr>
-        <p:spPr>
-          <a:xfrm>
-            <a:off x="7189433" y="4800600"/>
-            <a:ext cx="1371637" cy="171450"/>
-          </a:xfrm>
-          <a:prstGeom prst="rect">
-            <a:avLst/>
-          </a:prstGeom>
-          <a:noFill/>
-          <a:ln>
-            <a:noFill/>
-          </a:ln>
-        </p:spPr>
-        <p:txBody>
-          <a:bodyPr anchorCtr="0" anchor="t" bIns="0" lIns="0" spcFirstLastPara="1" rIns="0" wrap="square" tIns="0">
-            <a:spAutoFit/>
-          </a:bodyPr>
-          <a:lstStyle/>
-          <a:p>
-            <a:pPr indent="0" lvl="0" marL="0" marR="0" rtl="0" algn="r">
-              <a:lnSpc>
-                <a:spcPct val="125000"/>
-              </a:lnSpc>
-              <a:spcBef>
-                <a:spcPts val="0"/>
-              </a:spcBef>
-              <a:spcAft>
-                <a:spcPts val="0"/>
-              </a:spcAft>
-              <a:buNone/>
-            </a:pPr>
-            <a:r>
-              <a:rPr b="0" i="0" lang="en" sz="600">
-                <a:solidFill>
-                  <a:srgbClr val="6B6B6B"/>
-                </a:solidFill>
-                <a:latin typeface="Consolas"/>
-                <a:ea typeface="Consolas"/>
-                <a:cs typeface="Consolas"/>
-                <a:sym typeface="Consolas"/>
-              </a:rPr>
-              <a:t>09 / 27</a:t>
+              <a:t>09 / 28</a:t>
             </a:r>
             <a:endParaRPr sz="1100"/>
           </a:p>
